--- a/brazils_road_back_presentation.pptx
+++ b/brazils_road_back_presentation.pptx
@@ -4,6 +4,9 @@
   <p:sldMasterIdLst>
     <p:sldMasterId id="2147483648" r:id="rId1"/>
   </p:sldMasterIdLst>
+  <p:notesMasterIdLst>
+    <p:notesMasterId r:id="rId11"/>
+  </p:notesMasterIdLst>
   <p:sldIdLst>
     <p:sldId id="256" r:id="rId2"/>
     <p:sldId id="257" r:id="rId3"/>
@@ -13,11 +16,9 @@
     <p:sldId id="261" r:id="rId7"/>
     <p:sldId id="262" r:id="rId8"/>
     <p:sldId id="263" r:id="rId9"/>
+    <p:sldId id="264" r:id="rId10"/>
   </p:sldIdLst>
-  <p:notesMasterIdLst>
-    <p:notesMasterId r:id="rId10"/>
-  </p:notesMasterIdLst>
-  <p:sldSz cx="9144000" cy="5143500"/>
+  <p:sldSz cx="9144000" cy="5143500" type="screen16x9"/>
   <p:notesSz cx="5143500" cy="9144000"/>
   <p:defaultTextStyle>
     <a:lvl1pPr marL="0" algn="l" defTabSz="914400" rtl="0" eaLnBrk="1" latinLnBrk="0" hangingPunct="1">
@@ -111,6 +112,11 @@
       </a:defRPr>
     </a:lvl9pPr>
   </p:defaultTextStyle>
+  <p:extLst>
+    <p:ext uri="{EFAFB233-063F-42B5-8137-9DF3F51BA10A}">
+      <p15:sldGuideLst xmlns:p15="http://schemas.microsoft.com/office/powerpoint/2012/main"/>
+    </p:ext>
+  </p:extLst>
 </p:presentation>
 </file>
 
@@ -136,234 +142,10 @@
           <a:chExt cx="0" cy="0"/>
         </a:xfrm>
       </p:grpSpPr>
-      <p:sp>
-        <p:nvSpPr>
-          <p:cNvPr id="2" name="Header Placeholder 1"/>
-          <p:cNvSpPr>
-            <a:spLocks noGrp="1"/>
-          </p:cNvSpPr>
-          <p:nvPr>
-            <p:ph type="hdr" sz="quarter"/>
-          </p:nvPr>
-        </p:nvSpPr>
-        <p:spPr>
-          <a:xfrm>
-            <a:off x="0" y="0"/>
-            <a:ext cx="2971800" cy="458788"/>
-          </a:xfrm>
-          <a:prstGeom prst="rect">
-            <a:avLst/>
-          </a:prstGeom>
-        </p:spPr>
-        <p:txBody>
-          <a:bodyPr vert="horz" lIns="91440" tIns="45720" rIns="91440" bIns="45720" rtlCol="0"/>
-          <a:lstStyle>
-            <a:lvl1pPr algn="l">
-              <a:defRPr sz="1200"/>
-            </a:lvl1pPr>
-          </a:lstStyle>
-          <a:p>
-            <a:endParaRPr lang="en-US"/>
-          </a:p>
-        </p:txBody>
-      </p:sp>
-      <p:sp>
-        <p:nvSpPr>
-          <p:cNvPr id="3" name="Date Placeholder 2"/>
-          <p:cNvSpPr>
-            <a:spLocks noGrp="1"/>
-          </p:cNvSpPr>
-          <p:nvPr>
-            <p:ph type="dt" idx="1"/>
-          </p:nvPr>
-        </p:nvSpPr>
-        <p:spPr>
-          <a:xfrm>
-            <a:off x="3884613" y="0"/>
-            <a:ext cx="2971800" cy="458788"/>
-          </a:xfrm>
-          <a:prstGeom prst="rect">
-            <a:avLst/>
-          </a:prstGeom>
-        </p:spPr>
-        <p:txBody>
-          <a:bodyPr vert="horz" lIns="91440" tIns="45720" rIns="91440" bIns="45720" rtlCol="0"/>
-          <a:lstStyle>
-            <a:lvl1pPr algn="r">
-              <a:defRPr sz="1200"/>
-            </a:lvl1pPr>
-          </a:lstStyle>
-          <a:p>
-            <a:fld id="{5282F153-3F37-0F45-9E97-73ACFA13230C}" type="datetimeFigureOut">
-              <a:rPr lang="en-US"/>
-              <a:t>7/23/19</a:t>
-            </a:fld>
-            <a:endParaRPr lang="en-US"/>
-          </a:p>
-        </p:txBody>
-      </p:sp>
-      <p:sp>
-        <p:nvSpPr>
-          <p:cNvPr id="4" name="Slide Image Placeholder 3"/>
-          <p:cNvSpPr>
-            <a:spLocks noGrp="1" noRot="1" noChangeAspect="1"/>
-          </p:cNvSpPr>
-          <p:nvPr>
-            <p:ph type="sldImg" idx="2"/>
-          </p:nvPr>
-        </p:nvSpPr>
-        <p:spPr>
-          <a:xfrm>
-            <a:off x="685800" y="1143000"/>
-            <a:ext cx="5486400" cy="3086100"/>
-          </a:xfrm>
-          <a:prstGeom prst="rect">
-            <a:avLst/>
-          </a:prstGeom>
-          <a:noFill/>
-          <a:ln w="12700">
-            <a:solidFill>
-              <a:prstClr val="black"/>
-            </a:solidFill>
-          </a:ln>
-        </p:spPr>
-        <p:txBody>
-          <a:bodyPr vert="horz" lIns="91440" tIns="45720" rIns="91440" bIns="45720" rtlCol="0" anchor="ctr"/>
-          <a:lstStyle/>
-          <a:p>
-            <a:endParaRPr lang="en-US"/>
-          </a:p>
-        </p:txBody>
-      </p:sp>
-      <p:sp>
-        <p:nvSpPr>
-          <p:cNvPr id="5" name="Notes Placeholder 4"/>
-          <p:cNvSpPr>
-            <a:spLocks noGrp="1"/>
-          </p:cNvSpPr>
-          <p:nvPr>
-            <p:ph type="body" sz="quarter" idx="3"/>
-          </p:nvPr>
-        </p:nvSpPr>
-        <p:spPr>
-          <a:xfrm>
-            <a:off x="685800" y="4400550"/>
-            <a:ext cx="5486400" cy="3600450"/>
-          </a:xfrm>
-          <a:prstGeom prst="rect">
-            <a:avLst/>
-          </a:prstGeom>
-        </p:spPr>
-        <p:txBody>
-          <a:bodyPr vert="horz" lIns="91440" tIns="45720" rIns="91440" bIns="45720" rtlCol="0"/>
-          <a:lstStyle/>
-          <a:p>
-            <a:pPr lvl="0"/>
-            <a:r>
-              <a:rPr lang="en-US"/>
-              <a:t>Click to edit Master text styles</a:t>
-            </a:r>
-          </a:p>
-          <a:p>
-            <a:pPr lvl="1"/>
-            <a:r>
-              <a:rPr lang="en-US"/>
-              <a:t>Second level</a:t>
-            </a:r>
-          </a:p>
-          <a:p>
-            <a:pPr lvl="2"/>
-            <a:r>
-              <a:rPr lang="en-US"/>
-              <a:t>Third level</a:t>
-            </a:r>
-          </a:p>
-          <a:p>
-            <a:pPr lvl="3"/>
-            <a:r>
-              <a:rPr lang="en-US"/>
-              <a:t>Fourth level</a:t>
-            </a:r>
-          </a:p>
-          <a:p>
-            <a:pPr lvl="4"/>
-            <a:r>
-              <a:rPr lang="en-US"/>
-              <a:t>Fifth level</a:t>
-            </a:r>
-          </a:p>
-        </p:txBody>
-      </p:sp>
-      <p:sp>
-        <p:nvSpPr>
-          <p:cNvPr id="6" name="Footer Placeholder 5"/>
-          <p:cNvSpPr>
-            <a:spLocks noGrp="1"/>
-          </p:cNvSpPr>
-          <p:nvPr>
-            <p:ph type="ftr" sz="quarter" idx="4"/>
-          </p:nvPr>
-        </p:nvSpPr>
-        <p:spPr>
-          <a:xfrm>
-            <a:off x="0" y="8685213"/>
-            <a:ext cx="2971800" cy="458787"/>
-          </a:xfrm>
-          <a:prstGeom prst="rect">
-            <a:avLst/>
-          </a:prstGeom>
-        </p:spPr>
-        <p:txBody>
-          <a:bodyPr vert="horz" lIns="91440" tIns="45720" rIns="91440" bIns="45720" rtlCol="0" anchor="b"/>
-          <a:lstStyle>
-            <a:lvl1pPr algn="l">
-              <a:defRPr sz="1200"/>
-            </a:lvl1pPr>
-          </a:lstStyle>
-          <a:p>
-            <a:endParaRPr lang="en-US"/>
-          </a:p>
-        </p:txBody>
-      </p:sp>
-      <p:sp>
-        <p:nvSpPr>
-          <p:cNvPr id="7" name="Slide Number Placeholder 6"/>
-          <p:cNvSpPr>
-            <a:spLocks noGrp="1"/>
-          </p:cNvSpPr>
-          <p:nvPr>
-            <p:ph type="sldNum" sz="quarter" idx="5"/>
-          </p:nvPr>
-        </p:nvSpPr>
-        <p:spPr>
-          <a:xfrm>
-            <a:off x="3884613" y="8685213"/>
-            <a:ext cx="2971800" cy="458787"/>
-          </a:xfrm>
-          <a:prstGeom prst="rect">
-            <a:avLst/>
-          </a:prstGeom>
-        </p:spPr>
-        <p:txBody>
-          <a:bodyPr vert="horz" lIns="91440" tIns="45720" rIns="91440" bIns="45720" rtlCol="0" anchor="b"/>
-          <a:lstStyle>
-            <a:lvl1pPr algn="r">
-              <a:defRPr sz="1200"/>
-            </a:lvl1pPr>
-          </a:lstStyle>
-          <a:p>
-            <a:fld id="{CE5E9CC1-C706-0F49-92D6-E571CC5EEA8F}" type="slidenum">
-              <a:rPr lang="en-US"/>
-              <a:t>‹#›</a:t>
-            </a:fld>
-            <a:endParaRPr lang="en-US"/>
-          </a:p>
-        </p:txBody>
-      </p:sp>
     </p:spTree>
     <p:extLst>
       <p:ext uri="{BB962C8B-B14F-4D97-AF65-F5344CB8AC3E}">
-        <p14:creationId xmlns:p14="http://schemas.microsoft.com/office/powerpoint/2010/main" val="1024086991"/>
+        <p14:creationId xmlns:p14="http://schemas.microsoft.com/office/powerpoint/2010/main" val="2629232433"/>
       </p:ext>
     </p:extLst>
   </p:cSld>
@@ -507,10 +289,6 @@
           <a:bodyPr/>
           <a:lstStyle/>
           <a:p>
-            <a:r>
-              <a:rPr lang="en-US" dirty="0"/>
-              <a:t/>
-            </a:r>
             <a:endParaRPr lang="en-US" dirty="0"/>
           </a:p>
         </p:txBody>
@@ -595,10 +373,6 @@
           <a:bodyPr/>
           <a:lstStyle/>
           <a:p>
-            <a:r>
-              <a:rPr lang="en-US" dirty="0"/>
-              <a:t/>
-            </a:r>
             <a:endParaRPr lang="en-US" dirty="0"/>
           </a:p>
         </p:txBody>
@@ -683,10 +457,6 @@
           <a:bodyPr/>
           <a:lstStyle/>
           <a:p>
-            <a:r>
-              <a:rPr lang="en-US" dirty="0"/>
-              <a:t/>
-            </a:r>
             <a:endParaRPr lang="en-US" dirty="0"/>
           </a:p>
         </p:txBody>
@@ -771,10 +541,6 @@
           <a:bodyPr/>
           <a:lstStyle/>
           <a:p>
-            <a:r>
-              <a:rPr lang="en-US" dirty="0"/>
-              <a:t/>
-            </a:r>
             <a:endParaRPr lang="en-US" dirty="0"/>
           </a:p>
         </p:txBody>
@@ -859,10 +625,6 @@
           <a:bodyPr/>
           <a:lstStyle/>
           <a:p>
-            <a:r>
-              <a:rPr lang="en-US" dirty="0"/>
-              <a:t/>
-            </a:r>
             <a:endParaRPr lang="en-US" dirty="0"/>
           </a:p>
         </p:txBody>
@@ -947,10 +709,6 @@
           <a:bodyPr/>
           <a:lstStyle/>
           <a:p>
-            <a:r>
-              <a:rPr lang="en-US" dirty="0"/>
-              <a:t/>
-            </a:r>
             <a:endParaRPr lang="en-US" dirty="0"/>
           </a:p>
         </p:txBody>
@@ -1035,10 +793,6 @@
           <a:bodyPr/>
           <a:lstStyle/>
           <a:p>
-            <a:r>
-              <a:rPr lang="en-US" dirty="0"/>
-              <a:t/>
-            </a:r>
             <a:endParaRPr lang="en-US" dirty="0"/>
           </a:p>
         </p:txBody>
@@ -1123,10 +877,6 @@
           <a:bodyPr/>
           <a:lstStyle/>
           <a:p>
-            <a:r>
-              <a:rPr lang="en-US" dirty="0"/>
-              <a:t/>
-            </a:r>
             <a:endParaRPr lang="en-US" dirty="0"/>
           </a:p>
         </p:txBody>
@@ -1149,6 +899,90 @@
             <a:fld id="{F7021451-1387-4CA6-816F-3879F97B5CBC}" type="slidenum">
               <a:rPr lang="en-US"/>
               <a:t>8</a:t>
+            </a:fld>
+            <a:endParaRPr lang="en-US"/>
+          </a:p>
+        </p:txBody>
+      </p:sp>
+    </p:spTree>
+    <p:extLst>
+      <p:ext uri="{BB962C8B-B14F-4D97-AF65-F5344CB8AC3E}">
+        <p14:creationId xmlns:p14="http://schemas.microsoft.com/office/powerpoint/2010/main" val="1024086991"/>
+      </p:ext>
+    </p:extLst>
+  </p:cSld>
+  <p:clrMapOvr>
+    <a:masterClrMapping/>
+  </p:clrMapOvr>
+</p:notes>
+</file>
+
+<file path=ppt/notesSlides/notesSlide9.xml><?xml version="1.0" encoding="utf-8"?>
+<p:notes xmlns:a="http://schemas.openxmlformats.org/drawingml/2006/main" xmlns:r="http://schemas.openxmlformats.org/officeDocument/2006/relationships" xmlns:p="http://schemas.openxmlformats.org/presentationml/2006/main">
+  <p:cSld>
+    <p:spTree>
+      <p:nvGrpSpPr>
+        <p:cNvPr id="1" name=""/>
+        <p:cNvGrpSpPr/>
+        <p:nvPr/>
+      </p:nvGrpSpPr>
+      <p:grpSpPr>
+        <a:xfrm>
+          <a:off x="0" y="0"/>
+          <a:ext cx="0" cy="0"/>
+          <a:chOff x="0" y="0"/>
+          <a:chExt cx="0" cy="0"/>
+        </a:xfrm>
+      </p:grpSpPr>
+      <p:sp>
+        <p:nvSpPr>
+          <p:cNvPr id="2" name="Slide Image Placeholder 1"/>
+          <p:cNvSpPr>
+            <a:spLocks noGrp="1" noRot="1" noChangeAspect="1"/>
+          </p:cNvSpPr>
+          <p:nvPr>
+            <p:ph type="sldImg"/>
+          </p:nvPr>
+        </p:nvSpPr>
+        <p:spPr/>
+      </p:sp>
+      <p:sp>
+        <p:nvSpPr>
+          <p:cNvPr id="3" name="Notes Placeholder 2"/>
+          <p:cNvSpPr>
+            <a:spLocks noGrp="1"/>
+          </p:cNvSpPr>
+          <p:nvPr>
+            <p:ph type="body" idx="1"/>
+          </p:nvPr>
+        </p:nvSpPr>
+        <p:spPr/>
+        <p:txBody>
+          <a:bodyPr/>
+          <a:lstStyle/>
+          <a:p>
+            <a:endParaRPr lang="en-US" dirty="0"/>
+          </a:p>
+        </p:txBody>
+      </p:sp>
+      <p:sp>
+        <p:nvSpPr>
+          <p:cNvPr id="4" name="Slide Number Placeholder 3"/>
+          <p:cNvSpPr>
+            <a:spLocks noGrp="1"/>
+          </p:cNvSpPr>
+          <p:nvPr>
+            <p:ph type="sldNum" sz="quarter" idx="10"/>
+          </p:nvPr>
+        </p:nvSpPr>
+        <p:spPr/>
+        <p:txBody>
+          <a:bodyPr/>
+          <a:lstStyle/>
+          <a:p>
+            <a:fld id="{F7021451-1387-4CA6-816F-3879F97B5CBC}" type="slidenum">
+              <a:rPr lang="en-US"/>
+              <a:t>9</a:t>
             </a:fld>
             <a:endParaRPr lang="en-US"/>
           </a:p>
@@ -1200,6 +1034,11 @@
 <file path=ppt/slideMasters/slideMaster1.xml><?xml version="1.0" encoding="utf-8"?>
 <p:sldMaster xmlns:a="http://schemas.openxmlformats.org/drawingml/2006/main" xmlns:r="http://schemas.openxmlformats.org/officeDocument/2006/relationships" xmlns:p="http://schemas.openxmlformats.org/presentationml/2006/main">
   <p:cSld>
+    <p:bg>
+      <p:bgRef idx="1001">
+        <a:schemeClr val="bg1"/>
+      </p:bgRef>
+    </p:bg>
     <p:spTree>
       <p:nvGrpSpPr>
         <p:cNvPr id="1" name=""/>
@@ -1482,6 +1321,7 @@
         <a:solidFill>
           <a:srgbClr val="0D7EA8"/>
         </a:solidFill>
+        <a:effectLst/>
       </p:bgPr>
     </p:bg>
     <p:spTree>
@@ -1544,7 +1384,7 @@
           <a:bodyPr wrap="square" lIns="0" tIns="0" rIns="0" bIns="0" rtlCol="0" anchor="ctr"/>
           <a:lstStyle/>
           <a:p>
-            <a:pPr indent="0" marL="0">
+            <a:pPr marL="0" indent="0">
               <a:buNone/>
             </a:pPr>
             <a:r>
@@ -1583,11 +1423,11 @@
           <a:bodyPr wrap="square" lIns="0" tIns="0" rIns="0" bIns="0" rtlCol="0" anchor="ctr"/>
           <a:lstStyle/>
           <a:p>
-            <a:pPr indent="0" marL="0">
-              <a:buNone/>
-            </a:pPr>
-            <a:r>
-              <a:rPr lang="en-US" sz="2000" spc="100" kern="0" dirty="0">
+            <a:pPr marL="0" indent="0">
+              <a:buNone/>
+            </a:pPr>
+            <a:r>
+              <a:rPr lang="en-US" sz="2000" kern="0" spc="100" dirty="0">
                 <a:solidFill>
                   <a:srgbClr val="D6EEF7"/>
                 </a:solidFill>
@@ -1647,7 +1487,7 @@
           <a:bodyPr wrap="square" lIns="0" tIns="0" rIns="0" bIns="0" rtlCol="0" anchor="ctr"/>
           <a:lstStyle/>
           <a:p>
-            <a:pPr indent="0" marL="0">
+            <a:pPr marL="0" indent="0">
               <a:buNone/>
             </a:pPr>
             <a:r>
@@ -1664,7 +1504,7 @@
             <a:endParaRPr lang="en-US" sz="1300" dirty="0"/>
           </a:p>
           <a:p>
-            <a:pPr indent="0" marL="0">
+            <a:pPr marL="0" indent="0">
               <a:buNone/>
             </a:pPr>
             <a:r>
@@ -1684,17 +1524,17 @@
       </p:sp>
       <p:pic>
         <p:nvPicPr>
-          <p:cNvPr id="7" name="Image 0" descr="preencoded.png">    </p:cNvPr>
+          <p:cNvPr id="7" name="Image 0" descr="preencoded.png"/>
           <p:cNvPicPr>
             <a:picLocks noChangeAspect="1"/>
           </p:cNvPicPr>
           <p:nvPr/>
         </p:nvPicPr>
         <p:blipFill>
-          <a:blip r:embed="rId1">
+          <a:blip>
             <a:extLst>
               <a:ext uri="{96DAC541-7B7A-43D3-8B79-37D633B846F1}">
-                <asvg:svgBlip xmlns:asvg="http://schemas.microsoft.com/office/drawing/2016/SVG/main" r:embed="rId2"/>
+                <asvg:svgBlip xmlns:asvg="http://schemas.microsoft.com/office/drawing/2016/SVG/main" r:embed="rId3"/>
               </a:ext>
             </a:extLst>
           </a:blip>
@@ -1728,6 +1568,7 @@
         <a:solidFill>
           <a:srgbClr val="FFFFFF"/>
         </a:solidFill>
+        <a:effectLst/>
       </p:bgPr>
     </p:bg>
     <p:spTree>
@@ -1790,7 +1631,7 @@
           <a:bodyPr wrap="square" lIns="0" tIns="0" rIns="0" bIns="0" rtlCol="0" anchor="ctr"/>
           <a:lstStyle/>
           <a:p>
-            <a:pPr indent="0" marL="0">
+            <a:pPr marL="0" indent="0">
               <a:buNone/>
             </a:pPr>
             <a:r>
@@ -1832,7 +1673,7 @@
             <a:prstDash val="solid"/>
           </a:ln>
           <a:effectLst>
-            <a:outerShdw sx="100000" sy="100000" kx="0" ky="0" algn="bl" rotWithShape="0" blurRad="101600" dist="38100" dir="8100000">
+            <a:outerShdw blurRad="101600" dist="38100" dir="8100000" algn="bl" rotWithShape="0">
               <a:srgbClr val="000000">
                 <a:alpha val="12000"/>
               </a:srgbClr>
@@ -1886,7 +1727,7 @@
           <a:bodyPr wrap="square" lIns="0" tIns="0" rIns="0" bIns="0" rtlCol="0" anchor="ctr"/>
           <a:lstStyle/>
           <a:p>
-            <a:pPr indent="0" marL="0">
+            <a:pPr marL="0" indent="0">
               <a:buNone/>
             </a:pPr>
             <a:r>
@@ -1925,7 +1766,7 @@
           <a:bodyPr wrap="square" lIns="0" tIns="0" rIns="0" bIns="0" rtlCol="0" anchor="ctr"/>
           <a:lstStyle/>
           <a:p>
-            <a:pPr indent="0" marL="0">
+            <a:pPr marL="0" indent="0">
               <a:buNone/>
             </a:pPr>
             <a:r>
@@ -1967,7 +1808,7 @@
             <a:prstDash val="solid"/>
           </a:ln>
           <a:effectLst>
-            <a:outerShdw sx="100000" sy="100000" kx="0" ky="0" algn="bl" rotWithShape="0" blurRad="101600" dist="38100" dir="8100000">
+            <a:outerShdw blurRad="101600" dist="38100" dir="8100000" algn="bl" rotWithShape="0">
               <a:srgbClr val="000000">
                 <a:alpha val="12000"/>
               </a:srgbClr>
@@ -2021,7 +1862,7 @@
           <a:bodyPr wrap="square" lIns="0" tIns="0" rIns="0" bIns="0" rtlCol="0" anchor="ctr"/>
           <a:lstStyle/>
           <a:p>
-            <a:pPr indent="0" marL="0">
+            <a:pPr marL="0" indent="0">
               <a:buNone/>
             </a:pPr>
             <a:r>
@@ -2060,7 +1901,7 @@
           <a:bodyPr wrap="square" lIns="0" tIns="0" rIns="0" bIns="0" rtlCol="0" anchor="ctr"/>
           <a:lstStyle/>
           <a:p>
-            <a:pPr indent="0" marL="0">
+            <a:pPr marL="0" indent="0">
               <a:buNone/>
             </a:pPr>
             <a:r>
@@ -2099,7 +1940,7 @@
           <a:bodyPr wrap="square" lIns="0" tIns="0" rIns="0" bIns="0" rtlCol="0" anchor="ctr"/>
           <a:lstStyle/>
           <a:p>
-            <a:pPr indent="0" marL="0">
+            <a:pPr marL="0" indent="0">
               <a:buNone/>
             </a:pPr>
             <a:r>
@@ -2138,7 +1979,7 @@
           <a:bodyPr wrap="square" lIns="0" tIns="0" rIns="0" bIns="0" rtlCol="0" anchor="ctr"/>
           <a:lstStyle/>
           <a:p>
-            <a:pPr algn="r" indent="0" marL="0">
+            <a:pPr marL="0" indent="0" algn="r">
               <a:buNone/>
             </a:pPr>
             <a:r>
@@ -2150,9 +1991,147 @@
                 <a:ea typeface="Arial" pitchFamily="34" charset="-122"/>
                 <a:cs typeface="Arial" pitchFamily="34" charset="-120"/>
               </a:rPr>
-              <a:t>2 / 8</a:t>
+              <a:t>2 / 9</a:t>
             </a:r>
             <a:endParaRPr lang="en-US" sz="900" dirty="0"/>
+          </a:p>
+        </p:txBody>
+      </p:sp>
+      <p:sp>
+        <p:nvSpPr>
+          <p:cNvPr id="14" name="Text 5">
+            <a:extLst>
+              <a:ext uri="{FF2B5EF4-FFF2-40B4-BE49-F238E27FC236}">
+                <a16:creationId xmlns:a16="http://schemas.microsoft.com/office/drawing/2014/main" id="{8539814E-C30C-D826-A475-44C3E0138BD6}"/>
+              </a:ext>
+            </a:extLst>
+          </p:cNvPr>
+          <p:cNvSpPr/>
+          <p:nvPr/>
+        </p:nvSpPr>
+        <p:spPr>
+          <a:xfrm>
+            <a:off x="548640" y="1691640"/>
+            <a:ext cx="3474720" cy="2743200"/>
+          </a:xfrm>
+          <a:prstGeom prst="rect">
+            <a:avLst/>
+          </a:prstGeom>
+          <a:noFill/>
+          <a:ln/>
+        </p:spPr>
+        <p:txBody>
+          <a:bodyPr wrap="square" lIns="0" tIns="0" rIns="0" bIns="0" rtlCol="0" anchor="ctr"/>
+          <a:lstStyle/>
+          <a:p>
+            <a:pPr>
+              <a:spcAft>
+                <a:spcPts val="300"/>
+              </a:spcAft>
+            </a:pPr>
+            <a:r>
+              <a:rPr lang="en-US" sz="1400" dirty="0">
+                <a:solidFill>
+                  <a:srgbClr val="2C3E50"/>
+                </a:solidFill>
+                <a:latin typeface="Arial" pitchFamily="34" charset="0"/>
+                <a:ea typeface="Arial" pitchFamily="34" charset="-122"/>
+                <a:cs typeface="Arial" pitchFamily="34" charset="-120"/>
+              </a:rPr>
+              <a:t>• Bachelors in Tourism, with emphasis in </a:t>
+            </a:r>
+            <a:r>
+              <a:rPr lang="en-US" sz="1400" dirty="0">
+                <a:solidFill>
+                  <a:srgbClr val="2C3E50"/>
+                </a:solidFill>
+                <a:latin typeface="Arial" pitchFamily="34" charset="0"/>
+                <a:cs typeface="Arial" pitchFamily="34" charset="-120"/>
+              </a:rPr>
+              <a:t>Tourism development
+• Believe tourism is one of the most powerful tools for building a less prejudiced, more connected world
+• Experienced COVID from both Germany and Brazil, and saw firsthand how differently two countries can respond to the same crisis
+• Brazil still has enormous untapped. This project is my attempt to show that through data</a:t>
+            </a:r>
+          </a:p>
+        </p:txBody>
+      </p:sp>
+      <p:sp>
+        <p:nvSpPr>
+          <p:cNvPr id="15" name="Text 5">
+            <a:extLst>
+              <a:ext uri="{FF2B5EF4-FFF2-40B4-BE49-F238E27FC236}">
+                <a16:creationId xmlns:a16="http://schemas.microsoft.com/office/drawing/2014/main" id="{D0FF87FC-2D69-1900-DB54-9970730047B5}"/>
+              </a:ext>
+            </a:extLst>
+          </p:cNvPr>
+          <p:cNvSpPr/>
+          <p:nvPr/>
+        </p:nvSpPr>
+        <p:spPr>
+          <a:xfrm>
+            <a:off x="4937760" y="1691640"/>
+            <a:ext cx="3474720" cy="2743200"/>
+          </a:xfrm>
+          <a:prstGeom prst="rect">
+            <a:avLst/>
+          </a:prstGeom>
+          <a:noFill/>
+          <a:ln/>
+        </p:spPr>
+        <p:txBody>
+          <a:bodyPr wrap="square" lIns="0" tIns="0" rIns="0" bIns="0" rtlCol="0" anchor="ctr"/>
+          <a:lstStyle/>
+          <a:p>
+            <a:pPr>
+              <a:spcAft>
+                <a:spcPts val="300"/>
+              </a:spcAft>
+            </a:pPr>
+            <a:r>
+              <a:rPr lang="en-US" sz="1400" dirty="0">
+                <a:solidFill>
+                  <a:srgbClr val="2C3E50"/>
+                </a:solidFill>
+                <a:latin typeface="Arial" pitchFamily="34" charset="0"/>
+                <a:ea typeface="Arial" pitchFamily="34" charset="-122"/>
+                <a:cs typeface="Arial" pitchFamily="34" charset="-120"/>
+              </a:rPr>
+              <a:t>• </a:t>
+            </a:r>
+            <a:r>
+              <a:rPr lang="en-US" sz="1400" dirty="0">
+                <a:solidFill>
+                  <a:srgbClr val="2C3E50"/>
+                </a:solidFill>
+                <a:latin typeface="Arial" pitchFamily="34" charset="0"/>
+                <a:cs typeface="Arial" pitchFamily="34" charset="-120"/>
+              </a:rPr>
+              <a:t>Built entirely on official government data: </a:t>
+            </a:r>
+            <a:r>
+              <a:rPr lang="en-US" sz="1400" dirty="0" err="1">
+                <a:solidFill>
+                  <a:srgbClr val="2C3E50"/>
+                </a:solidFill>
+                <a:latin typeface="Arial" pitchFamily="34" charset="0"/>
+                <a:cs typeface="Arial" pitchFamily="34" charset="-120"/>
+              </a:rPr>
+              <a:t>Ministério</a:t>
+            </a:r>
+            <a:r>
+              <a:rPr lang="en-US" sz="1400" dirty="0">
+                <a:solidFill>
+                  <a:srgbClr val="2C3E50"/>
+                </a:solidFill>
+                <a:latin typeface="Arial" pitchFamily="34" charset="0"/>
+                <a:cs typeface="Arial" pitchFamily="34" charset="-120"/>
+              </a:rPr>
+              <a:t> do Turismo and UN Tourism
+• Touches on most of what we covered during the bootcamp: data cleaning and wrangling, EDA, visualization and app development
+• Global benchmarking puts Brazil's recovery in perspective against 220+ countries
+• A strong portfolio piece that combines technical skills with a topic I genuinely care about</a:t>
+            </a:r>
           </a:p>
         </p:txBody>
       </p:sp>
@@ -2172,6 +2151,7 @@
         <a:solidFill>
           <a:srgbClr val="FFFFFF"/>
         </a:solidFill>
+        <a:effectLst/>
       </p:bgPr>
     </p:bg>
     <p:spTree>
@@ -2234,7 +2214,7 @@
           <a:bodyPr wrap="square" lIns="0" tIns="0" rIns="0" bIns="0" rtlCol="0" anchor="ctr"/>
           <a:lstStyle/>
           <a:p>
-            <a:pPr indent="0" marL="0">
+            <a:pPr marL="0" indent="0">
               <a:buNone/>
             </a:pPr>
             <a:r>
@@ -2276,7 +2256,7 @@
             <a:prstDash val="solid"/>
           </a:ln>
           <a:effectLst>
-            <a:outerShdw sx="100000" sy="100000" kx="0" ky="0" algn="bl" rotWithShape="0" blurRad="101600" dist="38100" dir="8100000">
+            <a:outerShdw blurRad="101600" dist="38100" dir="8100000" algn="bl" rotWithShape="0">
               <a:srgbClr val="000000">
                 <a:alpha val="12000"/>
               </a:srgbClr>
@@ -2330,7 +2310,7 @@
           <a:bodyPr wrap="square" lIns="0" tIns="0" rIns="0" bIns="0" rtlCol="0" anchor="ctr"/>
           <a:lstStyle/>
           <a:p>
-            <a:pPr indent="0" marL="0">
+            <a:pPr marL="0" indent="0">
               <a:buNone/>
             </a:pPr>
             <a:r>
@@ -2342,7 +2322,7 @@
                 <a:ea typeface="Arial" pitchFamily="34" charset="-122"/>
                 <a:cs typeface="Arial" pitchFamily="34" charset="-120"/>
               </a:rPr>
-              <a:t>Ministério do Turismo</a:t>
+              <a:t>Ministério do Turismo (Brazil)</a:t>
             </a:r>
             <a:endParaRPr lang="en-US" sz="1300" dirty="0"/>
           </a:p>
@@ -2356,7 +2336,7 @@
         </p:nvSpPr>
         <p:spPr>
           <a:xfrm>
-            <a:off x="548640" y="1691640"/>
+            <a:off x="548640" y="1856232"/>
             <a:ext cx="3474720" cy="2743200"/>
           </a:xfrm>
           <a:prstGeom prst="rect">
@@ -2369,14 +2349,14 @@
           <a:bodyPr wrap="square" lIns="0" tIns="0" rIns="0" bIns="0" rtlCol="0" anchor="ctr"/>
           <a:lstStyle/>
           <a:p>
-            <a:pPr indent="0" marL="0">
+            <a:pPr marL="0" indent="0">
               <a:spcAft>
                 <a:spcPts val="300"/>
               </a:spcAft>
               <a:buNone/>
             </a:pPr>
             <a:r>
-              <a:rPr lang="en-US" sz="1100" dirty="0">
+              <a:rPr lang="en-US" sz="1400" dirty="0">
                 <a:solidFill>
                   <a:srgbClr val="2C3E50"/>
                 </a:solidFill>
@@ -2389,44 +2369,9 @@
 • 439,438 rows, monthly granularity
 • Country of origin, entry route, state
 • COVID period &amp; season flags added
-• Source: Polícia Federal border records
 </a:t>
             </a:r>
-            <a:pPr indent="0" marL="0">
-              <a:spcAft>
-                <a:spcPts val="300"/>
-              </a:spcAft>
-              <a:buNone/>
-            </a:pPr>
-            <a:r>
-              <a:rPr lang="en-US" sz="1100" b="1" dirty="0">
-                <a:solidFill>
-                  <a:srgbClr val="2C3E50"/>
-                </a:solidFill>
-                <a:latin typeface="Arial" pitchFamily="34" charset="0"/>
-                <a:ea typeface="Arial" pitchFamily="34" charset="-122"/>
-                <a:cs typeface="Arial" pitchFamily="34" charset="-120"/>
-              </a:rPr>
-              <a:t>⚠ Limitation: </a:t>
-            </a:r>
-            <a:pPr indent="0" marL="0">
-              <a:spcAft>
-                <a:spcPts val="300"/>
-              </a:spcAft>
-              <a:buNone/>
-            </a:pPr>
-            <a:r>
-              <a:rPr lang="en-US" sz="1100" dirty="0">
-                <a:solidFill>
-                  <a:srgbClr val="2C3E50"/>
-                </a:solidFill>
-                <a:latin typeface="Arial" pitchFamily="34" charset="0"/>
-                <a:ea typeface="Arial" pitchFamily="34" charset="-122"/>
-                <a:cs typeface="Arial" pitchFamily="34" charset="-120"/>
-              </a:rPr>
-              <a:t>Less common state entries pre-aggregated — only top states visible individually</a:t>
-            </a:r>
-            <a:endParaRPr lang="en-US" sz="1100" dirty="0"/>
+            <a:endParaRPr lang="en-US" sz="1400" dirty="0"/>
           </a:p>
         </p:txBody>
       </p:sp>
@@ -2454,7 +2399,7 @@
             <a:prstDash val="solid"/>
           </a:ln>
           <a:effectLst>
-            <a:outerShdw sx="100000" sy="100000" kx="0" ky="0" algn="bl" rotWithShape="0" blurRad="101600" dist="38100" dir="8100000">
+            <a:outerShdw blurRad="101600" dist="38100" dir="8100000" algn="bl" rotWithShape="0">
               <a:srgbClr val="000000">
                 <a:alpha val="12000"/>
               </a:srgbClr>
@@ -2508,7 +2453,7 @@
           <a:bodyPr wrap="square" lIns="0" tIns="0" rIns="0" bIns="0" rtlCol="0" anchor="ctr"/>
           <a:lstStyle/>
           <a:p>
-            <a:pPr indent="0" marL="0">
+            <a:pPr marL="0" indent="0">
               <a:buNone/>
             </a:pPr>
             <a:r>
@@ -2534,27 +2479,26 @@
         </p:nvSpPr>
         <p:spPr>
           <a:xfrm>
-            <a:off x="4937760" y="1691640"/>
-            <a:ext cx="3474720" cy="2743200"/>
-          </a:xfrm>
-          <a:prstGeom prst="rect">
-            <a:avLst/>
-          </a:prstGeom>
-          <a:noFill/>
-          <a:ln/>
-        </p:spPr>
-        <p:txBody>
-          <a:bodyPr wrap="square" lIns="0" tIns="0" rIns="0" bIns="0" rtlCol="0" anchor="ctr"/>
-          <a:lstStyle/>
-          <a:p>
-            <a:pPr indent="0" marL="0">
+            <a:off x="4937760" y="1737360"/>
+            <a:ext cx="3474720" cy="2637790"/>
+          </a:xfrm>
+          <a:prstGeom prst="rect">
+            <a:avLst/>
+          </a:prstGeom>
+          <a:noFill/>
+          <a:ln/>
+        </p:spPr>
+        <p:txBody>
+          <a:bodyPr wrap="square" lIns="0" tIns="0" rIns="0" bIns="0" rtlCol="0" anchor="ctr"/>
+          <a:lstStyle/>
+          <a:p>
+            <a:pPr>
               <a:spcAft>
                 <a:spcPts val="300"/>
               </a:spcAft>
-              <a:buNone/>
-            </a:pPr>
-            <a:r>
-              <a:rPr lang="en-US" sz="1100" dirty="0">
+            </a:pPr>
+            <a:r>
+              <a:rPr lang="en-US" sz="1400" dirty="0">
                 <a:solidFill>
                   <a:srgbClr val="2C3E50"/>
                 </a:solidFill>
@@ -2562,47 +2506,29 @@
                 <a:ea typeface="Arial" pitchFamily="34" charset="-122"/>
                 <a:cs typeface="Arial" pitchFamily="34" charset="-120"/>
               </a:rPr>
-              <a:t>• 220+ countries, annual data (1995–2024)
-• Overnight tourists &amp; same-day visitors
-• Verified against Our World in Data
-• Global context — Brazil vs world
-</a:t>
-            </a:r>
-            <a:pPr indent="0" marL="0">
-              <a:spcAft>
-                <a:spcPts val="300"/>
-              </a:spcAft>
-              <a:buNone/>
-            </a:pPr>
-            <a:r>
-              <a:rPr lang="en-US" sz="1100" b="1" dirty="0">
+              <a:t>• 200+ countries, annual data (1995–2024)
+• </a:t>
+            </a:r>
+            <a:r>
+              <a:rPr lang="en-US" sz="1400" dirty="0">
                 <a:solidFill>
                   <a:srgbClr val="2C3E50"/>
                 </a:solidFill>
                 <a:latin typeface="Arial" pitchFamily="34" charset="0"/>
-                <a:ea typeface="Arial" pitchFamily="34" charset="-122"/>
-                <a:cs typeface="Arial" pitchFamily="34" charset="-120"/>
-              </a:rPr>
-              <a:t>⚠ Limitations: </a:t>
-            </a:r>
-            <a:pPr indent="0" marL="0">
-              <a:spcAft>
-                <a:spcPts val="300"/>
-              </a:spcAft>
-              <a:buNone/>
-            </a:pPr>
-            <a:r>
-              <a:rPr lang="en-US" sz="1100" dirty="0">
-                <a:solidFill>
-                  <a:srgbClr val="2C3E50"/>
-                </a:solidFill>
-                <a:latin typeface="Arial" pitchFamily="34" charset="0"/>
-                <a:ea typeface="Arial" pitchFamily="34" charset="-122"/>
-                <a:cs typeface="Arial" pitchFamily="34" charset="-120"/>
-              </a:rPr>
-              <a:t>Annual only — no monthly/seasonal data. Voluntary reporting — missing countries introduce bias in global rankings</a:t>
-            </a:r>
-            <a:endParaRPr lang="en-US" sz="1100" dirty="0"/>
+                <a:cs typeface="Arial" pitchFamily="34" charset="-120"/>
+              </a:rPr>
+              <a:t>Overnight tourists &amp; same-day visitors
+• Verified against Brazil's official entry records: totals are consistent between both sources 
+• Global context: Brazil vs world</a:t>
+            </a:r>
+            <a:endParaRPr lang="en-US" sz="1100" dirty="0">
+              <a:solidFill>
+                <a:srgbClr val="2C3E50"/>
+              </a:solidFill>
+              <a:latin typeface="Arial" pitchFamily="34" charset="0"/>
+              <a:ea typeface="Arial" pitchFamily="34" charset="-122"/>
+              <a:cs typeface="Arial" pitchFamily="34" charset="-120"/>
+            </a:endParaRPr>
           </a:p>
         </p:txBody>
       </p:sp>
@@ -2627,7 +2553,7 @@
           <a:bodyPr wrap="square" lIns="0" tIns="0" rIns="0" bIns="0" rtlCol="0" anchor="ctr"/>
           <a:lstStyle/>
           <a:p>
-            <a:pPr indent="0" marL="0">
+            <a:pPr marL="0" indent="0">
               <a:buNone/>
             </a:pPr>
             <a:r>
@@ -2666,7 +2592,7 @@
           <a:bodyPr wrap="square" lIns="0" tIns="0" rIns="0" bIns="0" rtlCol="0" anchor="ctr"/>
           <a:lstStyle/>
           <a:p>
-            <a:pPr algn="r" indent="0" marL="0">
+            <a:pPr marL="0" indent="0" algn="r">
               <a:buNone/>
             </a:pPr>
             <a:r>
@@ -2678,7 +2604,7 @@
                 <a:ea typeface="Arial" pitchFamily="34" charset="-122"/>
                 <a:cs typeface="Arial" pitchFamily="34" charset="-120"/>
               </a:rPr>
-              <a:t>3 / 8</a:t>
+              <a:t>3 / 9</a:t>
             </a:r>
             <a:endParaRPr lang="en-US" sz="900" dirty="0"/>
           </a:p>
@@ -2700,6 +2626,7 @@
         <a:solidFill>
           <a:srgbClr val="FFFFFF"/>
         </a:solidFill>
+        <a:effectLst/>
       </p:bgPr>
     </p:bg>
     <p:spTree>
@@ -2762,7 +2689,7 @@
           <a:bodyPr wrap="square" lIns="0" tIns="0" rIns="0" bIns="0" rtlCol="0" anchor="ctr"/>
           <a:lstStyle/>
           <a:p>
-            <a:pPr indent="0" marL="0">
+            <a:pPr marL="0" indent="0">
               <a:buNone/>
             </a:pPr>
             <a:r>
@@ -2804,7 +2731,7 @@
             <a:prstDash val="solid"/>
           </a:ln>
           <a:effectLst>
-            <a:outerShdw sx="100000" sy="100000" kx="0" ky="0" algn="bl" rotWithShape="0" blurRad="101600" dist="38100" dir="8100000">
+            <a:outerShdw blurRad="101600" dist="38100" dir="8100000" algn="bl" rotWithShape="0">
               <a:srgbClr val="000000">
                 <a:alpha val="12000"/>
               </a:srgbClr>
@@ -2858,7 +2785,7 @@
           <a:bodyPr wrap="square" lIns="0" tIns="0" rIns="0" bIns="0" rtlCol="0" anchor="ctr"/>
           <a:lstStyle/>
           <a:p>
-            <a:pPr algn="ctr" indent="0" marL="0">
+            <a:pPr marL="0" indent="0" algn="ctr">
               <a:buNone/>
             </a:pPr>
             <a:r>
@@ -2897,7 +2824,7 @@
           <a:bodyPr wrap="square" lIns="0" tIns="0" rIns="0" bIns="0" rtlCol="0" anchor="ctr"/>
           <a:lstStyle/>
           <a:p>
-            <a:pPr indent="0" marL="0">
+            <a:pPr marL="0" indent="0">
               <a:buNone/>
             </a:pPr>
             <a:r>
@@ -2936,7 +2863,7 @@
           <a:bodyPr wrap="square" lIns="0" tIns="0" rIns="0" bIns="0" rtlCol="0" anchor="ctr"/>
           <a:lstStyle/>
           <a:p>
-            <a:pPr indent="0" marL="0">
+            <a:pPr marL="0" indent="0">
               <a:buNone/>
             </a:pPr>
             <a:r>
@@ -2978,7 +2905,7 @@
             <a:prstDash val="solid"/>
           </a:ln>
           <a:effectLst>
-            <a:outerShdw sx="100000" sy="100000" kx="0" ky="0" algn="bl" rotWithShape="0" blurRad="101600" dist="38100" dir="8100000">
+            <a:outerShdw blurRad="101600" dist="38100" dir="8100000" algn="bl" rotWithShape="0">
               <a:srgbClr val="000000">
                 <a:alpha val="12000"/>
               </a:srgbClr>
@@ -3032,7 +2959,7 @@
           <a:bodyPr wrap="square" lIns="0" tIns="0" rIns="0" bIns="0" rtlCol="0" anchor="ctr"/>
           <a:lstStyle/>
           <a:p>
-            <a:pPr algn="ctr" indent="0" marL="0">
+            <a:pPr marL="0" indent="0" algn="ctr">
               <a:buNone/>
             </a:pPr>
             <a:r>
@@ -3071,7 +2998,7 @@
           <a:bodyPr wrap="square" lIns="0" tIns="0" rIns="0" bIns="0" rtlCol="0" anchor="ctr"/>
           <a:lstStyle/>
           <a:p>
-            <a:pPr indent="0" marL="0">
+            <a:pPr marL="0" indent="0">
               <a:buNone/>
             </a:pPr>
             <a:r>
@@ -3110,7 +3037,7 @@
           <a:bodyPr wrap="square" lIns="0" tIns="0" rIns="0" bIns="0" rtlCol="0" anchor="ctr"/>
           <a:lstStyle/>
           <a:p>
-            <a:pPr indent="0" marL="0">
+            <a:pPr marL="0" indent="0">
               <a:buNone/>
             </a:pPr>
             <a:r>
@@ -3152,7 +3079,7 @@
             <a:prstDash val="solid"/>
           </a:ln>
           <a:effectLst>
-            <a:outerShdw sx="100000" sy="100000" kx="0" ky="0" algn="bl" rotWithShape="0" blurRad="101600" dist="38100" dir="8100000">
+            <a:outerShdw blurRad="101600" dist="38100" dir="8100000" algn="bl" rotWithShape="0">
               <a:srgbClr val="000000">
                 <a:alpha val="12000"/>
               </a:srgbClr>
@@ -3206,7 +3133,7 @@
           <a:bodyPr wrap="square" lIns="0" tIns="0" rIns="0" bIns="0" rtlCol="0" anchor="ctr"/>
           <a:lstStyle/>
           <a:p>
-            <a:pPr algn="ctr" indent="0" marL="0">
+            <a:pPr marL="0" indent="0" algn="ctr">
               <a:buNone/>
             </a:pPr>
             <a:r>
@@ -3245,7 +3172,7 @@
           <a:bodyPr wrap="square" lIns="0" tIns="0" rIns="0" bIns="0" rtlCol="0" anchor="ctr"/>
           <a:lstStyle/>
           <a:p>
-            <a:pPr indent="0" marL="0">
+            <a:pPr marL="0" indent="0">
               <a:buNone/>
             </a:pPr>
             <a:r>
@@ -3284,7 +3211,7 @@
           <a:bodyPr wrap="square" lIns="0" tIns="0" rIns="0" bIns="0" rtlCol="0" anchor="ctr"/>
           <a:lstStyle/>
           <a:p>
-            <a:pPr indent="0" marL="0">
+            <a:pPr marL="0" indent="0">
               <a:buNone/>
             </a:pPr>
             <a:r>
@@ -3326,7 +3253,7 @@
             <a:prstDash val="solid"/>
           </a:ln>
           <a:effectLst>
-            <a:outerShdw sx="100000" sy="100000" kx="0" ky="0" algn="bl" rotWithShape="0" blurRad="101600" dist="38100" dir="8100000">
+            <a:outerShdw blurRad="101600" dist="38100" dir="8100000" algn="bl" rotWithShape="0">
               <a:srgbClr val="000000">
                 <a:alpha val="12000"/>
               </a:srgbClr>
@@ -3380,7 +3307,7 @@
           <a:bodyPr wrap="square" lIns="0" tIns="0" rIns="0" bIns="0" rtlCol="0" anchor="ctr"/>
           <a:lstStyle/>
           <a:p>
-            <a:pPr algn="ctr" indent="0" marL="0">
+            <a:pPr marL="0" indent="0" algn="ctr">
               <a:buNone/>
             </a:pPr>
             <a:r>
@@ -3419,7 +3346,7 @@
           <a:bodyPr wrap="square" lIns="0" tIns="0" rIns="0" bIns="0" rtlCol="0" anchor="ctr"/>
           <a:lstStyle/>
           <a:p>
-            <a:pPr indent="0" marL="0">
+            <a:pPr marL="0" indent="0">
               <a:buNone/>
             </a:pPr>
             <a:r>
@@ -3458,7 +3385,7 @@
           <a:bodyPr wrap="square" lIns="0" tIns="0" rIns="0" bIns="0" rtlCol="0" anchor="ctr"/>
           <a:lstStyle/>
           <a:p>
-            <a:pPr indent="0" marL="0">
+            <a:pPr marL="0" indent="0">
               <a:buNone/>
             </a:pPr>
             <a:r>
@@ -3497,7 +3424,7 @@
           <a:bodyPr wrap="square" lIns="0" tIns="0" rIns="0" bIns="0" rtlCol="0" anchor="ctr"/>
           <a:lstStyle/>
           <a:p>
-            <a:pPr indent="0" marL="0">
+            <a:pPr marL="0" indent="0">
               <a:buNone/>
             </a:pPr>
             <a:r>
@@ -3536,7 +3463,7 @@
           <a:bodyPr wrap="square" lIns="0" tIns="0" rIns="0" bIns="0" rtlCol="0" anchor="ctr"/>
           <a:lstStyle/>
           <a:p>
-            <a:pPr algn="r" indent="0" marL="0">
+            <a:pPr marL="0" indent="0" algn="r">
               <a:buNone/>
             </a:pPr>
             <a:r>
@@ -3548,7 +3475,7 @@
                 <a:ea typeface="Arial" pitchFamily="34" charset="-122"/>
                 <a:cs typeface="Arial" pitchFamily="34" charset="-120"/>
               </a:rPr>
-              <a:t>4 / 8</a:t>
+              <a:t>4 / 9</a:t>
             </a:r>
             <a:endParaRPr lang="en-US" sz="900" dirty="0"/>
           </a:p>
@@ -3570,6 +3497,7 @@
         <a:solidFill>
           <a:srgbClr val="2C3E50"/>
         </a:solidFill>
+        <a:effectLst/>
       </p:bgPr>
     </p:bg>
     <p:spTree>
@@ -3632,11 +3560,11 @@
           <a:bodyPr wrap="square" lIns="0" tIns="0" rIns="0" bIns="0" rtlCol="0" anchor="ctr"/>
           <a:lstStyle/>
           <a:p>
-            <a:pPr indent="0" marL="0">
-              <a:buNone/>
-            </a:pPr>
-            <a:r>
-              <a:rPr lang="en-US" sz="1400" spc="400" kern="0" dirty="0">
+            <a:pPr marL="0" indent="0">
+              <a:buNone/>
+            </a:pPr>
+            <a:r>
+              <a:rPr lang="en-US" sz="1400" kern="0" spc="400" dirty="0">
                 <a:solidFill>
                   <a:srgbClr val="A8D8EA"/>
                 </a:solidFill>
@@ -3671,7 +3599,7 @@
           <a:bodyPr wrap="square" lIns="0" tIns="0" rIns="0" bIns="0" rtlCol="0" anchor="ctr"/>
           <a:lstStyle/>
           <a:p>
-            <a:pPr indent="0" marL="0">
+            <a:pPr marL="0" indent="0">
               <a:buNone/>
             </a:pPr>
             <a:r>
@@ -3710,7 +3638,7 @@
           <a:bodyPr wrap="square" lIns="0" tIns="0" rIns="0" bIns="0" rtlCol="0" anchor="ctr"/>
           <a:lstStyle/>
           <a:p>
-            <a:pPr indent="0" marL="0">
+            <a:pPr marL="0" indent="0">
               <a:buNone/>
             </a:pPr>
             <a:r>
@@ -3752,7 +3680,7 @@
             <a:prstDash val="solid"/>
           </a:ln>
           <a:effectLst>
-            <a:outerShdw sx="100000" sy="100000" kx="0" ky="0" algn="bl" rotWithShape="0" blurRad="101600" dist="38100" dir="8100000">
+            <a:outerShdw blurRad="101600" dist="38100" dir="8100000" algn="bl" rotWithShape="0">
               <a:srgbClr val="000000">
                 <a:alpha val="12000"/>
               </a:srgbClr>
@@ -3806,7 +3734,7 @@
           <a:bodyPr wrap="square" lIns="0" tIns="0" rIns="0" bIns="0" rtlCol="0" anchor="ctr"/>
           <a:lstStyle/>
           <a:p>
-            <a:pPr algn="ctr" indent="0" marL="0">
+            <a:pPr marL="0" indent="0" algn="ctr">
               <a:buNone/>
             </a:pPr>
             <a:r>
@@ -3845,11 +3773,11 @@
           <a:bodyPr wrap="square" lIns="0" tIns="0" rIns="0" bIns="0" rtlCol="0" anchor="ctr"/>
           <a:lstStyle/>
           <a:p>
-            <a:pPr indent="0" marL="0">
-              <a:buNone/>
-            </a:pPr>
-            <a:r>
-              <a:rPr lang="en-US" sz="1100" dirty="0">
+            <a:pPr marL="0" indent="0">
+              <a:buNone/>
+            </a:pPr>
+            <a:r>
+              <a:rPr lang="en-US" sz="1400" dirty="0">
                 <a:solidFill>
                   <a:srgbClr val="B0BEC5"/>
                 </a:solidFill>
@@ -3859,7 +3787,7 @@
               </a:rPr>
               <a:t>Global arrivals, continent breakdown, Brazil vs world ranking</a:t>
             </a:r>
-            <a:endParaRPr lang="en-US" sz="1100" dirty="0"/>
+            <a:endParaRPr lang="en-US" sz="1400" dirty="0"/>
           </a:p>
         </p:txBody>
       </p:sp>
@@ -3887,7 +3815,7 @@
             <a:prstDash val="solid"/>
           </a:ln>
           <a:effectLst>
-            <a:outerShdw sx="100000" sy="100000" kx="0" ky="0" algn="bl" rotWithShape="0" blurRad="101600" dist="38100" dir="8100000">
+            <a:outerShdw blurRad="101600" dist="38100" dir="8100000" algn="bl" rotWithShape="0">
               <a:srgbClr val="000000">
                 <a:alpha val="12000"/>
               </a:srgbClr>
@@ -3941,7 +3869,7 @@
           <a:bodyPr wrap="square" lIns="0" tIns="0" rIns="0" bIns="0" rtlCol="0" anchor="ctr"/>
           <a:lstStyle/>
           <a:p>
-            <a:pPr algn="ctr" indent="0" marL="0">
+            <a:pPr marL="0" indent="0" algn="ctr">
               <a:buNone/>
             </a:pPr>
             <a:r>
@@ -3980,11 +3908,11 @@
           <a:bodyPr wrap="square" lIns="0" tIns="0" rIns="0" bIns="0" rtlCol="0" anchor="ctr"/>
           <a:lstStyle/>
           <a:p>
-            <a:pPr indent="0" marL="0">
-              <a:buNone/>
-            </a:pPr>
-            <a:r>
-              <a:rPr lang="en-US" sz="1100" dirty="0">
+            <a:pPr marL="0" indent="0">
+              <a:buNone/>
+            </a:pPr>
+            <a:r>
+              <a:rPr lang="en-US" sz="1400" dirty="0">
                 <a:solidFill>
                   <a:srgbClr val="B0BEC5"/>
                 </a:solidFill>
@@ -3994,7 +3922,7 @@
               </a:rPr>
               <a:t>Recovery timeline, who visits, entry routes, seasonality, state map</a:t>
             </a:r>
-            <a:endParaRPr lang="en-US" sz="1100" dirty="0"/>
+            <a:endParaRPr lang="en-US" sz="1400" dirty="0"/>
           </a:p>
         </p:txBody>
       </p:sp>
@@ -4044,7 +3972,7 @@
           <a:bodyPr wrap="square" lIns="0" tIns="0" rIns="0" bIns="0" rtlCol="0" anchor="ctr"/>
           <a:lstStyle/>
           <a:p>
-            <a:pPr indent="0" marL="0">
+            <a:pPr marL="0" indent="0" algn="ctr">
               <a:buNone/>
             </a:pPr>
             <a:r>
@@ -4056,7 +3984,7 @@
                 <a:ea typeface="Arial" pitchFamily="34" charset="-122"/>
                 <a:cs typeface="Arial" pitchFamily="34" charset="-120"/>
               </a:rPr>
-              <a:t>Live Demo  →  [Tableau Public link — to be added before presentation]</a:t>
+              <a:t>Live Demo</a:t>
             </a:r>
             <a:endParaRPr lang="en-US" sz="1200" dirty="0"/>
           </a:p>
@@ -4083,7 +4011,7 @@
           <a:bodyPr wrap="square" lIns="0" tIns="0" rIns="0" bIns="0" rtlCol="0" anchor="ctr"/>
           <a:lstStyle/>
           <a:p>
-            <a:pPr algn="r" indent="0" marL="0">
+            <a:pPr marL="0" indent="0" algn="r">
               <a:buNone/>
             </a:pPr>
             <a:r>
@@ -4095,7 +4023,7 @@
                 <a:ea typeface="Arial" pitchFamily="34" charset="-122"/>
                 <a:cs typeface="Arial" pitchFamily="34" charset="-120"/>
               </a:rPr>
-              <a:t>5 / 8</a:t>
+              <a:t>5 / 9</a:t>
             </a:r>
             <a:endParaRPr lang="en-US" sz="900" dirty="0"/>
           </a:p>
@@ -4117,6 +4045,7 @@
         <a:solidFill>
           <a:srgbClr val="FFFFFF"/>
         </a:solidFill>
+        <a:effectLst/>
       </p:bgPr>
     </p:bg>
     <p:spTree>
@@ -4179,7 +4108,7 @@
           <a:bodyPr wrap="square" lIns="0" tIns="0" rIns="0" bIns="0" rtlCol="0" anchor="ctr"/>
           <a:lstStyle/>
           <a:p>
-            <a:pPr indent="0" marL="0">
+            <a:pPr marL="0" indent="0">
               <a:buNone/>
             </a:pPr>
             <a:r>
@@ -4221,7 +4150,7 @@
             <a:prstDash val="solid"/>
           </a:ln>
           <a:effectLst>
-            <a:outerShdw sx="100000" sy="100000" kx="0" ky="0" algn="bl" rotWithShape="0" blurRad="101600" dist="38100" dir="8100000">
+            <a:outerShdw blurRad="101600" dist="38100" dir="8100000" algn="bl" rotWithShape="0">
               <a:srgbClr val="000000">
                 <a:alpha val="12000"/>
               </a:srgbClr>
@@ -4275,7 +4204,7 @@
           <a:bodyPr wrap="square" lIns="0" tIns="0" rIns="0" bIns="0" rtlCol="0" anchor="ctr"/>
           <a:lstStyle/>
           <a:p>
-            <a:pPr indent="0" marL="0">
+            <a:pPr marL="0" indent="0">
               <a:buNone/>
             </a:pPr>
             <a:r>
@@ -4314,11 +4243,11 @@
           <a:bodyPr wrap="square" lIns="0" tIns="0" rIns="0" bIns="0" rtlCol="0" anchor="ctr"/>
           <a:lstStyle/>
           <a:p>
-            <a:pPr indent="0" marL="0">
-              <a:buNone/>
-            </a:pPr>
-            <a:r>
-              <a:rPr lang="en-US" sz="1100" dirty="0">
+            <a:pPr marL="0" indent="0">
+              <a:buNone/>
+            </a:pPr>
+            <a:r>
+              <a:rPr lang="en-US" sz="1400" dirty="0">
                 <a:solidFill>
                   <a:srgbClr val="2C3E50"/>
                 </a:solidFill>
@@ -4326,9 +4255,9 @@
                 <a:ea typeface="Arial" pitchFamily="34" charset="-122"/>
                 <a:cs typeface="Arial" pitchFamily="34" charset="-120"/>
               </a:rPr>
-              <a:t>Post-COVID avg ~5.7M/yr vs pre-COVID ~6.4M. However 2024 reached 6.7M — the first year to surpass the pre-COVID peak.</a:t>
-            </a:r>
-            <a:endParaRPr lang="en-US" sz="1100" dirty="0"/>
+              <a:t>Post-COVID avg ~5.7M/yr vs pre-COVID ~6.4M. However, 2024 reached 6.7M — the first year to surpass the pre-COVID peak.</a:t>
+            </a:r>
+            <a:endParaRPr lang="en-US" sz="1400" dirty="0"/>
           </a:p>
         </p:txBody>
       </p:sp>
@@ -4356,7 +4285,7 @@
             <a:prstDash val="solid"/>
           </a:ln>
           <a:effectLst>
-            <a:outerShdw sx="100000" sy="100000" kx="0" ky="0" algn="bl" rotWithShape="0" blurRad="101600" dist="38100" dir="8100000">
+            <a:outerShdw blurRad="101600" dist="38100" dir="8100000" algn="bl" rotWithShape="0">
               <a:srgbClr val="000000">
                 <a:alpha val="12000"/>
               </a:srgbClr>
@@ -4410,7 +4339,7 @@
           <a:bodyPr wrap="square" lIns="0" tIns="0" rIns="0" bIns="0" rtlCol="0" anchor="ctr"/>
           <a:lstStyle/>
           <a:p>
-            <a:pPr indent="0" marL="0">
+            <a:pPr marL="0" indent="0">
               <a:buNone/>
             </a:pPr>
             <a:r>
@@ -4449,11 +4378,11 @@
           <a:bodyPr wrap="square" lIns="0" tIns="0" rIns="0" bIns="0" rtlCol="0" anchor="ctr"/>
           <a:lstStyle/>
           <a:p>
-            <a:pPr indent="0" marL="0">
-              <a:buNone/>
-            </a:pPr>
-            <a:r>
-              <a:rPr lang="en-US" sz="1100" dirty="0">
+            <a:pPr marL="0" indent="0">
+              <a:buNone/>
+            </a:pPr>
+            <a:r>
+              <a:rPr lang="en-US" sz="1400" dirty="0">
                 <a:solidFill>
                   <a:srgbClr val="2C3E50"/>
                 </a:solidFill>
@@ -4463,7 +4392,7 @@
               </a:rPr>
               <a:t>Argentina alone = ~33% of all arrivals. 7 of the top 10 origin countries are South American neighbours.</a:t>
             </a:r>
-            <a:endParaRPr lang="en-US" sz="1100" dirty="0"/>
+            <a:endParaRPr lang="en-US" sz="1400" dirty="0"/>
           </a:p>
         </p:txBody>
       </p:sp>
@@ -4491,7 +4420,7 @@
             <a:prstDash val="solid"/>
           </a:ln>
           <a:effectLst>
-            <a:outerShdw sx="100000" sy="100000" kx="0" ky="0" algn="bl" rotWithShape="0" blurRad="101600" dist="38100" dir="8100000">
+            <a:outerShdw blurRad="101600" dist="38100" dir="8100000" algn="bl" rotWithShape="0">
               <a:srgbClr val="000000">
                 <a:alpha val="12000"/>
               </a:srgbClr>
@@ -4545,7 +4474,7 @@
           <a:bodyPr wrap="square" lIns="0" tIns="0" rIns="0" bIns="0" rtlCol="0" anchor="ctr"/>
           <a:lstStyle/>
           <a:p>
-            <a:pPr indent="0" marL="0">
+            <a:pPr marL="0" indent="0">
               <a:buNone/>
             </a:pPr>
             <a:r>
@@ -4584,11 +4513,11 @@
           <a:bodyPr wrap="square" lIns="0" tIns="0" rIns="0" bIns="0" rtlCol="0" anchor="ctr"/>
           <a:lstStyle/>
           <a:p>
-            <a:pPr indent="0" marL="0">
-              <a:buNone/>
-            </a:pPr>
-            <a:r>
-              <a:rPr lang="en-US" sz="1100" dirty="0">
+            <a:pPr marL="0" indent="0">
+              <a:buNone/>
+            </a:pPr>
+            <a:r>
+              <a:rPr lang="en-US" sz="1400" dirty="0">
                 <a:solidFill>
                   <a:srgbClr val="2C3E50"/>
                 </a:solidFill>
@@ -4598,7 +4527,7 @@
               </a:rPr>
               <a:t>40% of arrivals in summer (Carnaval + Réveillon + beach season). Winter secondary peak from Northern Hemisphere school holidays.</a:t>
             </a:r>
-            <a:endParaRPr lang="en-US" sz="1100" dirty="0"/>
+            <a:endParaRPr lang="en-US" sz="1400" dirty="0"/>
           </a:p>
         </p:txBody>
       </p:sp>
@@ -4626,7 +4555,7 @@
             <a:prstDash val="solid"/>
           </a:ln>
           <a:effectLst>
-            <a:outerShdw sx="100000" sy="100000" kx="0" ky="0" algn="bl" rotWithShape="0" blurRad="101600" dist="38100" dir="8100000">
+            <a:outerShdw blurRad="101600" dist="38100" dir="8100000" algn="bl" rotWithShape="0">
               <a:srgbClr val="000000">
                 <a:alpha val="12000"/>
               </a:srgbClr>
@@ -4680,7 +4609,7 @@
           <a:bodyPr wrap="square" lIns="0" tIns="0" rIns="0" bIns="0" rtlCol="0" anchor="ctr"/>
           <a:lstStyle/>
           <a:p>
-            <a:pPr indent="0" marL="0">
+            <a:pPr marL="0" indent="0">
               <a:buNone/>
             </a:pPr>
             <a:r>
@@ -4719,11 +4648,11 @@
           <a:bodyPr wrap="square" lIns="0" tIns="0" rIns="0" bIns="0" rtlCol="0" anchor="ctr"/>
           <a:lstStyle/>
           <a:p>
-            <a:pPr indent="0" marL="0">
-              <a:buNone/>
-            </a:pPr>
-            <a:r>
-              <a:rPr lang="en-US" sz="1100" dirty="0">
+            <a:pPr marL="0" indent="0">
+              <a:buNone/>
+            </a:pPr>
+            <a:r>
+              <a:rPr lang="en-US" sz="1400" dirty="0">
                 <a:solidFill>
                   <a:srgbClr val="2C3E50"/>
                 </a:solidFill>
@@ -4733,7 +4662,7 @@
               </a:rPr>
               <a:t>Air entries recovering fastest post-COVID. Sea entries (cruise ships) show the slowest recovery — cruise tourism rebuilds confidence slowly.</a:t>
             </a:r>
-            <a:endParaRPr lang="en-US" sz="1100" dirty="0"/>
+            <a:endParaRPr lang="en-US" sz="1400" dirty="0"/>
           </a:p>
         </p:txBody>
       </p:sp>
@@ -4758,7 +4687,7 @@
           <a:bodyPr wrap="square" lIns="0" tIns="0" rIns="0" bIns="0" rtlCol="0" anchor="ctr"/>
           <a:lstStyle/>
           <a:p>
-            <a:pPr indent="0" marL="0">
+            <a:pPr marL="0" indent="0">
               <a:buNone/>
             </a:pPr>
             <a:r>
@@ -4797,7 +4726,7 @@
           <a:bodyPr wrap="square" lIns="0" tIns="0" rIns="0" bIns="0" rtlCol="0" anchor="ctr"/>
           <a:lstStyle/>
           <a:p>
-            <a:pPr algn="r" indent="0" marL="0">
+            <a:pPr marL="0" indent="0" algn="r">
               <a:buNone/>
             </a:pPr>
             <a:r>
@@ -4809,7 +4738,7 @@
                 <a:ea typeface="Arial" pitchFamily="34" charset="-122"/>
                 <a:cs typeface="Arial" pitchFamily="34" charset="-120"/>
               </a:rPr>
-              <a:t>6 / 8</a:t>
+              <a:t>6 / 9</a:t>
             </a:r>
             <a:endParaRPr lang="en-US" sz="900" dirty="0"/>
           </a:p>
@@ -4831,6 +4760,7 @@
         <a:solidFill>
           <a:srgbClr val="FFFFFF"/>
         </a:solidFill>
+        <a:effectLst/>
       </p:bgPr>
     </p:bg>
     <p:spTree>
@@ -4880,7 +4810,7 @@
         </p:nvSpPr>
         <p:spPr>
           <a:xfrm>
-            <a:off x="457200" y="201168"/>
+            <a:off x="457200" y="228600"/>
             <a:ext cx="8229600" cy="548640"/>
           </a:xfrm>
           <a:prstGeom prst="rect">
@@ -4893,7 +4823,7 @@
           <a:bodyPr wrap="square" lIns="0" tIns="0" rIns="0" bIns="0" rtlCol="0" anchor="ctr"/>
           <a:lstStyle/>
           <a:p>
-            <a:pPr indent="0" marL="0">
+            <a:pPr marL="0" indent="0">
               <a:buNone/>
             </a:pPr>
             <a:r>
@@ -4905,7 +4835,7 @@
                 <a:ea typeface="Arial" pitchFamily="34" charset="-122"/>
                 <a:cs typeface="Arial" pitchFamily="34" charset="-120"/>
               </a:rPr>
-              <a:t>Next Steps</a:t>
+              <a:t>Brazil Travel Recommender App</a:t>
             </a:r>
             <a:endParaRPr lang="en-US" sz="3400" dirty="0"/>
           </a:p>
@@ -4913,14 +4843,593 @@
       </p:sp>
       <p:sp>
         <p:nvSpPr>
-          <p:cNvPr id="4" name="Shape 2"/>
-          <p:cNvSpPr/>
-          <p:nvPr/>
-        </p:nvSpPr>
-        <p:spPr>
-          <a:xfrm>
-            <a:off x="365760" y="914400"/>
-            <a:ext cx="3200400" cy="3657600"/>
+          <p:cNvPr id="4" name="Text 2"/>
+          <p:cNvSpPr/>
+          <p:nvPr/>
+        </p:nvSpPr>
+        <p:spPr>
+          <a:xfrm>
+            <a:off x="457200" y="868680"/>
+            <a:ext cx="8229600" cy="320040"/>
+          </a:xfrm>
+          <a:prstGeom prst="rect">
+            <a:avLst/>
+          </a:prstGeom>
+          <a:noFill/>
+          <a:ln/>
+        </p:spPr>
+        <p:txBody>
+          <a:bodyPr wrap="square" lIns="0" tIns="0" rIns="0" bIns="0" rtlCol="0" anchor="ctr"/>
+          <a:lstStyle/>
+          <a:p>
+            <a:pPr marL="0" indent="0">
+              <a:buNone/>
+            </a:pPr>
+            <a:r>
+              <a:rPr lang="en-US" sz="1300" dirty="0">
+                <a:solidFill>
+                  <a:srgbClr val="2C3E50"/>
+                </a:solidFill>
+                <a:latin typeface="Arial" pitchFamily="34" charset="0"/>
+                <a:ea typeface="Arial" pitchFamily="34" charset="-122"/>
+                <a:cs typeface="Arial" pitchFamily="34" charset="-120"/>
+              </a:rPr>
+              <a:t>An interactive Streamlit app that recommends Brazilian destinations based on user travel preferences.</a:t>
+            </a:r>
+            <a:endParaRPr lang="en-US" sz="1300" dirty="0"/>
+          </a:p>
+        </p:txBody>
+      </p:sp>
+      <p:sp>
+        <p:nvSpPr>
+          <p:cNvPr id="5" name="Shape 3"/>
+          <p:cNvSpPr/>
+          <p:nvPr/>
+        </p:nvSpPr>
+        <p:spPr>
+          <a:xfrm>
+            <a:off x="365760" y="1325880"/>
+            <a:ext cx="1965960" cy="1005840"/>
+          </a:xfrm>
+          <a:prstGeom prst="rect">
+            <a:avLst/>
+          </a:prstGeom>
+          <a:solidFill>
+            <a:srgbClr val="E8EDF0"/>
+          </a:solidFill>
+          <a:ln w="12700">
+            <a:solidFill>
+              <a:srgbClr val="E8EDF0"/>
+            </a:solidFill>
+            <a:prstDash val="solid"/>
+          </a:ln>
+          <a:effectLst>
+            <a:outerShdw blurRad="101600" dist="38100" dir="8100000" algn="bl" rotWithShape="0">
+              <a:srgbClr val="000000">
+                <a:alpha val="12000"/>
+              </a:srgbClr>
+            </a:outerShdw>
+          </a:effectLst>
+        </p:spPr>
+      </p:sp>
+      <p:sp>
+        <p:nvSpPr>
+          <p:cNvPr id="6" name="Shape 4"/>
+          <p:cNvSpPr/>
+          <p:nvPr/>
+        </p:nvSpPr>
+        <p:spPr>
+          <a:xfrm>
+            <a:off x="365760" y="1325880"/>
+            <a:ext cx="1965960" cy="329184"/>
+          </a:xfrm>
+          <a:prstGeom prst="rect">
+            <a:avLst/>
+          </a:prstGeom>
+          <a:solidFill>
+            <a:srgbClr val="0D7EA8"/>
+          </a:solidFill>
+          <a:ln w="12700">
+            <a:solidFill>
+              <a:srgbClr val="0D7EA8"/>
+            </a:solidFill>
+            <a:prstDash val="solid"/>
+          </a:ln>
+        </p:spPr>
+      </p:sp>
+      <p:sp>
+        <p:nvSpPr>
+          <p:cNvPr id="7" name="Text 5"/>
+          <p:cNvSpPr/>
+          <p:nvPr/>
+        </p:nvSpPr>
+        <p:spPr>
+          <a:xfrm>
+            <a:off x="457200" y="1353312"/>
+            <a:ext cx="1783080" cy="256032"/>
+          </a:xfrm>
+          <a:prstGeom prst="rect">
+            <a:avLst/>
+          </a:prstGeom>
+          <a:noFill/>
+          <a:ln/>
+        </p:spPr>
+        <p:txBody>
+          <a:bodyPr wrap="square" lIns="0" tIns="0" rIns="0" bIns="0" rtlCol="0" anchor="ctr"/>
+          <a:lstStyle/>
+          <a:p>
+            <a:pPr marL="0" indent="0">
+              <a:buNone/>
+            </a:pPr>
+            <a:r>
+              <a:rPr lang="en-US" sz="1100" b="1" dirty="0">
+                <a:solidFill>
+                  <a:srgbClr val="FFFFFF"/>
+                </a:solidFill>
+                <a:latin typeface="Arial" pitchFamily="34" charset="0"/>
+                <a:ea typeface="Arial" pitchFamily="34" charset="-122"/>
+                <a:cs typeface="Arial" pitchFamily="34" charset="-120"/>
+              </a:rPr>
+              <a:t>When to travel</a:t>
+            </a:r>
+            <a:endParaRPr lang="en-US" sz="1100" dirty="0"/>
+          </a:p>
+        </p:txBody>
+      </p:sp>
+      <p:sp>
+        <p:nvSpPr>
+          <p:cNvPr id="8" name="Text 6"/>
+          <p:cNvSpPr/>
+          <p:nvPr/>
+        </p:nvSpPr>
+        <p:spPr>
+          <a:xfrm>
+            <a:off x="457200" y="1719072"/>
+            <a:ext cx="1783080" cy="502920"/>
+          </a:xfrm>
+          <a:prstGeom prst="rect">
+            <a:avLst/>
+          </a:prstGeom>
+          <a:noFill/>
+          <a:ln/>
+        </p:spPr>
+        <p:txBody>
+          <a:bodyPr wrap="square" lIns="0" tIns="0" rIns="0" bIns="0" rtlCol="0" anchor="ctr"/>
+          <a:lstStyle/>
+          <a:p>
+            <a:pPr marL="0" indent="0">
+              <a:buNone/>
+            </a:pPr>
+            <a:r>
+              <a:rPr lang="en-US" sz="1400" dirty="0">
+                <a:solidFill>
+                  <a:srgbClr val="2C3E50"/>
+                </a:solidFill>
+                <a:latin typeface="Arial" pitchFamily="34" charset="0"/>
+                <a:ea typeface="Arial" pitchFamily="34" charset="-122"/>
+                <a:cs typeface="Arial" pitchFamily="34" charset="-120"/>
+              </a:rPr>
+              <a:t>Month — January to December</a:t>
+            </a:r>
+            <a:endParaRPr lang="en-US" sz="1400" dirty="0"/>
+          </a:p>
+        </p:txBody>
+      </p:sp>
+      <p:sp>
+        <p:nvSpPr>
+          <p:cNvPr id="9" name="Shape 7"/>
+          <p:cNvSpPr/>
+          <p:nvPr/>
+        </p:nvSpPr>
+        <p:spPr>
+          <a:xfrm>
+            <a:off x="2487168" y="1325880"/>
+            <a:ext cx="1965960" cy="1005840"/>
+          </a:xfrm>
+          <a:prstGeom prst="rect">
+            <a:avLst/>
+          </a:prstGeom>
+          <a:solidFill>
+            <a:srgbClr val="E8EDF0"/>
+          </a:solidFill>
+          <a:ln w="12700">
+            <a:solidFill>
+              <a:srgbClr val="E8EDF0"/>
+            </a:solidFill>
+            <a:prstDash val="solid"/>
+          </a:ln>
+          <a:effectLst>
+            <a:outerShdw blurRad="101600" dist="38100" dir="8100000" algn="bl" rotWithShape="0">
+              <a:srgbClr val="000000">
+                <a:alpha val="12000"/>
+              </a:srgbClr>
+            </a:outerShdw>
+          </a:effectLst>
+        </p:spPr>
+      </p:sp>
+      <p:sp>
+        <p:nvSpPr>
+          <p:cNvPr id="10" name="Shape 8"/>
+          <p:cNvSpPr/>
+          <p:nvPr/>
+        </p:nvSpPr>
+        <p:spPr>
+          <a:xfrm>
+            <a:off x="2487168" y="1325880"/>
+            <a:ext cx="1965960" cy="329184"/>
+          </a:xfrm>
+          <a:prstGeom prst="rect">
+            <a:avLst/>
+          </a:prstGeom>
+          <a:solidFill>
+            <a:srgbClr val="38B6D8"/>
+          </a:solidFill>
+          <a:ln w="12700">
+            <a:solidFill>
+              <a:srgbClr val="38B6D8"/>
+            </a:solidFill>
+            <a:prstDash val="solid"/>
+          </a:ln>
+        </p:spPr>
+      </p:sp>
+      <p:sp>
+        <p:nvSpPr>
+          <p:cNvPr id="11" name="Text 9"/>
+          <p:cNvSpPr/>
+          <p:nvPr/>
+        </p:nvSpPr>
+        <p:spPr>
+          <a:xfrm>
+            <a:off x="2578608" y="1353312"/>
+            <a:ext cx="1783080" cy="256032"/>
+          </a:xfrm>
+          <a:prstGeom prst="rect">
+            <a:avLst/>
+          </a:prstGeom>
+          <a:noFill/>
+          <a:ln/>
+        </p:spPr>
+        <p:txBody>
+          <a:bodyPr wrap="square" lIns="0" tIns="0" rIns="0" bIns="0" rtlCol="0" anchor="ctr"/>
+          <a:lstStyle/>
+          <a:p>
+            <a:pPr marL="0" indent="0">
+              <a:buNone/>
+            </a:pPr>
+            <a:r>
+              <a:rPr lang="en-US" sz="1100" b="1" dirty="0">
+                <a:solidFill>
+                  <a:srgbClr val="FFFFFF"/>
+                </a:solidFill>
+                <a:latin typeface="Arial" pitchFamily="34" charset="0"/>
+                <a:ea typeface="Arial" pitchFamily="34" charset="-122"/>
+                <a:cs typeface="Arial" pitchFamily="34" charset="-120"/>
+              </a:rPr>
+              <a:t>Experience type</a:t>
+            </a:r>
+            <a:endParaRPr lang="en-US" sz="1100" dirty="0"/>
+          </a:p>
+        </p:txBody>
+      </p:sp>
+      <p:sp>
+        <p:nvSpPr>
+          <p:cNvPr id="12" name="Text 10"/>
+          <p:cNvSpPr/>
+          <p:nvPr/>
+        </p:nvSpPr>
+        <p:spPr>
+          <a:xfrm>
+            <a:off x="2578608" y="1719072"/>
+            <a:ext cx="1783080" cy="502920"/>
+          </a:xfrm>
+          <a:prstGeom prst="rect">
+            <a:avLst/>
+          </a:prstGeom>
+          <a:noFill/>
+          <a:ln/>
+        </p:spPr>
+        <p:txBody>
+          <a:bodyPr wrap="square" lIns="0" tIns="0" rIns="0" bIns="0" rtlCol="0" anchor="ctr"/>
+          <a:lstStyle/>
+          <a:p>
+            <a:pPr marL="0" indent="0">
+              <a:buNone/>
+            </a:pPr>
+            <a:r>
+              <a:rPr lang="en-US" sz="1400" dirty="0">
+                <a:solidFill>
+                  <a:srgbClr val="2C3E50"/>
+                </a:solidFill>
+                <a:latin typeface="Arial" pitchFamily="34" charset="0"/>
+                <a:ea typeface="Arial" pitchFamily="34" charset="-122"/>
+                <a:cs typeface="Arial" pitchFamily="34" charset="-120"/>
+              </a:rPr>
+              <a:t>Nature, beach, culture, adventure, city</a:t>
+            </a:r>
+            <a:endParaRPr lang="en-US" sz="1400" dirty="0"/>
+          </a:p>
+        </p:txBody>
+      </p:sp>
+      <p:sp>
+        <p:nvSpPr>
+          <p:cNvPr id="13" name="Shape 11"/>
+          <p:cNvSpPr/>
+          <p:nvPr/>
+        </p:nvSpPr>
+        <p:spPr>
+          <a:xfrm>
+            <a:off x="4608576" y="1325880"/>
+            <a:ext cx="1965960" cy="1005840"/>
+          </a:xfrm>
+          <a:prstGeom prst="rect">
+            <a:avLst/>
+          </a:prstGeom>
+          <a:solidFill>
+            <a:srgbClr val="E8EDF0"/>
+          </a:solidFill>
+          <a:ln w="12700">
+            <a:solidFill>
+              <a:srgbClr val="E8EDF0"/>
+            </a:solidFill>
+            <a:prstDash val="solid"/>
+          </a:ln>
+          <a:effectLst>
+            <a:outerShdw blurRad="101600" dist="38100" dir="8100000" algn="bl" rotWithShape="0">
+              <a:srgbClr val="000000">
+                <a:alpha val="12000"/>
+              </a:srgbClr>
+            </a:outerShdw>
+          </a:effectLst>
+        </p:spPr>
+      </p:sp>
+      <p:sp>
+        <p:nvSpPr>
+          <p:cNvPr id="14" name="Shape 12"/>
+          <p:cNvSpPr/>
+          <p:nvPr/>
+        </p:nvSpPr>
+        <p:spPr>
+          <a:xfrm>
+            <a:off x="4608576" y="1325880"/>
+            <a:ext cx="1965960" cy="329184"/>
+          </a:xfrm>
+          <a:prstGeom prst="rect">
+            <a:avLst/>
+          </a:prstGeom>
+          <a:solidFill>
+            <a:srgbClr val="D9A055"/>
+          </a:solidFill>
+          <a:ln w="12700">
+            <a:solidFill>
+              <a:srgbClr val="D9A055"/>
+            </a:solidFill>
+            <a:prstDash val="solid"/>
+          </a:ln>
+        </p:spPr>
+      </p:sp>
+      <p:sp>
+        <p:nvSpPr>
+          <p:cNvPr id="15" name="Text 13"/>
+          <p:cNvSpPr/>
+          <p:nvPr/>
+        </p:nvSpPr>
+        <p:spPr>
+          <a:xfrm>
+            <a:off x="4700016" y="1353312"/>
+            <a:ext cx="1783080" cy="256032"/>
+          </a:xfrm>
+          <a:prstGeom prst="rect">
+            <a:avLst/>
+          </a:prstGeom>
+          <a:noFill/>
+          <a:ln/>
+        </p:spPr>
+        <p:txBody>
+          <a:bodyPr wrap="square" lIns="0" tIns="0" rIns="0" bIns="0" rtlCol="0" anchor="ctr"/>
+          <a:lstStyle/>
+          <a:p>
+            <a:pPr marL="0" indent="0">
+              <a:buNone/>
+            </a:pPr>
+            <a:r>
+              <a:rPr lang="en-US" sz="1100" b="1" dirty="0">
+                <a:solidFill>
+                  <a:srgbClr val="FFFFFF"/>
+                </a:solidFill>
+                <a:latin typeface="Arial" pitchFamily="34" charset="0"/>
+                <a:ea typeface="Arial" pitchFamily="34" charset="-122"/>
+                <a:cs typeface="Arial" pitchFamily="34" charset="-120"/>
+              </a:rPr>
+              <a:t>Crowd preference</a:t>
+            </a:r>
+            <a:endParaRPr lang="en-US" sz="1100" dirty="0"/>
+          </a:p>
+        </p:txBody>
+      </p:sp>
+      <p:sp>
+        <p:nvSpPr>
+          <p:cNvPr id="16" name="Text 14"/>
+          <p:cNvSpPr/>
+          <p:nvPr/>
+        </p:nvSpPr>
+        <p:spPr>
+          <a:xfrm>
+            <a:off x="4700016" y="1719072"/>
+            <a:ext cx="1783080" cy="502920"/>
+          </a:xfrm>
+          <a:prstGeom prst="rect">
+            <a:avLst/>
+          </a:prstGeom>
+          <a:noFill/>
+          <a:ln/>
+        </p:spPr>
+        <p:txBody>
+          <a:bodyPr wrap="square" lIns="0" tIns="0" rIns="0" bIns="0" rtlCol="0" anchor="ctr"/>
+          <a:lstStyle/>
+          <a:p>
+            <a:pPr marL="0" indent="0">
+              <a:buNone/>
+            </a:pPr>
+            <a:r>
+              <a:rPr lang="en-US" sz="1400" dirty="0">
+                <a:solidFill>
+                  <a:srgbClr val="2C3E50"/>
+                </a:solidFill>
+                <a:latin typeface="Arial" pitchFamily="34" charset="0"/>
+                <a:ea typeface="Arial" pitchFamily="34" charset="-122"/>
+                <a:cs typeface="Arial" pitchFamily="34" charset="-120"/>
+              </a:rPr>
+              <a:t>Love the buzz vs prefer quiet</a:t>
+            </a:r>
+            <a:endParaRPr lang="en-US" sz="1400" dirty="0"/>
+          </a:p>
+        </p:txBody>
+      </p:sp>
+      <p:sp>
+        <p:nvSpPr>
+          <p:cNvPr id="17" name="Shape 15"/>
+          <p:cNvSpPr/>
+          <p:nvPr/>
+        </p:nvSpPr>
+        <p:spPr>
+          <a:xfrm>
+            <a:off x="6729984" y="1325880"/>
+            <a:ext cx="1965960" cy="1005840"/>
+          </a:xfrm>
+          <a:prstGeom prst="rect">
+            <a:avLst/>
+          </a:prstGeom>
+          <a:solidFill>
+            <a:srgbClr val="E8EDF0"/>
+          </a:solidFill>
+          <a:ln w="12700">
+            <a:solidFill>
+              <a:srgbClr val="E8EDF0"/>
+            </a:solidFill>
+            <a:prstDash val="solid"/>
+          </a:ln>
+          <a:effectLst>
+            <a:outerShdw blurRad="101600" dist="38100" dir="8100000" algn="bl" rotWithShape="0">
+              <a:srgbClr val="000000">
+                <a:alpha val="12000"/>
+              </a:srgbClr>
+            </a:outerShdw>
+          </a:effectLst>
+        </p:spPr>
+      </p:sp>
+      <p:sp>
+        <p:nvSpPr>
+          <p:cNvPr id="18" name="Shape 16"/>
+          <p:cNvSpPr/>
+          <p:nvPr/>
+        </p:nvSpPr>
+        <p:spPr>
+          <a:xfrm>
+            <a:off x="6729984" y="1325880"/>
+            <a:ext cx="1965960" cy="329184"/>
+          </a:xfrm>
+          <a:prstGeom prst="rect">
+            <a:avLst/>
+          </a:prstGeom>
+          <a:solidFill>
+            <a:srgbClr val="6B7C8D"/>
+          </a:solidFill>
+          <a:ln w="12700">
+            <a:solidFill>
+              <a:srgbClr val="6B7C8D"/>
+            </a:solidFill>
+            <a:prstDash val="solid"/>
+          </a:ln>
+        </p:spPr>
+      </p:sp>
+      <p:sp>
+        <p:nvSpPr>
+          <p:cNvPr id="19" name="Text 17"/>
+          <p:cNvSpPr/>
+          <p:nvPr/>
+        </p:nvSpPr>
+        <p:spPr>
+          <a:xfrm>
+            <a:off x="6821424" y="1353312"/>
+            <a:ext cx="1783080" cy="256032"/>
+          </a:xfrm>
+          <a:prstGeom prst="rect">
+            <a:avLst/>
+          </a:prstGeom>
+          <a:noFill/>
+          <a:ln/>
+        </p:spPr>
+        <p:txBody>
+          <a:bodyPr wrap="square" lIns="0" tIns="0" rIns="0" bIns="0" rtlCol="0" anchor="ctr"/>
+          <a:lstStyle/>
+          <a:p>
+            <a:pPr marL="0" indent="0">
+              <a:buNone/>
+            </a:pPr>
+            <a:r>
+              <a:rPr lang="en-US" sz="1100" b="1" dirty="0">
+                <a:solidFill>
+                  <a:srgbClr val="FFFFFF"/>
+                </a:solidFill>
+                <a:latin typeface="Arial" pitchFamily="34" charset="0"/>
+                <a:ea typeface="Arial" pitchFamily="34" charset="-122"/>
+                <a:cs typeface="Arial" pitchFamily="34" charset="-120"/>
+              </a:rPr>
+              <a:t>Weather preference</a:t>
+            </a:r>
+            <a:endParaRPr lang="en-US" sz="1100" dirty="0"/>
+          </a:p>
+        </p:txBody>
+      </p:sp>
+      <p:sp>
+        <p:nvSpPr>
+          <p:cNvPr id="20" name="Text 18"/>
+          <p:cNvSpPr/>
+          <p:nvPr/>
+        </p:nvSpPr>
+        <p:spPr>
+          <a:xfrm>
+            <a:off x="6821424" y="1719072"/>
+            <a:ext cx="1783080" cy="502920"/>
+          </a:xfrm>
+          <a:prstGeom prst="rect">
+            <a:avLst/>
+          </a:prstGeom>
+          <a:noFill/>
+          <a:ln/>
+        </p:spPr>
+        <p:txBody>
+          <a:bodyPr wrap="square" lIns="0" tIns="0" rIns="0" bIns="0" rtlCol="0" anchor="ctr"/>
+          <a:lstStyle/>
+          <a:p>
+            <a:pPr marL="0" indent="0">
+              <a:buNone/>
+            </a:pPr>
+            <a:r>
+              <a:rPr lang="en-US" sz="1400" dirty="0">
+                <a:solidFill>
+                  <a:srgbClr val="2C3E50"/>
+                </a:solidFill>
+                <a:latin typeface="Arial" pitchFamily="34" charset="0"/>
+                <a:ea typeface="Arial" pitchFamily="34" charset="-122"/>
+                <a:cs typeface="Arial" pitchFamily="34" charset="-120"/>
+              </a:rPr>
+              <a:t>Hot, warm, mild, cool</a:t>
+            </a:r>
+            <a:endParaRPr lang="en-US" sz="1400" dirty="0"/>
+          </a:p>
+        </p:txBody>
+      </p:sp>
+      <p:sp>
+        <p:nvSpPr>
+          <p:cNvPr id="21" name="Shape 19"/>
+          <p:cNvSpPr/>
+          <p:nvPr/>
+        </p:nvSpPr>
+        <p:spPr>
+          <a:xfrm>
+            <a:off x="365760" y="2468880"/>
+            <a:ext cx="8412480" cy="1920240"/>
           </a:xfrm>
           <a:prstGeom prst="rect">
             <a:avLst/>
@@ -4935,24 +5444,31 @@
             <a:prstDash val="solid"/>
           </a:ln>
           <a:effectLst>
-            <a:outerShdw sx="100000" sy="100000" kx="0" ky="0" algn="bl" rotWithShape="0" blurRad="101600" dist="38100" dir="8100000">
+            <a:outerShdw blurRad="101600" dist="38100" dir="8100000" algn="bl" rotWithShape="0">
               <a:srgbClr val="000000">
                 <a:alpha val="12000"/>
               </a:srgbClr>
             </a:outerShdw>
           </a:effectLst>
         </p:spPr>
-      </p:sp>
-      <p:sp>
-        <p:nvSpPr>
-          <p:cNvPr id="5" name="Shape 3"/>
-          <p:cNvSpPr/>
-          <p:nvPr/>
-        </p:nvSpPr>
-        <p:spPr>
-          <a:xfrm>
-            <a:off x="365760" y="914400"/>
-            <a:ext cx="3200400" cy="438912"/>
+        <p:txBody>
+          <a:bodyPr/>
+          <a:lstStyle/>
+          <a:p>
+            <a:endParaRPr lang="pt-BR" dirty="0"/>
+          </a:p>
+        </p:txBody>
+      </p:sp>
+      <p:sp>
+        <p:nvSpPr>
+          <p:cNvPr id="22" name="Shape 20"/>
+          <p:cNvSpPr/>
+          <p:nvPr/>
+        </p:nvSpPr>
+        <p:spPr>
+          <a:xfrm>
+            <a:off x="365760" y="2468880"/>
+            <a:ext cx="8412480" cy="347472"/>
           </a:xfrm>
           <a:prstGeom prst="rect">
             <a:avLst/>
@@ -4970,30 +5486,30 @@
       </p:sp>
       <p:sp>
         <p:nvSpPr>
-          <p:cNvPr id="6" name="Text 4"/>
-          <p:cNvSpPr/>
-          <p:nvPr/>
-        </p:nvSpPr>
-        <p:spPr>
-          <a:xfrm>
-            <a:off x="475488" y="950976"/>
-            <a:ext cx="3017520" cy="365760"/>
-          </a:xfrm>
-          <a:prstGeom prst="rect">
-            <a:avLst/>
-          </a:prstGeom>
-          <a:noFill/>
-          <a:ln/>
-        </p:spPr>
-        <p:txBody>
-          <a:bodyPr wrap="square" lIns="0" tIns="0" rIns="0" bIns="0" rtlCol="0" anchor="ctr"/>
-          <a:lstStyle/>
-          <a:p>
-            <a:pPr indent="0" marL="0">
-              <a:buNone/>
-            </a:pPr>
-            <a:r>
-              <a:rPr lang="en-US" sz="1300" b="1" dirty="0">
+          <p:cNvPr id="23" name="Text 21"/>
+          <p:cNvSpPr/>
+          <p:nvPr/>
+        </p:nvSpPr>
+        <p:spPr>
+          <a:xfrm>
+            <a:off x="502920" y="2496312"/>
+            <a:ext cx="8229600" cy="274320"/>
+          </a:xfrm>
+          <a:prstGeom prst="rect">
+            <a:avLst/>
+          </a:prstGeom>
+          <a:noFill/>
+          <a:ln/>
+        </p:spPr>
+        <p:txBody>
+          <a:bodyPr wrap="square" lIns="0" tIns="0" rIns="0" bIns="0" rtlCol="0" anchor="ctr"/>
+          <a:lstStyle/>
+          <a:p>
+            <a:pPr marL="0" indent="0">
+              <a:buNone/>
+            </a:pPr>
+            <a:r>
+              <a:rPr lang="en-US" sz="1200" b="1" dirty="0">
                 <a:solidFill>
                   <a:srgbClr val="FFFFFF"/>
                 </a:solidFill>
@@ -5001,38 +5517,38 @@
                 <a:ea typeface="Arial" pitchFamily="34" charset="-122"/>
                 <a:cs typeface="Arial" pitchFamily="34" charset="-120"/>
               </a:rPr>
-              <a:t>Future Analysis</a:t>
-            </a:r>
-            <a:endParaRPr lang="en-US" sz="1300" dirty="0"/>
-          </a:p>
-        </p:txBody>
-      </p:sp>
-      <p:sp>
-        <p:nvSpPr>
-          <p:cNvPr id="7" name="Text 5"/>
-          <p:cNvSpPr/>
-          <p:nvPr/>
-        </p:nvSpPr>
-        <p:spPr>
-          <a:xfrm>
-            <a:off x="475488" y="1481328"/>
-            <a:ext cx="2999232" cy="502920"/>
-          </a:xfrm>
-          <a:prstGeom prst="rect">
-            <a:avLst/>
-          </a:prstGeom>
-          <a:noFill/>
-          <a:ln/>
-        </p:spPr>
-        <p:txBody>
-          <a:bodyPr wrap="square" lIns="0" tIns="0" rIns="0" bIns="0" rtlCol="0" anchor="ctr"/>
-          <a:lstStyle/>
-          <a:p>
-            <a:pPr indent="0" marL="0">
-              <a:buNone/>
-            </a:pPr>
-            <a:r>
-              <a:rPr lang="en-US" sz="1100" dirty="0">
+              <a:t>What the app returns</a:t>
+            </a:r>
+            <a:endParaRPr lang="en-US" sz="1200" dirty="0"/>
+          </a:p>
+        </p:txBody>
+      </p:sp>
+      <p:sp>
+        <p:nvSpPr>
+          <p:cNvPr id="24" name="Text 22"/>
+          <p:cNvSpPr/>
+          <p:nvPr/>
+        </p:nvSpPr>
+        <p:spPr>
+          <a:xfrm>
+            <a:off x="502920" y="3063240"/>
+            <a:ext cx="2651760" cy="384048"/>
+          </a:xfrm>
+          <a:prstGeom prst="rect">
+            <a:avLst/>
+          </a:prstGeom>
+          <a:noFill/>
+          <a:ln/>
+        </p:spPr>
+        <p:txBody>
+          <a:bodyPr wrap="square" lIns="0" tIns="0" rIns="0" bIns="0" rtlCol="0" anchor="ctr"/>
+          <a:lstStyle/>
+          <a:p>
+            <a:pPr marL="0" indent="0">
+              <a:buNone/>
+            </a:pPr>
+            <a:r>
+              <a:rPr lang="en-US" sz="1400" dirty="0">
                 <a:solidFill>
                   <a:srgbClr val="2C3E50"/>
                 </a:solidFill>
@@ -5040,278 +5556,38 @@
                 <a:ea typeface="Arial" pitchFamily="34" charset="-122"/>
                 <a:cs typeface="Arial" pitchFamily="34" charset="-120"/>
               </a:rPr>
-              <a:t>Gather 2025 &amp; 2026 data to enable a true balanced comparison:</a:t>
-            </a:r>
-            <a:endParaRPr lang="en-US" sz="1100" dirty="0"/>
-          </a:p>
-        </p:txBody>
-      </p:sp>
-      <p:sp>
-        <p:nvSpPr>
-          <p:cNvPr id="8" name="Shape 6"/>
-          <p:cNvSpPr/>
-          <p:nvPr/>
-        </p:nvSpPr>
-        <p:spPr>
-          <a:xfrm>
-            <a:off x="475488" y="2084832"/>
-            <a:ext cx="1417320" cy="822960"/>
-          </a:xfrm>
-          <a:prstGeom prst="rect">
-            <a:avLst/>
-          </a:prstGeom>
-          <a:solidFill>
-            <a:srgbClr val="FFFFFF"/>
-          </a:solidFill>
-          <a:ln w="12700">
-            <a:solidFill>
-              <a:srgbClr val="FFFFFF"/>
-            </a:solidFill>
-            <a:prstDash val="solid"/>
-          </a:ln>
-        </p:spPr>
-      </p:sp>
-      <p:sp>
-        <p:nvSpPr>
-          <p:cNvPr id="9" name="Text 7"/>
-          <p:cNvSpPr/>
-          <p:nvPr/>
-        </p:nvSpPr>
-        <p:spPr>
-          <a:xfrm>
-            <a:off x="530352" y="2121408"/>
-            <a:ext cx="1280160" cy="274320"/>
-          </a:xfrm>
-          <a:prstGeom prst="rect">
-            <a:avLst/>
-          </a:prstGeom>
-          <a:noFill/>
-          <a:ln/>
-        </p:spPr>
-        <p:txBody>
-          <a:bodyPr wrap="square" lIns="0" tIns="0" rIns="0" bIns="0" rtlCol="0" anchor="ctr"/>
-          <a:lstStyle/>
-          <a:p>
-            <a:pPr indent="0" marL="0">
-              <a:buNone/>
-            </a:pPr>
-            <a:r>
-              <a:rPr lang="en-US" sz="1100" b="1" dirty="0">
-                <a:solidFill>
-                  <a:srgbClr val="0D7EA8"/>
-                </a:solidFill>
-                <a:latin typeface="Arial" pitchFamily="34" charset="0"/>
-                <a:ea typeface="Arial" pitchFamily="34" charset="-122"/>
-                <a:cs typeface="Arial" pitchFamily="34" charset="-120"/>
-              </a:rPr>
-              <a:t>Pre-COVID</a:t>
-            </a:r>
-            <a:endParaRPr lang="en-US" sz="1100" dirty="0"/>
-          </a:p>
-        </p:txBody>
-      </p:sp>
-      <p:sp>
-        <p:nvSpPr>
-          <p:cNvPr id="10" name="Text 8"/>
-          <p:cNvSpPr/>
-          <p:nvPr/>
-        </p:nvSpPr>
-        <p:spPr>
-          <a:xfrm>
-            <a:off x="530352" y="2395728"/>
-            <a:ext cx="1280160" cy="411480"/>
-          </a:xfrm>
-          <a:prstGeom prst="rect">
-            <a:avLst/>
-          </a:prstGeom>
-          <a:noFill/>
-          <a:ln/>
-        </p:spPr>
-        <p:txBody>
-          <a:bodyPr wrap="square" lIns="0" tIns="0" rIns="0" bIns="0" rtlCol="0" anchor="ctr"/>
-          <a:lstStyle/>
-          <a:p>
-            <a:pPr indent="0" marL="0">
-              <a:buNone/>
-            </a:pPr>
-            <a:r>
-              <a:rPr lang="en-US" sz="1000" dirty="0">
-                <a:solidFill>
-                  <a:srgbClr val="6B7C8D"/>
-                </a:solidFill>
-                <a:latin typeface="Arial" pitchFamily="34" charset="0"/>
-                <a:ea typeface="Arial" pitchFamily="34" charset="-122"/>
-                <a:cs typeface="Arial" pitchFamily="34" charset="-120"/>
-              </a:rPr>
-              <a:t>2015–2019</a:t>
-            </a:r>
-            <a:endParaRPr lang="en-US" sz="1000" dirty="0"/>
-          </a:p>
-          <a:p>
-            <a:pPr indent="0" marL="0">
-              <a:buNone/>
-            </a:pPr>
-            <a:r>
-              <a:rPr lang="en-US" sz="1000" dirty="0">
-                <a:solidFill>
-                  <a:srgbClr val="6B7C8D"/>
-                </a:solidFill>
-                <a:latin typeface="Arial" pitchFamily="34" charset="0"/>
-                <a:ea typeface="Arial" pitchFamily="34" charset="-122"/>
-                <a:cs typeface="Arial" pitchFamily="34" charset="-120"/>
-              </a:rPr>
-              <a:t>5 years</a:t>
-            </a:r>
-            <a:endParaRPr lang="en-US" sz="1000" dirty="0"/>
-          </a:p>
-        </p:txBody>
-      </p:sp>
-      <p:sp>
-        <p:nvSpPr>
-          <p:cNvPr id="11" name="Shape 9"/>
-          <p:cNvSpPr/>
-          <p:nvPr/>
-        </p:nvSpPr>
-        <p:spPr>
-          <a:xfrm>
-            <a:off x="2029968" y="2084832"/>
-            <a:ext cx="1417320" cy="822960"/>
-          </a:xfrm>
-          <a:prstGeom prst="rect">
-            <a:avLst/>
-          </a:prstGeom>
-          <a:solidFill>
-            <a:srgbClr val="FFFFFF"/>
-          </a:solidFill>
-          <a:ln w="12700">
-            <a:solidFill>
-              <a:srgbClr val="FFFFFF"/>
-            </a:solidFill>
-            <a:prstDash val="solid"/>
-          </a:ln>
-        </p:spPr>
-      </p:sp>
-      <p:sp>
-        <p:nvSpPr>
-          <p:cNvPr id="12" name="Text 10"/>
-          <p:cNvSpPr/>
-          <p:nvPr/>
-        </p:nvSpPr>
-        <p:spPr>
-          <a:xfrm>
-            <a:off x="2084832" y="2121408"/>
-            <a:ext cx="1280160" cy="274320"/>
-          </a:xfrm>
-          <a:prstGeom prst="rect">
-            <a:avLst/>
-          </a:prstGeom>
-          <a:noFill/>
-          <a:ln/>
-        </p:spPr>
-        <p:txBody>
-          <a:bodyPr wrap="square" lIns="0" tIns="0" rIns="0" bIns="0" rtlCol="0" anchor="ctr"/>
-          <a:lstStyle/>
-          <a:p>
-            <a:pPr indent="0" marL="0">
-              <a:buNone/>
-            </a:pPr>
-            <a:r>
-              <a:rPr lang="en-US" sz="1100" b="1" dirty="0">
-                <a:solidFill>
-                  <a:srgbClr val="D9A055"/>
-                </a:solidFill>
-                <a:latin typeface="Arial" pitchFamily="34" charset="0"/>
-                <a:ea typeface="Arial" pitchFamily="34" charset="-122"/>
-                <a:cs typeface="Arial" pitchFamily="34" charset="-120"/>
-              </a:rPr>
-              <a:t>Post-COVID</a:t>
-            </a:r>
-            <a:endParaRPr lang="en-US" sz="1100" dirty="0"/>
-          </a:p>
-        </p:txBody>
-      </p:sp>
-      <p:sp>
-        <p:nvSpPr>
-          <p:cNvPr id="13" name="Text 11"/>
-          <p:cNvSpPr/>
-          <p:nvPr/>
-        </p:nvSpPr>
-        <p:spPr>
-          <a:xfrm>
-            <a:off x="2084832" y="2395728"/>
-            <a:ext cx="1280160" cy="411480"/>
-          </a:xfrm>
-          <a:prstGeom prst="rect">
-            <a:avLst/>
-          </a:prstGeom>
-          <a:noFill/>
-          <a:ln/>
-        </p:spPr>
-        <p:txBody>
-          <a:bodyPr wrap="square" lIns="0" tIns="0" rIns="0" bIns="0" rtlCol="0" anchor="ctr"/>
-          <a:lstStyle/>
-          <a:p>
-            <a:pPr indent="0" marL="0">
-              <a:buNone/>
-            </a:pPr>
-            <a:r>
-              <a:rPr lang="en-US" sz="1000" dirty="0">
-                <a:solidFill>
-                  <a:srgbClr val="6B7C8D"/>
-                </a:solidFill>
-                <a:latin typeface="Arial" pitchFamily="34" charset="0"/>
-                <a:ea typeface="Arial" pitchFamily="34" charset="-122"/>
-                <a:cs typeface="Arial" pitchFamily="34" charset="-120"/>
-              </a:rPr>
-              <a:t>2022–2026</a:t>
-            </a:r>
-            <a:endParaRPr lang="en-US" sz="1000" dirty="0"/>
-          </a:p>
-          <a:p>
-            <a:pPr indent="0" marL="0">
-              <a:buNone/>
-            </a:pPr>
-            <a:r>
-              <a:rPr lang="en-US" sz="1000" dirty="0">
-                <a:solidFill>
-                  <a:srgbClr val="6B7C8D"/>
-                </a:solidFill>
-                <a:latin typeface="Arial" pitchFamily="34" charset="0"/>
-                <a:ea typeface="Arial" pitchFamily="34" charset="-122"/>
-                <a:cs typeface="Arial" pitchFamily="34" charset="-120"/>
-              </a:rPr>
-              <a:t>5 years</a:t>
-            </a:r>
-            <a:endParaRPr lang="en-US" sz="1000" dirty="0"/>
-          </a:p>
-        </p:txBody>
-      </p:sp>
-      <p:sp>
-        <p:nvSpPr>
-          <p:cNvPr id="14" name="Text 12"/>
-          <p:cNvSpPr/>
-          <p:nvPr/>
-        </p:nvSpPr>
-        <p:spPr>
-          <a:xfrm>
-            <a:off x="475488" y="3063240"/>
-            <a:ext cx="2999232" cy="1371600"/>
-          </a:xfrm>
-          <a:prstGeom prst="rect">
-            <a:avLst/>
-          </a:prstGeom>
-          <a:noFill/>
-          <a:ln/>
-        </p:spPr>
-        <p:txBody>
-          <a:bodyPr wrap="square" lIns="0" tIns="0" rIns="0" bIns="0" rtlCol="0" anchor="ctr"/>
-          <a:lstStyle/>
-          <a:p>
-            <a:pPr indent="0" marL="0">
-              <a:buNone/>
-            </a:pPr>
-            <a:r>
-              <a:rPr lang="en-US" sz="1000" dirty="0">
+              <a:t>• Destination name, state and image</a:t>
+            </a:r>
+            <a:endParaRPr lang="en-US" sz="1400" dirty="0"/>
+          </a:p>
+        </p:txBody>
+      </p:sp>
+      <p:sp>
+        <p:nvSpPr>
+          <p:cNvPr id="25" name="Text 23"/>
+          <p:cNvSpPr/>
+          <p:nvPr/>
+        </p:nvSpPr>
+        <p:spPr>
+          <a:xfrm>
+            <a:off x="3291840" y="3063240"/>
+            <a:ext cx="2651760" cy="384048"/>
+          </a:xfrm>
+          <a:prstGeom prst="rect">
+            <a:avLst/>
+          </a:prstGeom>
+          <a:noFill/>
+          <a:ln/>
+        </p:spPr>
+        <p:txBody>
+          <a:bodyPr wrap="square" lIns="0" tIns="0" rIns="0" bIns="0" rtlCol="0" anchor="ctr"/>
+          <a:lstStyle/>
+          <a:p>
+            <a:pPr marL="0" indent="0">
+              <a:buNone/>
+            </a:pPr>
+            <a:r>
+              <a:rPr lang="en-US" sz="1400" dirty="0">
                 <a:solidFill>
                   <a:srgbClr val="2C3E50"/>
                 </a:solidFill>
@@ -5319,54 +5595,178 @@
                 <a:ea typeface="Arial" pitchFamily="34" charset="-122"/>
                 <a:cs typeface="Arial" pitchFamily="34" charset="-120"/>
               </a:rPr>
-              <a:t>Currently only 3 post-COVID years (2022–2024) are available. Adding 2025–2026 data would create a symmetrical 5-year vs 5-year comparison for a more reliable and balanced recovery analysis.</a:t>
-            </a:r>
-            <a:endParaRPr lang="en-US" sz="1000" dirty="0"/>
-          </a:p>
-        </p:txBody>
-      </p:sp>
-      <p:sp>
-        <p:nvSpPr>
-          <p:cNvPr id="15" name="Shape 13"/>
-          <p:cNvSpPr/>
-          <p:nvPr/>
-        </p:nvSpPr>
-        <p:spPr>
-          <a:xfrm>
-            <a:off x="3840480" y="914400"/>
-            <a:ext cx="4937760" cy="3657600"/>
-          </a:xfrm>
-          <a:prstGeom prst="rect">
-            <a:avLst/>
-          </a:prstGeom>
-          <a:solidFill>
-            <a:srgbClr val="E8EDF0"/>
-          </a:solidFill>
-          <a:ln w="12700">
-            <a:solidFill>
-              <a:srgbClr val="E8EDF0"/>
-            </a:solidFill>
-            <a:prstDash val="solid"/>
-          </a:ln>
-          <a:effectLst>
-            <a:outerShdw sx="100000" sy="100000" kx="0" ky="0" algn="bl" rotWithShape="0" blurRad="101600" dist="38100" dir="8100000">
-              <a:srgbClr val="000000">
-                <a:alpha val="12000"/>
-              </a:srgbClr>
-            </a:outerShdw>
-          </a:effectLst>
-        </p:spPr>
-      </p:sp>
-      <p:sp>
-        <p:nvSpPr>
-          <p:cNvPr id="16" name="Shape 14"/>
-          <p:cNvSpPr/>
-          <p:nvPr/>
-        </p:nvSpPr>
-        <p:spPr>
-          <a:xfrm>
-            <a:off x="3840480" y="914400"/>
-            <a:ext cx="4937760" cy="438912"/>
+              <a:t>• Best and good months to visit</a:t>
+            </a:r>
+            <a:endParaRPr lang="en-US" sz="1400" dirty="0"/>
+          </a:p>
+        </p:txBody>
+      </p:sp>
+      <p:sp>
+        <p:nvSpPr>
+          <p:cNvPr id="26" name="Text 24"/>
+          <p:cNvSpPr/>
+          <p:nvPr/>
+        </p:nvSpPr>
+        <p:spPr>
+          <a:xfrm>
+            <a:off x="6080760" y="3063240"/>
+            <a:ext cx="2651760" cy="384048"/>
+          </a:xfrm>
+          <a:prstGeom prst="rect">
+            <a:avLst/>
+          </a:prstGeom>
+          <a:noFill/>
+          <a:ln/>
+        </p:spPr>
+        <p:txBody>
+          <a:bodyPr wrap="square" lIns="0" tIns="0" rIns="0" bIns="0" rtlCol="0" anchor="ctr"/>
+          <a:lstStyle/>
+          <a:p>
+            <a:pPr marL="0" indent="0">
+              <a:buNone/>
+            </a:pPr>
+            <a:r>
+              <a:rPr lang="en-US" sz="1400" dirty="0">
+                <a:solidFill>
+                  <a:srgbClr val="2C3E50"/>
+                </a:solidFill>
+                <a:latin typeface="Arial" pitchFamily="34" charset="0"/>
+                <a:ea typeface="Arial" pitchFamily="34" charset="-122"/>
+                <a:cs typeface="Arial" pitchFamily="34" charset="-120"/>
+              </a:rPr>
+              <a:t>• Weather and crowd level profile</a:t>
+            </a:r>
+            <a:endParaRPr lang="en-US" sz="1400" dirty="0"/>
+          </a:p>
+        </p:txBody>
+      </p:sp>
+      <p:sp>
+        <p:nvSpPr>
+          <p:cNvPr id="27" name="Text 25"/>
+          <p:cNvSpPr/>
+          <p:nvPr/>
+        </p:nvSpPr>
+        <p:spPr>
+          <a:xfrm>
+            <a:off x="502920" y="3769868"/>
+            <a:ext cx="2651760" cy="384048"/>
+          </a:xfrm>
+          <a:prstGeom prst="rect">
+            <a:avLst/>
+          </a:prstGeom>
+          <a:noFill/>
+          <a:ln/>
+        </p:spPr>
+        <p:txBody>
+          <a:bodyPr wrap="square" lIns="0" tIns="0" rIns="0" bIns="0" rtlCol="0" anchor="ctr"/>
+          <a:lstStyle/>
+          <a:p>
+            <a:pPr marL="0" indent="0">
+              <a:buNone/>
+            </a:pPr>
+            <a:r>
+              <a:rPr lang="en-US" sz="1400" dirty="0">
+                <a:solidFill>
+                  <a:srgbClr val="2C3E50"/>
+                </a:solidFill>
+                <a:latin typeface="Arial" pitchFamily="34" charset="0"/>
+                <a:ea typeface="Arial" pitchFamily="34" charset="-122"/>
+                <a:cs typeface="Arial" pitchFamily="34" charset="-120"/>
+              </a:rPr>
+              <a:t>• Why this month is great for this place</a:t>
+            </a:r>
+            <a:endParaRPr lang="en-US" sz="1400" dirty="0"/>
+          </a:p>
+        </p:txBody>
+      </p:sp>
+      <p:sp>
+        <p:nvSpPr>
+          <p:cNvPr id="28" name="Text 26"/>
+          <p:cNvSpPr/>
+          <p:nvPr/>
+        </p:nvSpPr>
+        <p:spPr>
+          <a:xfrm>
+            <a:off x="3291840" y="3769868"/>
+            <a:ext cx="2651760" cy="384048"/>
+          </a:xfrm>
+          <a:prstGeom prst="rect">
+            <a:avLst/>
+          </a:prstGeom>
+          <a:noFill/>
+          <a:ln/>
+        </p:spPr>
+        <p:txBody>
+          <a:bodyPr wrap="square" lIns="0" tIns="0" rIns="0" bIns="0" rtlCol="0" anchor="ctr"/>
+          <a:lstStyle/>
+          <a:p>
+            <a:pPr marL="0" indent="0">
+              <a:buNone/>
+            </a:pPr>
+            <a:r>
+              <a:rPr lang="en-US" sz="1400" dirty="0">
+                <a:solidFill>
+                  <a:srgbClr val="2C3E50"/>
+                </a:solidFill>
+                <a:latin typeface="Arial" pitchFamily="34" charset="0"/>
+                <a:ea typeface="Arial" pitchFamily="34" charset="-122"/>
+                <a:cs typeface="Arial" pitchFamily="34" charset="-120"/>
+              </a:rPr>
+              <a:t>• Brief description and highlights</a:t>
+            </a:r>
+            <a:endParaRPr lang="en-US" sz="1400" dirty="0"/>
+          </a:p>
+        </p:txBody>
+      </p:sp>
+      <p:sp>
+        <p:nvSpPr>
+          <p:cNvPr id="29" name="Text 27"/>
+          <p:cNvSpPr/>
+          <p:nvPr/>
+        </p:nvSpPr>
+        <p:spPr>
+          <a:xfrm>
+            <a:off x="6080760" y="3769868"/>
+            <a:ext cx="2651760" cy="384048"/>
+          </a:xfrm>
+          <a:prstGeom prst="rect">
+            <a:avLst/>
+          </a:prstGeom>
+          <a:noFill/>
+          <a:ln/>
+        </p:spPr>
+        <p:txBody>
+          <a:bodyPr wrap="square" lIns="0" tIns="0" rIns="0" bIns="0" rtlCol="0" anchor="ctr"/>
+          <a:lstStyle/>
+          <a:p>
+            <a:pPr marL="0" indent="0">
+              <a:buNone/>
+            </a:pPr>
+            <a:r>
+              <a:rPr lang="en-US" sz="1400" dirty="0">
+                <a:solidFill>
+                  <a:srgbClr val="2C3E50"/>
+                </a:solidFill>
+                <a:latin typeface="Arial" pitchFamily="34" charset="0"/>
+                <a:ea typeface="Arial" pitchFamily="34" charset="-122"/>
+                <a:cs typeface="Arial" pitchFamily="34" charset="-120"/>
+              </a:rPr>
+              <a:t>• Link to explore more on visitbrasil.com</a:t>
+            </a:r>
+            <a:endParaRPr lang="en-US" sz="1400" dirty="0"/>
+          </a:p>
+        </p:txBody>
+      </p:sp>
+      <p:sp>
+        <p:nvSpPr>
+          <p:cNvPr id="30" name="Shape 28"/>
+          <p:cNvSpPr/>
+          <p:nvPr/>
+        </p:nvSpPr>
+        <p:spPr>
+          <a:xfrm>
+            <a:off x="365760" y="4462272"/>
+            <a:ext cx="8412480" cy="347472"/>
           </a:xfrm>
           <a:prstGeom prst="rect">
             <a:avLst/>
@@ -5384,26 +5784,26 @@
       </p:sp>
       <p:sp>
         <p:nvSpPr>
-          <p:cNvPr id="17" name="Text 15"/>
-          <p:cNvSpPr/>
-          <p:nvPr/>
-        </p:nvSpPr>
-        <p:spPr>
-          <a:xfrm>
-            <a:off x="3950208" y="950976"/>
-            <a:ext cx="4754880" cy="365760"/>
-          </a:xfrm>
-          <a:prstGeom prst="rect">
-            <a:avLst/>
-          </a:prstGeom>
-          <a:noFill/>
-          <a:ln/>
-        </p:spPr>
-        <p:txBody>
-          <a:bodyPr wrap="square" lIns="0" tIns="0" rIns="0" bIns="0" rtlCol="0" anchor="ctr"/>
-          <a:lstStyle/>
-          <a:p>
-            <a:pPr indent="0" marL="0">
+          <p:cNvPr id="31" name="Text 29"/>
+          <p:cNvSpPr/>
+          <p:nvPr/>
+        </p:nvSpPr>
+        <p:spPr>
+          <a:xfrm>
+            <a:off x="502920" y="4489704"/>
+            <a:ext cx="8229600" cy="274320"/>
+          </a:xfrm>
+          <a:prstGeom prst="rect">
+            <a:avLst/>
+          </a:prstGeom>
+          <a:noFill/>
+          <a:ln/>
+        </p:spPr>
+        <p:txBody>
+          <a:bodyPr wrap="square" lIns="0" tIns="0" rIns="0" bIns="0" rtlCol="0" anchor="ctr"/>
+          <a:lstStyle/>
+          <a:p>
+            <a:pPr marL="0" indent="0">
               <a:buNone/>
             </a:pPr>
             <a:r>
@@ -5415,7 +5815,7 @@
                 <a:ea typeface="Arial" pitchFamily="34" charset="-122"/>
                 <a:cs typeface="Arial" pitchFamily="34" charset="-120"/>
               </a:rPr>
-              <a:t>Brazil Travel Recommender — Streamlit App</a:t>
+              <a:t>Live Demo  →  [Streamlit app link — to be added before presentation]</a:t>
             </a:r>
             <a:endParaRPr lang="en-US" sz="1200" dirty="0"/>
           </a:p>
@@ -5423,561 +5823,7 @@
       </p:sp>
       <p:sp>
         <p:nvSpPr>
-          <p:cNvPr id="18" name="Text 16"/>
-          <p:cNvSpPr/>
-          <p:nvPr/>
-        </p:nvSpPr>
-        <p:spPr>
-          <a:xfrm>
-            <a:off x="3950208" y="1481328"/>
-            <a:ext cx="4736592" cy="292608"/>
-          </a:xfrm>
-          <a:prstGeom prst="rect">
-            <a:avLst/>
-          </a:prstGeom>
-          <a:noFill/>
-          <a:ln/>
-        </p:spPr>
-        <p:txBody>
-          <a:bodyPr wrap="square" lIns="0" tIns="0" rIns="0" bIns="0" rtlCol="0" anchor="ctr"/>
-          <a:lstStyle/>
-          <a:p>
-            <a:pPr indent="0" marL="0">
-              <a:buNone/>
-            </a:pPr>
-            <a:r>
-              <a:rPr lang="en-US" sz="1100" dirty="0">
-                <a:solidFill>
-                  <a:srgbClr val="2C3E50"/>
-                </a:solidFill>
-                <a:latin typeface="Arial" pitchFamily="34" charset="0"/>
-                <a:ea typeface="Arial" pitchFamily="34" charset="-122"/>
-                <a:cs typeface="Arial" pitchFamily="34" charset="-120"/>
-              </a:rPr>
-              <a:t>An interactive app recommending Brazilian destinations based on:</a:t>
-            </a:r>
-            <a:endParaRPr lang="en-US" sz="1100" dirty="0"/>
-          </a:p>
-        </p:txBody>
-      </p:sp>
-      <p:sp>
-        <p:nvSpPr>
-          <p:cNvPr id="19" name="Shape 17"/>
-          <p:cNvSpPr/>
-          <p:nvPr/>
-        </p:nvSpPr>
-        <p:spPr>
-          <a:xfrm>
-            <a:off x="3950208" y="1865376"/>
-            <a:ext cx="4736592" cy="420624"/>
-          </a:xfrm>
-          <a:prstGeom prst="rect">
-            <a:avLst/>
-          </a:prstGeom>
-          <a:solidFill>
-            <a:srgbClr val="FFFFFF"/>
-          </a:solidFill>
-          <a:ln w="12700">
-            <a:solidFill>
-              <a:srgbClr val="FFFFFF"/>
-            </a:solidFill>
-            <a:prstDash val="solid"/>
-          </a:ln>
-        </p:spPr>
-      </p:sp>
-      <p:sp>
-        <p:nvSpPr>
-          <p:cNvPr id="20" name="Text 18"/>
-          <p:cNvSpPr/>
-          <p:nvPr/>
-        </p:nvSpPr>
-        <p:spPr>
-          <a:xfrm>
-            <a:off x="4023360" y="1929384"/>
-            <a:ext cx="1600200" cy="292608"/>
-          </a:xfrm>
-          <a:prstGeom prst="rect">
-            <a:avLst/>
-          </a:prstGeom>
-          <a:noFill/>
-          <a:ln/>
-        </p:spPr>
-        <p:txBody>
-          <a:bodyPr wrap="square" lIns="0" tIns="0" rIns="0" bIns="0" rtlCol="0" anchor="ctr"/>
-          <a:lstStyle/>
-          <a:p>
-            <a:pPr indent="0" marL="0">
-              <a:buNone/>
-            </a:pPr>
-            <a:r>
-              <a:rPr lang="en-US" sz="1000" b="1" dirty="0">
-                <a:solidFill>
-                  <a:srgbClr val="0D7EA8"/>
-                </a:solidFill>
-                <a:latin typeface="Arial" pitchFamily="34" charset="0"/>
-                <a:ea typeface="Arial" pitchFamily="34" charset="-122"/>
-                <a:cs typeface="Arial" pitchFamily="34" charset="-120"/>
-              </a:rPr>
-              <a:t>When to travel:</a:t>
-            </a:r>
-            <a:endParaRPr lang="en-US" sz="1000" dirty="0"/>
-          </a:p>
-        </p:txBody>
-      </p:sp>
-      <p:sp>
-        <p:nvSpPr>
-          <p:cNvPr id="21" name="Text 19"/>
-          <p:cNvSpPr/>
-          <p:nvPr/>
-        </p:nvSpPr>
-        <p:spPr>
-          <a:xfrm>
-            <a:off x="5669280" y="1929384"/>
-            <a:ext cx="3017520" cy="292608"/>
-          </a:xfrm>
-          <a:prstGeom prst="rect">
-            <a:avLst/>
-          </a:prstGeom>
-          <a:noFill/>
-          <a:ln/>
-        </p:spPr>
-        <p:txBody>
-          <a:bodyPr wrap="square" lIns="0" tIns="0" rIns="0" bIns="0" rtlCol="0" anchor="ctr"/>
-          <a:lstStyle/>
-          <a:p>
-            <a:pPr indent="0" marL="0">
-              <a:buNone/>
-            </a:pPr>
-            <a:r>
-              <a:rPr lang="en-US" sz="1000" dirty="0">
-                <a:solidFill>
-                  <a:srgbClr val="2C3E50"/>
-                </a:solidFill>
-                <a:latin typeface="Arial" pitchFamily="34" charset="0"/>
-                <a:ea typeface="Arial" pitchFamily="34" charset="-122"/>
-                <a:cs typeface="Arial" pitchFamily="34" charset="-120"/>
-              </a:rPr>
-              <a:t>Month — January to December</a:t>
-            </a:r>
-            <a:endParaRPr lang="en-US" sz="1000" dirty="0"/>
-          </a:p>
-        </p:txBody>
-      </p:sp>
-      <p:sp>
-        <p:nvSpPr>
-          <p:cNvPr id="22" name="Shape 20"/>
-          <p:cNvSpPr/>
-          <p:nvPr/>
-        </p:nvSpPr>
-        <p:spPr>
-          <a:xfrm>
-            <a:off x="3950208" y="2359152"/>
-            <a:ext cx="4736592" cy="420624"/>
-          </a:xfrm>
-          <a:prstGeom prst="rect">
-            <a:avLst/>
-          </a:prstGeom>
-          <a:solidFill>
-            <a:srgbClr val="FFFFFF"/>
-          </a:solidFill>
-          <a:ln w="12700">
-            <a:solidFill>
-              <a:srgbClr val="FFFFFF"/>
-            </a:solidFill>
-            <a:prstDash val="solid"/>
-          </a:ln>
-        </p:spPr>
-      </p:sp>
-      <p:sp>
-        <p:nvSpPr>
-          <p:cNvPr id="23" name="Text 21"/>
-          <p:cNvSpPr/>
-          <p:nvPr/>
-        </p:nvSpPr>
-        <p:spPr>
-          <a:xfrm>
-            <a:off x="4023360" y="2423160"/>
-            <a:ext cx="1600200" cy="292608"/>
-          </a:xfrm>
-          <a:prstGeom prst="rect">
-            <a:avLst/>
-          </a:prstGeom>
-          <a:noFill/>
-          <a:ln/>
-        </p:spPr>
-        <p:txBody>
-          <a:bodyPr wrap="square" lIns="0" tIns="0" rIns="0" bIns="0" rtlCol="0" anchor="ctr"/>
-          <a:lstStyle/>
-          <a:p>
-            <a:pPr indent="0" marL="0">
-              <a:buNone/>
-            </a:pPr>
-            <a:r>
-              <a:rPr lang="en-US" sz="1000" b="1" dirty="0">
-                <a:solidFill>
-                  <a:srgbClr val="0D7EA8"/>
-                </a:solidFill>
-                <a:latin typeface="Arial" pitchFamily="34" charset="0"/>
-                <a:ea typeface="Arial" pitchFamily="34" charset="-122"/>
-                <a:cs typeface="Arial" pitchFamily="34" charset="-120"/>
-              </a:rPr>
-              <a:t>Experience type:</a:t>
-            </a:r>
-            <a:endParaRPr lang="en-US" sz="1000" dirty="0"/>
-          </a:p>
-        </p:txBody>
-      </p:sp>
-      <p:sp>
-        <p:nvSpPr>
-          <p:cNvPr id="24" name="Text 22"/>
-          <p:cNvSpPr/>
-          <p:nvPr/>
-        </p:nvSpPr>
-        <p:spPr>
-          <a:xfrm>
-            <a:off x="5669280" y="2423160"/>
-            <a:ext cx="3017520" cy="292608"/>
-          </a:xfrm>
-          <a:prstGeom prst="rect">
-            <a:avLst/>
-          </a:prstGeom>
-          <a:noFill/>
-          <a:ln/>
-        </p:spPr>
-        <p:txBody>
-          <a:bodyPr wrap="square" lIns="0" tIns="0" rIns="0" bIns="0" rtlCol="0" anchor="ctr"/>
-          <a:lstStyle/>
-          <a:p>
-            <a:pPr indent="0" marL="0">
-              <a:buNone/>
-            </a:pPr>
-            <a:r>
-              <a:rPr lang="en-US" sz="1000" dirty="0">
-                <a:solidFill>
-                  <a:srgbClr val="2C3E50"/>
-                </a:solidFill>
-                <a:latin typeface="Arial" pitchFamily="34" charset="0"/>
-                <a:ea typeface="Arial" pitchFamily="34" charset="-122"/>
-                <a:cs typeface="Arial" pitchFamily="34" charset="-120"/>
-              </a:rPr>
-              <a:t>Nature, beach, culture, adventure, city</a:t>
-            </a:r>
-            <a:endParaRPr lang="en-US" sz="1000" dirty="0"/>
-          </a:p>
-        </p:txBody>
-      </p:sp>
-      <p:sp>
-        <p:nvSpPr>
-          <p:cNvPr id="25" name="Shape 23"/>
-          <p:cNvSpPr/>
-          <p:nvPr/>
-        </p:nvSpPr>
-        <p:spPr>
-          <a:xfrm>
-            <a:off x="3950208" y="2852928"/>
-            <a:ext cx="4736592" cy="420624"/>
-          </a:xfrm>
-          <a:prstGeom prst="rect">
-            <a:avLst/>
-          </a:prstGeom>
-          <a:solidFill>
-            <a:srgbClr val="FFFFFF"/>
-          </a:solidFill>
-          <a:ln w="12700">
-            <a:solidFill>
-              <a:srgbClr val="FFFFFF"/>
-            </a:solidFill>
-            <a:prstDash val="solid"/>
-          </a:ln>
-        </p:spPr>
-      </p:sp>
-      <p:sp>
-        <p:nvSpPr>
-          <p:cNvPr id="26" name="Text 24"/>
-          <p:cNvSpPr/>
-          <p:nvPr/>
-        </p:nvSpPr>
-        <p:spPr>
-          <a:xfrm>
-            <a:off x="4023360" y="2916936"/>
-            <a:ext cx="1600200" cy="292608"/>
-          </a:xfrm>
-          <a:prstGeom prst="rect">
-            <a:avLst/>
-          </a:prstGeom>
-          <a:noFill/>
-          <a:ln/>
-        </p:spPr>
-        <p:txBody>
-          <a:bodyPr wrap="square" lIns="0" tIns="0" rIns="0" bIns="0" rtlCol="0" anchor="ctr"/>
-          <a:lstStyle/>
-          <a:p>
-            <a:pPr indent="0" marL="0">
-              <a:buNone/>
-            </a:pPr>
-            <a:r>
-              <a:rPr lang="en-US" sz="1000" b="1" dirty="0">
-                <a:solidFill>
-                  <a:srgbClr val="0D7EA8"/>
-                </a:solidFill>
-                <a:latin typeface="Arial" pitchFamily="34" charset="0"/>
-                <a:ea typeface="Arial" pitchFamily="34" charset="-122"/>
-                <a:cs typeface="Arial" pitchFamily="34" charset="-120"/>
-              </a:rPr>
-              <a:t>Crowd preference:</a:t>
-            </a:r>
-            <a:endParaRPr lang="en-US" sz="1000" dirty="0"/>
-          </a:p>
-        </p:txBody>
-      </p:sp>
-      <p:sp>
-        <p:nvSpPr>
-          <p:cNvPr id="27" name="Text 25"/>
-          <p:cNvSpPr/>
-          <p:nvPr/>
-        </p:nvSpPr>
-        <p:spPr>
-          <a:xfrm>
-            <a:off x="5669280" y="2916936"/>
-            <a:ext cx="3017520" cy="292608"/>
-          </a:xfrm>
-          <a:prstGeom prst="rect">
-            <a:avLst/>
-          </a:prstGeom>
-          <a:noFill/>
-          <a:ln/>
-        </p:spPr>
-        <p:txBody>
-          <a:bodyPr wrap="square" lIns="0" tIns="0" rIns="0" bIns="0" rtlCol="0" anchor="ctr"/>
-          <a:lstStyle/>
-          <a:p>
-            <a:pPr indent="0" marL="0">
-              <a:buNone/>
-            </a:pPr>
-            <a:r>
-              <a:rPr lang="en-US" sz="1000" dirty="0">
-                <a:solidFill>
-                  <a:srgbClr val="2C3E50"/>
-                </a:solidFill>
-                <a:latin typeface="Arial" pitchFamily="34" charset="0"/>
-                <a:ea typeface="Arial" pitchFamily="34" charset="-122"/>
-                <a:cs typeface="Arial" pitchFamily="34" charset="-120"/>
-              </a:rPr>
-              <a:t>Love the buzz vs prefer quiet</a:t>
-            </a:r>
-            <a:endParaRPr lang="en-US" sz="1000" dirty="0"/>
-          </a:p>
-        </p:txBody>
-      </p:sp>
-      <p:sp>
-        <p:nvSpPr>
-          <p:cNvPr id="28" name="Shape 26"/>
-          <p:cNvSpPr/>
-          <p:nvPr/>
-        </p:nvSpPr>
-        <p:spPr>
-          <a:xfrm>
-            <a:off x="3950208" y="3346704"/>
-            <a:ext cx="4736592" cy="420624"/>
-          </a:xfrm>
-          <a:prstGeom prst="rect">
-            <a:avLst/>
-          </a:prstGeom>
-          <a:solidFill>
-            <a:srgbClr val="FFFFFF"/>
-          </a:solidFill>
-          <a:ln w="12700">
-            <a:solidFill>
-              <a:srgbClr val="FFFFFF"/>
-            </a:solidFill>
-            <a:prstDash val="solid"/>
-          </a:ln>
-        </p:spPr>
-      </p:sp>
-      <p:sp>
-        <p:nvSpPr>
-          <p:cNvPr id="29" name="Text 27"/>
-          <p:cNvSpPr/>
-          <p:nvPr/>
-        </p:nvSpPr>
-        <p:spPr>
-          <a:xfrm>
-            <a:off x="4023360" y="3410712"/>
-            <a:ext cx="1600200" cy="292608"/>
-          </a:xfrm>
-          <a:prstGeom prst="rect">
-            <a:avLst/>
-          </a:prstGeom>
-          <a:noFill/>
-          <a:ln/>
-        </p:spPr>
-        <p:txBody>
-          <a:bodyPr wrap="square" lIns="0" tIns="0" rIns="0" bIns="0" rtlCol="0" anchor="ctr"/>
-          <a:lstStyle/>
-          <a:p>
-            <a:pPr indent="0" marL="0">
-              <a:buNone/>
-            </a:pPr>
-            <a:r>
-              <a:rPr lang="en-US" sz="1000" b="1" dirty="0">
-                <a:solidFill>
-                  <a:srgbClr val="0D7EA8"/>
-                </a:solidFill>
-                <a:latin typeface="Arial" pitchFamily="34" charset="0"/>
-                <a:ea typeface="Arial" pitchFamily="34" charset="-122"/>
-                <a:cs typeface="Arial" pitchFamily="34" charset="-120"/>
-              </a:rPr>
-              <a:t>Weather preference:</a:t>
-            </a:r>
-            <a:endParaRPr lang="en-US" sz="1000" dirty="0"/>
-          </a:p>
-        </p:txBody>
-      </p:sp>
-      <p:sp>
-        <p:nvSpPr>
-          <p:cNvPr id="30" name="Text 28"/>
-          <p:cNvSpPr/>
-          <p:nvPr/>
-        </p:nvSpPr>
-        <p:spPr>
-          <a:xfrm>
-            <a:off x="5669280" y="3410712"/>
-            <a:ext cx="3017520" cy="292608"/>
-          </a:xfrm>
-          <a:prstGeom prst="rect">
-            <a:avLst/>
-          </a:prstGeom>
-          <a:noFill/>
-          <a:ln/>
-        </p:spPr>
-        <p:txBody>
-          <a:bodyPr wrap="square" lIns="0" tIns="0" rIns="0" bIns="0" rtlCol="0" anchor="ctr"/>
-          <a:lstStyle/>
-          <a:p>
-            <a:pPr indent="0" marL="0">
-              <a:buNone/>
-            </a:pPr>
-            <a:r>
-              <a:rPr lang="en-US" sz="1000" dirty="0">
-                <a:solidFill>
-                  <a:srgbClr val="2C3E50"/>
-                </a:solidFill>
-                <a:latin typeface="Arial" pitchFamily="34" charset="0"/>
-                <a:ea typeface="Arial" pitchFamily="34" charset="-122"/>
-                <a:cs typeface="Arial" pitchFamily="34" charset="-120"/>
-              </a:rPr>
-              <a:t>Hot, warm, mild, cool</a:t>
-            </a:r>
-            <a:endParaRPr lang="en-US" sz="1000" dirty="0"/>
-          </a:p>
-        </p:txBody>
-      </p:sp>
-      <p:sp>
-        <p:nvSpPr>
-          <p:cNvPr id="31" name="Text 29"/>
-          <p:cNvSpPr/>
-          <p:nvPr/>
-        </p:nvSpPr>
-        <p:spPr>
-          <a:xfrm>
-            <a:off x="3950208" y="3858768"/>
-            <a:ext cx="4736592" cy="347472"/>
-          </a:xfrm>
-          <a:prstGeom prst="rect">
-            <a:avLst/>
-          </a:prstGeom>
-          <a:noFill/>
-          <a:ln/>
-        </p:spPr>
-        <p:txBody>
-          <a:bodyPr wrap="square" lIns="0" tIns="0" rIns="0" bIns="0" rtlCol="0" anchor="ctr"/>
-          <a:lstStyle/>
-          <a:p>
-            <a:pPr indent="0" marL="0">
-              <a:buNone/>
-            </a:pPr>
-            <a:r>
-              <a:rPr lang="en-US" sz="1000" i="1" dirty="0">
-                <a:solidFill>
-                  <a:srgbClr val="6B7C8D"/>
-                </a:solidFill>
-                <a:latin typeface="Arial" pitchFamily="34" charset="0"/>
-                <a:ea typeface="Arial" pitchFamily="34" charset="-122"/>
-                <a:cs typeface="Arial" pitchFamily="34" charset="-120"/>
-              </a:rPr>
-              <a:t>Returns destination recommendations with best months, key events, weather &amp; crowd profile, and destination context.</a:t>
-            </a:r>
-            <a:endParaRPr lang="en-US" sz="1000" dirty="0"/>
-          </a:p>
-        </p:txBody>
-      </p:sp>
-      <p:sp>
-        <p:nvSpPr>
-          <p:cNvPr id="32" name="Shape 30"/>
-          <p:cNvSpPr/>
-          <p:nvPr/>
-        </p:nvSpPr>
-        <p:spPr>
-          <a:xfrm>
-            <a:off x="3840480" y="4206240"/>
-            <a:ext cx="4937760" cy="365760"/>
-          </a:xfrm>
-          <a:prstGeom prst="rect">
-            <a:avLst/>
-          </a:prstGeom>
-          <a:solidFill>
-            <a:srgbClr val="D9A055"/>
-          </a:solidFill>
-          <a:ln w="12700">
-            <a:solidFill>
-              <a:srgbClr val="D9A055"/>
-            </a:solidFill>
-            <a:prstDash val="solid"/>
-          </a:ln>
-        </p:spPr>
-      </p:sp>
-      <p:sp>
-        <p:nvSpPr>
-          <p:cNvPr id="33" name="Text 31"/>
-          <p:cNvSpPr/>
-          <p:nvPr/>
-        </p:nvSpPr>
-        <p:spPr>
-          <a:xfrm>
-            <a:off x="3950208" y="4224528"/>
-            <a:ext cx="4754880" cy="310896"/>
-          </a:xfrm>
-          <a:prstGeom prst="rect">
-            <a:avLst/>
-          </a:prstGeom>
-          <a:noFill/>
-          <a:ln/>
-        </p:spPr>
-        <p:txBody>
-          <a:bodyPr wrap="square" lIns="0" tIns="0" rIns="0" bIns="0" rtlCol="0" anchor="ctr"/>
-          <a:lstStyle/>
-          <a:p>
-            <a:pPr indent="0" marL="0">
-              <a:buNone/>
-            </a:pPr>
-            <a:r>
-              <a:rPr lang="en-US" sz="1000" b="1" dirty="0">
-                <a:solidFill>
-                  <a:srgbClr val="FFFFFF"/>
-                </a:solidFill>
-                <a:latin typeface="Arial" pitchFamily="34" charset="0"/>
-                <a:ea typeface="Arial" pitchFamily="34" charset="-122"/>
-                <a:cs typeface="Arial" pitchFamily="34" charset="-120"/>
-              </a:rPr>
-              <a:t>Live Demo  →  [Streamlit app link — to be added before presentation]</a:t>
-            </a:r>
-            <a:endParaRPr lang="en-US" sz="1000" dirty="0"/>
-          </a:p>
-        </p:txBody>
-      </p:sp>
-      <p:sp>
-        <p:nvSpPr>
-          <p:cNvPr id="34" name="Text 32"/>
+          <p:cNvPr id="32" name="Text 30"/>
           <p:cNvSpPr/>
           <p:nvPr/>
         </p:nvSpPr>
@@ -5996,7 +5842,7 @@
           <a:bodyPr wrap="square" lIns="0" tIns="0" rIns="0" bIns="0" rtlCol="0" anchor="ctr"/>
           <a:lstStyle/>
           <a:p>
-            <a:pPr indent="0" marL="0">
+            <a:pPr marL="0" indent="0">
               <a:buNone/>
             </a:pPr>
             <a:r>
@@ -6016,7 +5862,7 @@
       </p:sp>
       <p:sp>
         <p:nvSpPr>
-          <p:cNvPr id="35" name="Text 33"/>
+          <p:cNvPr id="33" name="Text 31"/>
           <p:cNvSpPr/>
           <p:nvPr/>
         </p:nvSpPr>
@@ -6035,7 +5881,7 @@
           <a:bodyPr wrap="square" lIns="0" tIns="0" rIns="0" bIns="0" rtlCol="0" anchor="ctr"/>
           <a:lstStyle/>
           <a:p>
-            <a:pPr algn="r" indent="0" marL="0">
+            <a:pPr marL="0" indent="0" algn="r">
               <a:buNone/>
             </a:pPr>
             <a:r>
@@ -6047,7 +5893,7 @@
                 <a:ea typeface="Arial" pitchFamily="34" charset="-122"/>
                 <a:cs typeface="Arial" pitchFamily="34" charset="-120"/>
               </a:rPr>
-              <a:t>7 / 8</a:t>
+              <a:t>7 / 9</a:t>
             </a:r>
             <a:endParaRPr lang="en-US" sz="900" dirty="0"/>
           </a:p>
@@ -6067,8 +5913,9 @@
     <p:bg>
       <p:bgPr>
         <a:solidFill>
-          <a:srgbClr val="0D7EA8"/>
+          <a:srgbClr val="FFFFFF"/>
         </a:solidFill>
+        <a:effectLst/>
       </p:bgPr>
     </p:bg>
     <p:spTree>
@@ -6094,7 +5941,517 @@
         <p:spPr>
           <a:xfrm>
             <a:off x="0" y="0"/>
-            <a:ext cx="164592" cy="5143500"/>
+            <a:ext cx="9144000" cy="73152"/>
+          </a:xfrm>
+          <a:prstGeom prst="rect">
+            <a:avLst/>
+          </a:prstGeom>
+          <a:solidFill>
+            <a:srgbClr val="0D7EA8"/>
+          </a:solidFill>
+          <a:ln w="12700">
+            <a:solidFill>
+              <a:srgbClr val="0D7EA8"/>
+            </a:solidFill>
+            <a:prstDash val="solid"/>
+          </a:ln>
+        </p:spPr>
+      </p:sp>
+      <p:sp>
+        <p:nvSpPr>
+          <p:cNvPr id="3" name="Text 1"/>
+          <p:cNvSpPr/>
+          <p:nvPr/>
+        </p:nvSpPr>
+        <p:spPr>
+          <a:xfrm>
+            <a:off x="457200" y="201168"/>
+            <a:ext cx="8229600" cy="548640"/>
+          </a:xfrm>
+          <a:prstGeom prst="rect">
+            <a:avLst/>
+          </a:prstGeom>
+          <a:noFill/>
+          <a:ln/>
+        </p:spPr>
+        <p:txBody>
+          <a:bodyPr wrap="square" lIns="0" tIns="0" rIns="0" bIns="0" rtlCol="0" anchor="ctr"/>
+          <a:lstStyle/>
+          <a:p>
+            <a:pPr marL="0" indent="0">
+              <a:buNone/>
+            </a:pPr>
+            <a:r>
+              <a:rPr lang="en-US" sz="3400" b="1" dirty="0">
+                <a:solidFill>
+                  <a:srgbClr val="0D7EA8"/>
+                </a:solidFill>
+                <a:latin typeface="Arial" pitchFamily="34" charset="0"/>
+                <a:ea typeface="Arial" pitchFamily="34" charset="-122"/>
+                <a:cs typeface="Arial" pitchFamily="34" charset="-120"/>
+              </a:rPr>
+              <a:t>Next Steps</a:t>
+            </a:r>
+            <a:endParaRPr lang="en-US" sz="3400" dirty="0"/>
+          </a:p>
+        </p:txBody>
+      </p:sp>
+      <p:sp>
+        <p:nvSpPr>
+          <p:cNvPr id="4" name="Shape 2"/>
+          <p:cNvSpPr/>
+          <p:nvPr/>
+        </p:nvSpPr>
+        <p:spPr>
+          <a:xfrm>
+            <a:off x="365760" y="914400"/>
+            <a:ext cx="3200400" cy="3931920"/>
+          </a:xfrm>
+          <a:prstGeom prst="rect">
+            <a:avLst/>
+          </a:prstGeom>
+          <a:solidFill>
+            <a:srgbClr val="D6EEF7"/>
+          </a:solidFill>
+          <a:ln w="12700">
+            <a:solidFill>
+              <a:srgbClr val="D6EEF7"/>
+            </a:solidFill>
+            <a:prstDash val="solid"/>
+          </a:ln>
+          <a:effectLst>
+            <a:outerShdw blurRad="101600" dist="38100" dir="8100000" algn="bl" rotWithShape="0">
+              <a:srgbClr val="000000">
+                <a:alpha val="12000"/>
+              </a:srgbClr>
+            </a:outerShdw>
+          </a:effectLst>
+        </p:spPr>
+      </p:sp>
+      <p:sp>
+        <p:nvSpPr>
+          <p:cNvPr id="5" name="Shape 3"/>
+          <p:cNvSpPr/>
+          <p:nvPr/>
+        </p:nvSpPr>
+        <p:spPr>
+          <a:xfrm>
+            <a:off x="365760" y="914400"/>
+            <a:ext cx="3200400" cy="438912"/>
+          </a:xfrm>
+          <a:prstGeom prst="rect">
+            <a:avLst/>
+          </a:prstGeom>
+          <a:solidFill>
+            <a:srgbClr val="0D7EA8"/>
+          </a:solidFill>
+          <a:ln w="12700">
+            <a:solidFill>
+              <a:srgbClr val="0D7EA8"/>
+            </a:solidFill>
+            <a:prstDash val="solid"/>
+          </a:ln>
+        </p:spPr>
+      </p:sp>
+      <p:sp>
+        <p:nvSpPr>
+          <p:cNvPr id="6" name="Text 4"/>
+          <p:cNvSpPr/>
+          <p:nvPr/>
+        </p:nvSpPr>
+        <p:spPr>
+          <a:xfrm>
+            <a:off x="475488" y="950976"/>
+            <a:ext cx="3017520" cy="365760"/>
+          </a:xfrm>
+          <a:prstGeom prst="rect">
+            <a:avLst/>
+          </a:prstGeom>
+          <a:noFill/>
+          <a:ln/>
+        </p:spPr>
+        <p:txBody>
+          <a:bodyPr wrap="square" lIns="0" tIns="0" rIns="0" bIns="0" rtlCol="0" anchor="ctr"/>
+          <a:lstStyle/>
+          <a:p>
+            <a:pPr marL="0" indent="0">
+              <a:buNone/>
+            </a:pPr>
+            <a:r>
+              <a:rPr lang="en-US" sz="1300" b="1" dirty="0">
+                <a:solidFill>
+                  <a:srgbClr val="FFFFFF"/>
+                </a:solidFill>
+                <a:latin typeface="Arial" pitchFamily="34" charset="0"/>
+                <a:ea typeface="Arial" pitchFamily="34" charset="-122"/>
+                <a:cs typeface="Arial" pitchFamily="34" charset="-120"/>
+              </a:rPr>
+              <a:t>Future Analysis</a:t>
+            </a:r>
+            <a:endParaRPr lang="en-US" sz="1300" dirty="0"/>
+          </a:p>
+        </p:txBody>
+      </p:sp>
+      <p:sp>
+        <p:nvSpPr>
+          <p:cNvPr id="7" name="Text 5"/>
+          <p:cNvSpPr/>
+          <p:nvPr/>
+        </p:nvSpPr>
+        <p:spPr>
+          <a:xfrm>
+            <a:off x="475488" y="1481328"/>
+            <a:ext cx="2999232" cy="502920"/>
+          </a:xfrm>
+          <a:prstGeom prst="rect">
+            <a:avLst/>
+          </a:prstGeom>
+          <a:noFill/>
+          <a:ln/>
+        </p:spPr>
+        <p:txBody>
+          <a:bodyPr wrap="square" lIns="0" tIns="0" rIns="0" bIns="0" rtlCol="0" anchor="ctr"/>
+          <a:lstStyle/>
+          <a:p>
+            <a:pPr marL="0" indent="0">
+              <a:buNone/>
+            </a:pPr>
+            <a:r>
+              <a:rPr lang="en-US" sz="1400" dirty="0">
+                <a:solidFill>
+                  <a:srgbClr val="2C3E50"/>
+                </a:solidFill>
+                <a:latin typeface="Arial" pitchFamily="34" charset="0"/>
+                <a:ea typeface="Arial" pitchFamily="34" charset="-122"/>
+                <a:cs typeface="Arial" pitchFamily="34" charset="-120"/>
+              </a:rPr>
+              <a:t>Gather 2025 &amp; 2026 data to enable a true balanced comparison:</a:t>
+            </a:r>
+            <a:endParaRPr lang="en-US" sz="1400" dirty="0"/>
+          </a:p>
+        </p:txBody>
+      </p:sp>
+      <p:sp>
+        <p:nvSpPr>
+          <p:cNvPr id="8" name="Shape 6"/>
+          <p:cNvSpPr/>
+          <p:nvPr/>
+        </p:nvSpPr>
+        <p:spPr>
+          <a:xfrm>
+            <a:off x="475488" y="2084832"/>
+            <a:ext cx="1417320" cy="822960"/>
+          </a:xfrm>
+          <a:prstGeom prst="rect">
+            <a:avLst/>
+          </a:prstGeom>
+          <a:solidFill>
+            <a:srgbClr val="FFFFFF"/>
+          </a:solidFill>
+          <a:ln w="12700">
+            <a:solidFill>
+              <a:srgbClr val="FFFFFF"/>
+            </a:solidFill>
+            <a:prstDash val="solid"/>
+          </a:ln>
+        </p:spPr>
+      </p:sp>
+      <p:sp>
+        <p:nvSpPr>
+          <p:cNvPr id="9" name="Text 7"/>
+          <p:cNvSpPr/>
+          <p:nvPr/>
+        </p:nvSpPr>
+        <p:spPr>
+          <a:xfrm>
+            <a:off x="530352" y="2121408"/>
+            <a:ext cx="1280160" cy="274320"/>
+          </a:xfrm>
+          <a:prstGeom prst="rect">
+            <a:avLst/>
+          </a:prstGeom>
+          <a:noFill/>
+          <a:ln/>
+        </p:spPr>
+        <p:txBody>
+          <a:bodyPr wrap="square" lIns="0" tIns="0" rIns="0" bIns="0" rtlCol="0" anchor="ctr"/>
+          <a:lstStyle/>
+          <a:p>
+            <a:pPr marL="0" indent="0">
+              <a:buNone/>
+            </a:pPr>
+            <a:r>
+              <a:rPr lang="en-US" sz="1100" b="1" dirty="0">
+                <a:solidFill>
+                  <a:srgbClr val="0D7EA8"/>
+                </a:solidFill>
+                <a:latin typeface="Arial" pitchFamily="34" charset="0"/>
+                <a:ea typeface="Arial" pitchFamily="34" charset="-122"/>
+                <a:cs typeface="Arial" pitchFamily="34" charset="-120"/>
+              </a:rPr>
+              <a:t>Pre-COVID</a:t>
+            </a:r>
+            <a:endParaRPr lang="en-US" sz="1100" dirty="0"/>
+          </a:p>
+        </p:txBody>
+      </p:sp>
+      <p:sp>
+        <p:nvSpPr>
+          <p:cNvPr id="10" name="Text 8"/>
+          <p:cNvSpPr/>
+          <p:nvPr/>
+        </p:nvSpPr>
+        <p:spPr>
+          <a:xfrm>
+            <a:off x="530352" y="2395728"/>
+            <a:ext cx="1280160" cy="411480"/>
+          </a:xfrm>
+          <a:prstGeom prst="rect">
+            <a:avLst/>
+          </a:prstGeom>
+          <a:noFill/>
+          <a:ln/>
+        </p:spPr>
+        <p:txBody>
+          <a:bodyPr wrap="square" lIns="0" tIns="0" rIns="0" bIns="0" rtlCol="0" anchor="ctr"/>
+          <a:lstStyle/>
+          <a:p>
+            <a:pPr marL="0" indent="0">
+              <a:buNone/>
+            </a:pPr>
+            <a:r>
+              <a:rPr lang="en-US" sz="1000" dirty="0">
+                <a:solidFill>
+                  <a:srgbClr val="6B7C8D"/>
+                </a:solidFill>
+                <a:latin typeface="Arial" pitchFamily="34" charset="0"/>
+                <a:ea typeface="Arial" pitchFamily="34" charset="-122"/>
+                <a:cs typeface="Arial" pitchFamily="34" charset="-120"/>
+              </a:rPr>
+              <a:t>2015–2019</a:t>
+            </a:r>
+            <a:endParaRPr lang="en-US" sz="1000" dirty="0"/>
+          </a:p>
+          <a:p>
+            <a:pPr marL="0" indent="0">
+              <a:buNone/>
+            </a:pPr>
+            <a:r>
+              <a:rPr lang="en-US" sz="1000" dirty="0">
+                <a:solidFill>
+                  <a:srgbClr val="6B7C8D"/>
+                </a:solidFill>
+                <a:latin typeface="Arial" pitchFamily="34" charset="0"/>
+                <a:ea typeface="Arial" pitchFamily="34" charset="-122"/>
+                <a:cs typeface="Arial" pitchFamily="34" charset="-120"/>
+              </a:rPr>
+              <a:t>5 years</a:t>
+            </a:r>
+            <a:endParaRPr lang="en-US" sz="1000" dirty="0"/>
+          </a:p>
+        </p:txBody>
+      </p:sp>
+      <p:sp>
+        <p:nvSpPr>
+          <p:cNvPr id="11" name="Shape 9"/>
+          <p:cNvSpPr/>
+          <p:nvPr/>
+        </p:nvSpPr>
+        <p:spPr>
+          <a:xfrm>
+            <a:off x="2029968" y="2084832"/>
+            <a:ext cx="1417320" cy="822960"/>
+          </a:xfrm>
+          <a:prstGeom prst="rect">
+            <a:avLst/>
+          </a:prstGeom>
+          <a:solidFill>
+            <a:srgbClr val="FFFFFF"/>
+          </a:solidFill>
+          <a:ln w="12700">
+            <a:solidFill>
+              <a:srgbClr val="FFFFFF"/>
+            </a:solidFill>
+            <a:prstDash val="solid"/>
+          </a:ln>
+        </p:spPr>
+      </p:sp>
+      <p:sp>
+        <p:nvSpPr>
+          <p:cNvPr id="12" name="Text 10"/>
+          <p:cNvSpPr/>
+          <p:nvPr/>
+        </p:nvSpPr>
+        <p:spPr>
+          <a:xfrm>
+            <a:off x="2084832" y="2121408"/>
+            <a:ext cx="1280160" cy="274320"/>
+          </a:xfrm>
+          <a:prstGeom prst="rect">
+            <a:avLst/>
+          </a:prstGeom>
+          <a:noFill/>
+          <a:ln/>
+        </p:spPr>
+        <p:txBody>
+          <a:bodyPr wrap="square" lIns="0" tIns="0" rIns="0" bIns="0" rtlCol="0" anchor="ctr"/>
+          <a:lstStyle/>
+          <a:p>
+            <a:pPr marL="0" indent="0">
+              <a:buNone/>
+            </a:pPr>
+            <a:r>
+              <a:rPr lang="en-US" sz="1100" b="1" dirty="0">
+                <a:solidFill>
+                  <a:srgbClr val="D9A055"/>
+                </a:solidFill>
+                <a:latin typeface="Arial" pitchFamily="34" charset="0"/>
+                <a:ea typeface="Arial" pitchFamily="34" charset="-122"/>
+                <a:cs typeface="Arial" pitchFamily="34" charset="-120"/>
+              </a:rPr>
+              <a:t>Post-COVID</a:t>
+            </a:r>
+            <a:endParaRPr lang="en-US" sz="1100" dirty="0"/>
+          </a:p>
+        </p:txBody>
+      </p:sp>
+      <p:sp>
+        <p:nvSpPr>
+          <p:cNvPr id="13" name="Text 11"/>
+          <p:cNvSpPr/>
+          <p:nvPr/>
+        </p:nvSpPr>
+        <p:spPr>
+          <a:xfrm>
+            <a:off x="2084832" y="2395728"/>
+            <a:ext cx="1280160" cy="411480"/>
+          </a:xfrm>
+          <a:prstGeom prst="rect">
+            <a:avLst/>
+          </a:prstGeom>
+          <a:noFill/>
+          <a:ln/>
+        </p:spPr>
+        <p:txBody>
+          <a:bodyPr wrap="square" lIns="0" tIns="0" rIns="0" bIns="0" rtlCol="0" anchor="ctr"/>
+          <a:lstStyle/>
+          <a:p>
+            <a:pPr marL="0" indent="0">
+              <a:buNone/>
+            </a:pPr>
+            <a:r>
+              <a:rPr lang="en-US" sz="1000" dirty="0">
+                <a:solidFill>
+                  <a:srgbClr val="6B7C8D"/>
+                </a:solidFill>
+                <a:latin typeface="Arial" pitchFamily="34" charset="0"/>
+                <a:ea typeface="Arial" pitchFamily="34" charset="-122"/>
+                <a:cs typeface="Arial" pitchFamily="34" charset="-120"/>
+              </a:rPr>
+              <a:t>2022–2026</a:t>
+            </a:r>
+            <a:endParaRPr lang="en-US" sz="1000" dirty="0"/>
+          </a:p>
+          <a:p>
+            <a:pPr marL="0" indent="0">
+              <a:buNone/>
+            </a:pPr>
+            <a:r>
+              <a:rPr lang="en-US" sz="1000" dirty="0">
+                <a:solidFill>
+                  <a:srgbClr val="6B7C8D"/>
+                </a:solidFill>
+                <a:latin typeface="Arial" pitchFamily="34" charset="0"/>
+                <a:ea typeface="Arial" pitchFamily="34" charset="-122"/>
+                <a:cs typeface="Arial" pitchFamily="34" charset="-120"/>
+              </a:rPr>
+              <a:t>5 years</a:t>
+            </a:r>
+            <a:endParaRPr lang="en-US" sz="1000" dirty="0"/>
+          </a:p>
+        </p:txBody>
+      </p:sp>
+      <p:sp>
+        <p:nvSpPr>
+          <p:cNvPr id="14" name="Text 12"/>
+          <p:cNvSpPr/>
+          <p:nvPr/>
+        </p:nvSpPr>
+        <p:spPr>
+          <a:xfrm>
+            <a:off x="484632" y="2944368"/>
+            <a:ext cx="2999232" cy="1645920"/>
+          </a:xfrm>
+          <a:prstGeom prst="rect">
+            <a:avLst/>
+          </a:prstGeom>
+          <a:noFill/>
+          <a:ln/>
+        </p:spPr>
+        <p:txBody>
+          <a:bodyPr wrap="square" lIns="0" tIns="0" rIns="0" bIns="0" rtlCol="0" anchor="ctr"/>
+          <a:lstStyle/>
+          <a:p>
+            <a:pPr marL="0" indent="0">
+              <a:buNone/>
+            </a:pPr>
+            <a:r>
+              <a:rPr lang="en-US" sz="1400" dirty="0">
+                <a:solidFill>
+                  <a:srgbClr val="2C3E50"/>
+                </a:solidFill>
+                <a:latin typeface="Arial" pitchFamily="34" charset="0"/>
+                <a:ea typeface="Arial" pitchFamily="34" charset="-122"/>
+                <a:cs typeface="Arial" pitchFamily="34" charset="-120"/>
+              </a:rPr>
+              <a:t>Currently only 3 post-COVID years available. Adding 2025–2026 data would create a symmetrical 5-year vs 5-year comparison for a more reliable recovery analysis.</a:t>
+            </a:r>
+            <a:endParaRPr lang="en-US" sz="1400" dirty="0"/>
+          </a:p>
+        </p:txBody>
+      </p:sp>
+      <p:sp>
+        <p:nvSpPr>
+          <p:cNvPr id="15" name="Shape 13"/>
+          <p:cNvSpPr/>
+          <p:nvPr/>
+        </p:nvSpPr>
+        <p:spPr>
+          <a:xfrm>
+            <a:off x="3840480" y="914400"/>
+            <a:ext cx="4937760" cy="3931920"/>
+          </a:xfrm>
+          <a:prstGeom prst="rect">
+            <a:avLst/>
+          </a:prstGeom>
+          <a:solidFill>
+            <a:srgbClr val="E8EDF0"/>
+          </a:solidFill>
+          <a:ln w="12700">
+            <a:solidFill>
+              <a:srgbClr val="E8EDF0"/>
+            </a:solidFill>
+            <a:prstDash val="solid"/>
+          </a:ln>
+          <a:effectLst>
+            <a:outerShdw blurRad="101600" dist="38100" dir="8100000" algn="bl" rotWithShape="0">
+              <a:srgbClr val="000000">
+                <a:alpha val="12000"/>
+              </a:srgbClr>
+            </a:outerShdw>
+          </a:effectLst>
+        </p:spPr>
+      </p:sp>
+      <p:sp>
+        <p:nvSpPr>
+          <p:cNvPr id="16" name="Shape 14"/>
+          <p:cNvSpPr/>
+          <p:nvPr/>
+        </p:nvSpPr>
+        <p:spPr>
+          <a:xfrm>
+            <a:off x="3840480" y="914400"/>
+            <a:ext cx="4937760" cy="438912"/>
           </a:xfrm>
           <a:prstGeom prst="rect">
             <a:avLst/>
@@ -6112,92 +6469,78 @@
       </p:sp>
       <p:sp>
         <p:nvSpPr>
-          <p:cNvPr id="3" name="Text 1"/>
-          <p:cNvSpPr/>
-          <p:nvPr/>
-        </p:nvSpPr>
-        <p:spPr>
-          <a:xfrm>
-            <a:off x="457200" y="1371600"/>
-            <a:ext cx="8229600" cy="1005840"/>
-          </a:xfrm>
-          <a:prstGeom prst="rect">
-            <a:avLst/>
-          </a:prstGeom>
-          <a:noFill/>
-          <a:ln/>
-        </p:spPr>
-        <p:txBody>
-          <a:bodyPr wrap="square" lIns="0" tIns="0" rIns="0" bIns="0" rtlCol="0" anchor="ctr"/>
-          <a:lstStyle/>
-          <a:p>
-            <a:pPr indent="0" marL="0">
-              <a:buNone/>
-            </a:pPr>
-            <a:r>
-              <a:rPr lang="en-US" sz="5200" b="1" dirty="0">
-                <a:solidFill>
-                  <a:srgbClr val="FFFFFF"/>
-                </a:solidFill>
-                <a:latin typeface="Arial" pitchFamily="34" charset="0"/>
-                <a:ea typeface="Arial" pitchFamily="34" charset="-122"/>
-                <a:cs typeface="Arial" pitchFamily="34" charset="-120"/>
-              </a:rPr>
-              <a:t>Thank You</a:t>
-            </a:r>
-            <a:endParaRPr lang="en-US" sz="5200" dirty="0"/>
-          </a:p>
-        </p:txBody>
-      </p:sp>
-      <p:sp>
-        <p:nvSpPr>
-          <p:cNvPr id="4" name="Text 2"/>
-          <p:cNvSpPr/>
-          <p:nvPr/>
-        </p:nvSpPr>
-        <p:spPr>
-          <a:xfrm>
-            <a:off x="457200" y="2423160"/>
-            <a:ext cx="7315200" cy="548640"/>
-          </a:xfrm>
-          <a:prstGeom prst="rect">
-            <a:avLst/>
-          </a:prstGeom>
-          <a:noFill/>
-          <a:ln/>
-        </p:spPr>
-        <p:txBody>
-          <a:bodyPr wrap="square" lIns="0" tIns="0" rIns="0" bIns="0" rtlCol="0" anchor="ctr"/>
-          <a:lstStyle/>
-          <a:p>
-            <a:pPr indent="0" marL="0">
-              <a:buNone/>
-            </a:pPr>
-            <a:r>
-              <a:rPr lang="en-US" sz="2200" i="1" dirty="0">
-                <a:solidFill>
-                  <a:srgbClr val="D6EEF7"/>
-                </a:solidFill>
-                <a:latin typeface="Arial" pitchFamily="34" charset="0"/>
-                <a:ea typeface="Arial" pitchFamily="34" charset="-122"/>
-                <a:cs typeface="Arial" pitchFamily="34" charset="-120"/>
-              </a:rPr>
-              <a:t>Brazil is back — and the data proves it.</a:t>
-            </a:r>
-            <a:endParaRPr lang="en-US" sz="2200" dirty="0"/>
-          </a:p>
-        </p:txBody>
-      </p:sp>
-      <p:sp>
-        <p:nvSpPr>
-          <p:cNvPr id="5" name="Shape 3"/>
-          <p:cNvSpPr/>
-          <p:nvPr/>
-        </p:nvSpPr>
-        <p:spPr>
-          <a:xfrm>
-            <a:off x="457200" y="3063240"/>
-            <a:ext cx="3200400" cy="36576"/>
+          <p:cNvPr id="17" name="Text 15"/>
+          <p:cNvSpPr/>
+          <p:nvPr/>
+        </p:nvSpPr>
+        <p:spPr>
+          <a:xfrm>
+            <a:off x="3950208" y="950976"/>
+            <a:ext cx="4754880" cy="365760"/>
+          </a:xfrm>
+          <a:prstGeom prst="rect">
+            <a:avLst/>
+          </a:prstGeom>
+          <a:noFill/>
+          <a:ln/>
+        </p:spPr>
+        <p:txBody>
+          <a:bodyPr wrap="square" lIns="0" tIns="0" rIns="0" bIns="0" rtlCol="0" anchor="ctr"/>
+          <a:lstStyle/>
+          <a:p>
+            <a:pPr marL="0" indent="0">
+              <a:buNone/>
+            </a:pPr>
+            <a:r>
+              <a:rPr lang="en-US" sz="1200" b="1" dirty="0">
+                <a:solidFill>
+                  <a:srgbClr val="2C3E50"/>
+                </a:solidFill>
+                <a:latin typeface="Arial" pitchFamily="34" charset="0"/>
+                <a:ea typeface="Arial" pitchFamily="34" charset="-122"/>
+                <a:cs typeface="Arial" pitchFamily="34" charset="-120"/>
+              </a:rPr>
+              <a:t>Travel Recommender App — Future Development</a:t>
+            </a:r>
+            <a:endParaRPr lang="en-US" sz="1200" dirty="0"/>
+          </a:p>
+        </p:txBody>
+      </p:sp>
+      <p:sp>
+        <p:nvSpPr>
+          <p:cNvPr id="18" name="Shape 16"/>
+          <p:cNvSpPr/>
+          <p:nvPr/>
+        </p:nvSpPr>
+        <p:spPr>
+          <a:xfrm>
+            <a:off x="3950208" y="1508760"/>
+            <a:ext cx="4736592" cy="566928"/>
+          </a:xfrm>
+          <a:prstGeom prst="rect">
+            <a:avLst/>
+          </a:prstGeom>
+          <a:solidFill>
+            <a:srgbClr val="FFFFFF"/>
+          </a:solidFill>
+          <a:ln w="12700">
+            <a:solidFill>
+              <a:srgbClr val="FFFFFF"/>
+            </a:solidFill>
+            <a:prstDash val="solid"/>
+          </a:ln>
+        </p:spPr>
+      </p:sp>
+      <p:sp>
+        <p:nvSpPr>
+          <p:cNvPr id="19" name="Shape 17"/>
+          <p:cNvSpPr/>
+          <p:nvPr/>
+        </p:nvSpPr>
+        <p:spPr>
+          <a:xfrm>
+            <a:off x="3950208" y="1508760"/>
+            <a:ext cx="54864" cy="566928"/>
           </a:xfrm>
           <a:prstGeom prst="rect">
             <a:avLst/>
@@ -6215,6 +6558,835 @@
       </p:sp>
       <p:sp>
         <p:nvSpPr>
+          <p:cNvPr id="20" name="Text 18"/>
+          <p:cNvSpPr/>
+          <p:nvPr/>
+        </p:nvSpPr>
+        <p:spPr>
+          <a:xfrm>
+            <a:off x="4078224" y="1545336"/>
+            <a:ext cx="4480560" cy="219456"/>
+          </a:xfrm>
+          <a:prstGeom prst="rect">
+            <a:avLst/>
+          </a:prstGeom>
+          <a:noFill/>
+          <a:ln/>
+        </p:spPr>
+        <p:txBody>
+          <a:bodyPr wrap="square" lIns="0" tIns="0" rIns="0" bIns="0" rtlCol="0" anchor="ctr"/>
+          <a:lstStyle/>
+          <a:p>
+            <a:pPr marL="0" indent="0">
+              <a:buNone/>
+            </a:pPr>
+            <a:r>
+              <a:rPr lang="en-US" sz="1100" b="1" dirty="0">
+                <a:solidFill>
+                  <a:srgbClr val="2C3E50"/>
+                </a:solidFill>
+                <a:latin typeface="Arial" pitchFamily="34" charset="0"/>
+                <a:ea typeface="Arial" pitchFamily="34" charset="-122"/>
+                <a:cs typeface="Arial" pitchFamily="34" charset="-120"/>
+              </a:rPr>
+              <a:t>Annual data updates</a:t>
+            </a:r>
+            <a:endParaRPr lang="en-US" sz="1100" dirty="0"/>
+          </a:p>
+        </p:txBody>
+      </p:sp>
+      <p:sp>
+        <p:nvSpPr>
+          <p:cNvPr id="21" name="Text 19"/>
+          <p:cNvSpPr/>
+          <p:nvPr/>
+        </p:nvSpPr>
+        <p:spPr>
+          <a:xfrm>
+            <a:off x="4078224" y="1783080"/>
+            <a:ext cx="4480560" cy="237744"/>
+          </a:xfrm>
+          <a:prstGeom prst="rect">
+            <a:avLst/>
+          </a:prstGeom>
+          <a:noFill/>
+          <a:ln/>
+        </p:spPr>
+        <p:txBody>
+          <a:bodyPr wrap="square" lIns="0" tIns="0" rIns="0" bIns="0" rtlCol="0" anchor="ctr"/>
+          <a:lstStyle/>
+          <a:p>
+            <a:pPr marL="0" indent="0">
+              <a:buNone/>
+            </a:pPr>
+            <a:r>
+              <a:rPr lang="en-US" sz="1000" dirty="0">
+                <a:solidFill>
+                  <a:srgbClr val="6B7C8D"/>
+                </a:solidFill>
+                <a:latin typeface="Arial" pitchFamily="34" charset="0"/>
+                <a:ea typeface="Arial" pitchFamily="34" charset="-122"/>
+                <a:cs typeface="Arial" pitchFamily="34" charset="-120"/>
+              </a:rPr>
+              <a:t>Update best months and good months as tourism patterns evolve.</a:t>
+            </a:r>
+            <a:endParaRPr lang="en-US" sz="1000" dirty="0"/>
+          </a:p>
+        </p:txBody>
+      </p:sp>
+      <p:sp>
+        <p:nvSpPr>
+          <p:cNvPr id="22" name="Shape 20"/>
+          <p:cNvSpPr/>
+          <p:nvPr/>
+        </p:nvSpPr>
+        <p:spPr>
+          <a:xfrm>
+            <a:off x="3950208" y="2167128"/>
+            <a:ext cx="4736592" cy="566928"/>
+          </a:xfrm>
+          <a:prstGeom prst="rect">
+            <a:avLst/>
+          </a:prstGeom>
+          <a:solidFill>
+            <a:srgbClr val="FFFFFF"/>
+          </a:solidFill>
+          <a:ln w="12700">
+            <a:solidFill>
+              <a:srgbClr val="FFFFFF"/>
+            </a:solidFill>
+            <a:prstDash val="solid"/>
+          </a:ln>
+        </p:spPr>
+      </p:sp>
+      <p:sp>
+        <p:nvSpPr>
+          <p:cNvPr id="23" name="Shape 21"/>
+          <p:cNvSpPr/>
+          <p:nvPr/>
+        </p:nvSpPr>
+        <p:spPr>
+          <a:xfrm>
+            <a:off x="3950208" y="2167128"/>
+            <a:ext cx="54864" cy="566928"/>
+          </a:xfrm>
+          <a:prstGeom prst="rect">
+            <a:avLst/>
+          </a:prstGeom>
+          <a:solidFill>
+            <a:srgbClr val="F4A324"/>
+          </a:solidFill>
+          <a:ln w="12700">
+            <a:solidFill>
+              <a:srgbClr val="F4A324"/>
+            </a:solidFill>
+            <a:prstDash val="solid"/>
+          </a:ln>
+        </p:spPr>
+      </p:sp>
+      <p:sp>
+        <p:nvSpPr>
+          <p:cNvPr id="24" name="Text 22"/>
+          <p:cNvSpPr/>
+          <p:nvPr/>
+        </p:nvSpPr>
+        <p:spPr>
+          <a:xfrm>
+            <a:off x="4078224" y="2203704"/>
+            <a:ext cx="4480560" cy="219456"/>
+          </a:xfrm>
+          <a:prstGeom prst="rect">
+            <a:avLst/>
+          </a:prstGeom>
+          <a:noFill/>
+          <a:ln/>
+        </p:spPr>
+        <p:txBody>
+          <a:bodyPr wrap="square" lIns="0" tIns="0" rIns="0" bIns="0" rtlCol="0" anchor="ctr"/>
+          <a:lstStyle/>
+          <a:p>
+            <a:pPr marL="0" indent="0">
+              <a:buNone/>
+            </a:pPr>
+            <a:r>
+              <a:rPr lang="en-US" sz="1100" b="1" dirty="0">
+                <a:solidFill>
+                  <a:srgbClr val="2C3E50"/>
+                </a:solidFill>
+                <a:latin typeface="Arial" pitchFamily="34" charset="0"/>
+                <a:ea typeface="Arial" pitchFamily="34" charset="-122"/>
+                <a:cs typeface="Arial" pitchFamily="34" charset="-120"/>
+              </a:rPr>
+              <a:t>Expand destination database</a:t>
+            </a:r>
+            <a:endParaRPr lang="en-US" sz="1100" dirty="0"/>
+          </a:p>
+        </p:txBody>
+      </p:sp>
+      <p:sp>
+        <p:nvSpPr>
+          <p:cNvPr id="25" name="Text 23"/>
+          <p:cNvSpPr/>
+          <p:nvPr/>
+        </p:nvSpPr>
+        <p:spPr>
+          <a:xfrm>
+            <a:off x="4078224" y="2441448"/>
+            <a:ext cx="4480560" cy="237744"/>
+          </a:xfrm>
+          <a:prstGeom prst="rect">
+            <a:avLst/>
+          </a:prstGeom>
+          <a:noFill/>
+          <a:ln/>
+        </p:spPr>
+        <p:txBody>
+          <a:bodyPr wrap="square" lIns="0" tIns="0" rIns="0" bIns="0" rtlCol="0" anchor="ctr"/>
+          <a:lstStyle/>
+          <a:p>
+            <a:pPr marL="0" indent="0">
+              <a:buNone/>
+            </a:pPr>
+            <a:r>
+              <a:rPr lang="en-US" sz="1000" dirty="0">
+                <a:solidFill>
+                  <a:srgbClr val="6B7C8D"/>
+                </a:solidFill>
+                <a:latin typeface="Arial" pitchFamily="34" charset="0"/>
+                <a:ea typeface="Arial" pitchFamily="34" charset="-122"/>
+                <a:cs typeface="Arial" pitchFamily="34" charset="-120"/>
+              </a:rPr>
+              <a:t>Currently 51 destinations. Idea is to grow it to cover more municipalities and hidden gems across all states.</a:t>
+            </a:r>
+            <a:endParaRPr lang="en-US" sz="1000" dirty="0"/>
+          </a:p>
+        </p:txBody>
+      </p:sp>
+      <p:sp>
+        <p:nvSpPr>
+          <p:cNvPr id="26" name="Shape 24"/>
+          <p:cNvSpPr/>
+          <p:nvPr/>
+        </p:nvSpPr>
+        <p:spPr>
+          <a:xfrm>
+            <a:off x="3950208" y="2825496"/>
+            <a:ext cx="4736592" cy="566928"/>
+          </a:xfrm>
+          <a:prstGeom prst="rect">
+            <a:avLst/>
+          </a:prstGeom>
+          <a:solidFill>
+            <a:srgbClr val="FFFFFF"/>
+          </a:solidFill>
+          <a:ln w="12700">
+            <a:solidFill>
+              <a:srgbClr val="FFFFFF"/>
+            </a:solidFill>
+            <a:prstDash val="solid"/>
+          </a:ln>
+        </p:spPr>
+      </p:sp>
+      <p:sp>
+        <p:nvSpPr>
+          <p:cNvPr id="27" name="Shape 25"/>
+          <p:cNvSpPr/>
+          <p:nvPr/>
+        </p:nvSpPr>
+        <p:spPr>
+          <a:xfrm>
+            <a:off x="3950208" y="2825496"/>
+            <a:ext cx="54864" cy="566928"/>
+          </a:xfrm>
+          <a:prstGeom prst="rect">
+            <a:avLst/>
+          </a:prstGeom>
+          <a:solidFill>
+            <a:srgbClr val="F4A324"/>
+          </a:solidFill>
+          <a:ln w="12700">
+            <a:solidFill>
+              <a:srgbClr val="F4A324"/>
+            </a:solidFill>
+            <a:prstDash val="solid"/>
+          </a:ln>
+        </p:spPr>
+      </p:sp>
+      <p:sp>
+        <p:nvSpPr>
+          <p:cNvPr id="28" name="Text 26"/>
+          <p:cNvSpPr/>
+          <p:nvPr/>
+        </p:nvSpPr>
+        <p:spPr>
+          <a:xfrm>
+            <a:off x="4078224" y="2862072"/>
+            <a:ext cx="4480560" cy="219456"/>
+          </a:xfrm>
+          <a:prstGeom prst="rect">
+            <a:avLst/>
+          </a:prstGeom>
+          <a:noFill/>
+          <a:ln/>
+        </p:spPr>
+        <p:txBody>
+          <a:bodyPr wrap="square" lIns="0" tIns="0" rIns="0" bIns="0" rtlCol="0" anchor="ctr"/>
+          <a:lstStyle/>
+          <a:p>
+            <a:pPr marL="0" indent="0">
+              <a:buNone/>
+            </a:pPr>
+            <a:r>
+              <a:rPr lang="en-US" sz="1100" b="1" dirty="0">
+                <a:solidFill>
+                  <a:srgbClr val="2C3E50"/>
+                </a:solidFill>
+                <a:latin typeface="Arial" pitchFamily="34" charset="0"/>
+                <a:ea typeface="Arial" pitchFamily="34" charset="-122"/>
+                <a:cs typeface="Arial" pitchFamily="34" charset="-120"/>
+              </a:rPr>
+              <a:t>Add event calendar</a:t>
+            </a:r>
+            <a:endParaRPr lang="en-US" sz="1100" dirty="0"/>
+          </a:p>
+        </p:txBody>
+      </p:sp>
+      <p:sp>
+        <p:nvSpPr>
+          <p:cNvPr id="29" name="Text 27"/>
+          <p:cNvSpPr/>
+          <p:nvPr/>
+        </p:nvSpPr>
+        <p:spPr>
+          <a:xfrm>
+            <a:off x="4078224" y="3099816"/>
+            <a:ext cx="4480560" cy="237744"/>
+          </a:xfrm>
+          <a:prstGeom prst="rect">
+            <a:avLst/>
+          </a:prstGeom>
+          <a:noFill/>
+          <a:ln/>
+        </p:spPr>
+        <p:txBody>
+          <a:bodyPr wrap="square" lIns="0" tIns="0" rIns="0" bIns="0" rtlCol="0" anchor="ctr"/>
+          <a:lstStyle/>
+          <a:p>
+            <a:pPr marL="0" indent="0">
+              <a:buNone/>
+            </a:pPr>
+            <a:r>
+              <a:rPr lang="en-US" sz="1000" dirty="0">
+                <a:solidFill>
+                  <a:srgbClr val="6B7C8D"/>
+                </a:solidFill>
+                <a:latin typeface="Arial" pitchFamily="34" charset="0"/>
+                <a:ea typeface="Arial" pitchFamily="34" charset="-122"/>
+                <a:cs typeface="Arial" pitchFamily="34" charset="-120"/>
+              </a:rPr>
+              <a:t>Integrate a real-time events calendar so recommendations reflect upcoming festivals and local events that might not be a driven on themselves</a:t>
+            </a:r>
+            <a:endParaRPr lang="en-US" sz="1000" dirty="0"/>
+          </a:p>
+        </p:txBody>
+      </p:sp>
+      <p:sp>
+        <p:nvSpPr>
+          <p:cNvPr id="30" name="Shape 28"/>
+          <p:cNvSpPr/>
+          <p:nvPr/>
+        </p:nvSpPr>
+        <p:spPr>
+          <a:xfrm>
+            <a:off x="3950208" y="3483864"/>
+            <a:ext cx="4736592" cy="566928"/>
+          </a:xfrm>
+          <a:prstGeom prst="rect">
+            <a:avLst/>
+          </a:prstGeom>
+          <a:solidFill>
+            <a:srgbClr val="FFFFFF"/>
+          </a:solidFill>
+          <a:ln w="12700">
+            <a:solidFill>
+              <a:srgbClr val="FFFFFF"/>
+            </a:solidFill>
+            <a:prstDash val="solid"/>
+          </a:ln>
+        </p:spPr>
+      </p:sp>
+      <p:sp>
+        <p:nvSpPr>
+          <p:cNvPr id="31" name="Shape 29"/>
+          <p:cNvSpPr/>
+          <p:nvPr/>
+        </p:nvSpPr>
+        <p:spPr>
+          <a:xfrm>
+            <a:off x="3950208" y="3483864"/>
+            <a:ext cx="54864" cy="566928"/>
+          </a:xfrm>
+          <a:prstGeom prst="rect">
+            <a:avLst/>
+          </a:prstGeom>
+          <a:solidFill>
+            <a:srgbClr val="F4A324"/>
+          </a:solidFill>
+          <a:ln w="12700">
+            <a:solidFill>
+              <a:srgbClr val="F4A324"/>
+            </a:solidFill>
+            <a:prstDash val="solid"/>
+          </a:ln>
+        </p:spPr>
+      </p:sp>
+      <p:sp>
+        <p:nvSpPr>
+          <p:cNvPr id="32" name="Text 30"/>
+          <p:cNvSpPr/>
+          <p:nvPr/>
+        </p:nvSpPr>
+        <p:spPr>
+          <a:xfrm>
+            <a:off x="4078224" y="3520440"/>
+            <a:ext cx="4480560" cy="219456"/>
+          </a:xfrm>
+          <a:prstGeom prst="rect">
+            <a:avLst/>
+          </a:prstGeom>
+          <a:noFill/>
+          <a:ln/>
+        </p:spPr>
+        <p:txBody>
+          <a:bodyPr wrap="square" lIns="0" tIns="0" rIns="0" bIns="0" rtlCol="0" anchor="ctr"/>
+          <a:lstStyle/>
+          <a:p>
+            <a:pPr marL="0" indent="0">
+              <a:buNone/>
+            </a:pPr>
+            <a:r>
+              <a:rPr lang="en-US" sz="1100" b="1" dirty="0">
+                <a:solidFill>
+                  <a:srgbClr val="2C3E50"/>
+                </a:solidFill>
+                <a:latin typeface="Arial" pitchFamily="34" charset="0"/>
+                <a:ea typeface="Arial" pitchFamily="34" charset="-122"/>
+                <a:cs typeface="Arial" pitchFamily="34" charset="-120"/>
+              </a:rPr>
+              <a:t>Multi-destination trips</a:t>
+            </a:r>
+            <a:endParaRPr lang="en-US" sz="1100" dirty="0"/>
+          </a:p>
+        </p:txBody>
+      </p:sp>
+      <p:sp>
+        <p:nvSpPr>
+          <p:cNvPr id="33" name="Text 31"/>
+          <p:cNvSpPr/>
+          <p:nvPr/>
+        </p:nvSpPr>
+        <p:spPr>
+          <a:xfrm>
+            <a:off x="4078224" y="3758184"/>
+            <a:ext cx="4480560" cy="237744"/>
+          </a:xfrm>
+          <a:prstGeom prst="rect">
+            <a:avLst/>
+          </a:prstGeom>
+          <a:noFill/>
+          <a:ln/>
+        </p:spPr>
+        <p:txBody>
+          <a:bodyPr wrap="square" lIns="0" tIns="0" rIns="0" bIns="0" rtlCol="0" anchor="ctr"/>
+          <a:lstStyle/>
+          <a:p>
+            <a:pPr marL="0" indent="0">
+              <a:buNone/>
+            </a:pPr>
+            <a:r>
+              <a:rPr lang="en-US" sz="1000" dirty="0">
+                <a:solidFill>
+                  <a:srgbClr val="6B7C8D"/>
+                </a:solidFill>
+                <a:latin typeface="Arial" pitchFamily="34" charset="0"/>
+                <a:ea typeface="Arial" pitchFamily="34" charset="-122"/>
+                <a:cs typeface="Arial" pitchFamily="34" charset="-120"/>
+              </a:rPr>
+              <a:t>Allow users to plan itineraries with multiple destinations, optimised by geography and travel time.</a:t>
+            </a:r>
+            <a:endParaRPr lang="en-US" sz="1000" dirty="0"/>
+          </a:p>
+        </p:txBody>
+      </p:sp>
+      <p:sp>
+        <p:nvSpPr>
+          <p:cNvPr id="34" name="Shape 32"/>
+          <p:cNvSpPr/>
+          <p:nvPr/>
+        </p:nvSpPr>
+        <p:spPr>
+          <a:xfrm>
+            <a:off x="3950208" y="4142232"/>
+            <a:ext cx="4736592" cy="566928"/>
+          </a:xfrm>
+          <a:prstGeom prst="rect">
+            <a:avLst/>
+          </a:prstGeom>
+          <a:solidFill>
+            <a:srgbClr val="FFFFFF"/>
+          </a:solidFill>
+          <a:ln w="12700">
+            <a:solidFill>
+              <a:srgbClr val="FFFFFF"/>
+            </a:solidFill>
+            <a:prstDash val="solid"/>
+          </a:ln>
+        </p:spPr>
+      </p:sp>
+      <p:sp>
+        <p:nvSpPr>
+          <p:cNvPr id="35" name="Shape 33"/>
+          <p:cNvSpPr/>
+          <p:nvPr/>
+        </p:nvSpPr>
+        <p:spPr>
+          <a:xfrm>
+            <a:off x="3950208" y="4142232"/>
+            <a:ext cx="54864" cy="566928"/>
+          </a:xfrm>
+          <a:prstGeom prst="rect">
+            <a:avLst/>
+          </a:prstGeom>
+          <a:solidFill>
+            <a:srgbClr val="F4A324"/>
+          </a:solidFill>
+          <a:ln w="12700">
+            <a:solidFill>
+              <a:srgbClr val="F4A324"/>
+            </a:solidFill>
+            <a:prstDash val="solid"/>
+          </a:ln>
+        </p:spPr>
+      </p:sp>
+      <p:sp>
+        <p:nvSpPr>
+          <p:cNvPr id="36" name="Text 34"/>
+          <p:cNvSpPr/>
+          <p:nvPr/>
+        </p:nvSpPr>
+        <p:spPr>
+          <a:xfrm>
+            <a:off x="4078224" y="4178808"/>
+            <a:ext cx="4480560" cy="219456"/>
+          </a:xfrm>
+          <a:prstGeom prst="rect">
+            <a:avLst/>
+          </a:prstGeom>
+          <a:noFill/>
+          <a:ln/>
+        </p:spPr>
+        <p:txBody>
+          <a:bodyPr wrap="square" lIns="0" tIns="0" rIns="0" bIns="0" rtlCol="0" anchor="ctr"/>
+          <a:lstStyle/>
+          <a:p>
+            <a:pPr marL="0" indent="0">
+              <a:buNone/>
+            </a:pPr>
+            <a:r>
+              <a:rPr lang="en-US" sz="1100" b="1" dirty="0">
+                <a:solidFill>
+                  <a:srgbClr val="2C3E50"/>
+                </a:solidFill>
+                <a:latin typeface="Arial" pitchFamily="34" charset="0"/>
+                <a:ea typeface="Arial" pitchFamily="34" charset="-122"/>
+                <a:cs typeface="Arial" pitchFamily="34" charset="-120"/>
+              </a:rPr>
+              <a:t>Smarter recommendations</a:t>
+            </a:r>
+            <a:endParaRPr lang="en-US" sz="1100" dirty="0"/>
+          </a:p>
+        </p:txBody>
+      </p:sp>
+      <p:sp>
+        <p:nvSpPr>
+          <p:cNvPr id="37" name="Text 35"/>
+          <p:cNvSpPr/>
+          <p:nvPr/>
+        </p:nvSpPr>
+        <p:spPr>
+          <a:xfrm>
+            <a:off x="4078224" y="4416552"/>
+            <a:ext cx="4480560" cy="237744"/>
+          </a:xfrm>
+          <a:prstGeom prst="rect">
+            <a:avLst/>
+          </a:prstGeom>
+          <a:noFill/>
+          <a:ln/>
+        </p:spPr>
+        <p:txBody>
+          <a:bodyPr wrap="square" lIns="0" tIns="0" rIns="0" bIns="0" rtlCol="0" anchor="ctr"/>
+          <a:lstStyle/>
+          <a:p>
+            <a:pPr marL="0" indent="0">
+              <a:buNone/>
+            </a:pPr>
+            <a:r>
+              <a:rPr lang="en-US" sz="1000" dirty="0">
+                <a:solidFill>
+                  <a:srgbClr val="6B7C8D"/>
+                </a:solidFill>
+                <a:latin typeface="Arial" pitchFamily="34" charset="0"/>
+                <a:ea typeface="Arial" pitchFamily="34" charset="-122"/>
+                <a:cs typeface="Arial" pitchFamily="34" charset="-120"/>
+              </a:rPr>
+              <a:t>Explore more personalised approaches beyond rule-based filtering.</a:t>
+            </a:r>
+            <a:endParaRPr lang="en-US" sz="1000" dirty="0"/>
+          </a:p>
+        </p:txBody>
+      </p:sp>
+      <p:sp>
+        <p:nvSpPr>
+          <p:cNvPr id="38" name="Text 36"/>
+          <p:cNvSpPr/>
+          <p:nvPr/>
+        </p:nvSpPr>
+        <p:spPr>
+          <a:xfrm>
+            <a:off x="457200" y="4846320"/>
+            <a:ext cx="1828800" cy="182880"/>
+          </a:xfrm>
+          <a:prstGeom prst="rect">
+            <a:avLst/>
+          </a:prstGeom>
+          <a:noFill/>
+          <a:ln/>
+        </p:spPr>
+        <p:txBody>
+          <a:bodyPr wrap="square" lIns="0" tIns="0" rIns="0" bIns="0" rtlCol="0" anchor="ctr"/>
+          <a:lstStyle/>
+          <a:p>
+            <a:pPr marL="0" indent="0">
+              <a:buNone/>
+            </a:pPr>
+            <a:r>
+              <a:rPr lang="en-US" sz="900" dirty="0">
+                <a:solidFill>
+                  <a:srgbClr val="B0BEC5"/>
+                </a:solidFill>
+                <a:latin typeface="Arial" pitchFamily="34" charset="0"/>
+                <a:ea typeface="Arial" pitchFamily="34" charset="-122"/>
+                <a:cs typeface="Arial" pitchFamily="34" charset="-120"/>
+              </a:rPr>
+              <a:t>Viewpoint Insights</a:t>
+            </a:r>
+            <a:endParaRPr lang="en-US" sz="900" dirty="0"/>
+          </a:p>
+        </p:txBody>
+      </p:sp>
+      <p:sp>
+        <p:nvSpPr>
+          <p:cNvPr id="39" name="Text 37"/>
+          <p:cNvSpPr/>
+          <p:nvPr/>
+        </p:nvSpPr>
+        <p:spPr>
+          <a:xfrm>
+            <a:off x="8503920" y="4846320"/>
+            <a:ext cx="548640" cy="182880"/>
+          </a:xfrm>
+          <a:prstGeom prst="rect">
+            <a:avLst/>
+          </a:prstGeom>
+          <a:noFill/>
+          <a:ln/>
+        </p:spPr>
+        <p:txBody>
+          <a:bodyPr wrap="square" lIns="0" tIns="0" rIns="0" bIns="0" rtlCol="0" anchor="ctr"/>
+          <a:lstStyle/>
+          <a:p>
+            <a:pPr marL="0" indent="0" algn="r">
+              <a:buNone/>
+            </a:pPr>
+            <a:r>
+              <a:rPr lang="en-US" sz="900" dirty="0">
+                <a:solidFill>
+                  <a:srgbClr val="B0BEC5"/>
+                </a:solidFill>
+                <a:latin typeface="Arial" pitchFamily="34" charset="0"/>
+                <a:ea typeface="Arial" pitchFamily="34" charset="-122"/>
+                <a:cs typeface="Arial" pitchFamily="34" charset="-120"/>
+              </a:rPr>
+              <a:t>8 / 9</a:t>
+            </a:r>
+            <a:endParaRPr lang="en-US" sz="900" dirty="0"/>
+          </a:p>
+        </p:txBody>
+      </p:sp>
+    </p:spTree>
+  </p:cSld>
+  <p:clrMapOvr>
+    <a:masterClrMapping/>
+  </p:clrMapOvr>
+</p:sld>
+</file>
+
+<file path=ppt/slides/slide9.xml><?xml version="1.0" encoding="utf-8"?>
+<p:sld xmlns:a="http://schemas.openxmlformats.org/drawingml/2006/main" xmlns:r="http://schemas.openxmlformats.org/officeDocument/2006/relationships" xmlns:p="http://schemas.openxmlformats.org/presentationml/2006/main">
+  <p:cSld name="Slide 9">
+    <p:bg>
+      <p:bgPr>
+        <a:solidFill>
+          <a:srgbClr val="0D7EA8"/>
+        </a:solidFill>
+        <a:effectLst/>
+      </p:bgPr>
+    </p:bg>
+    <p:spTree>
+      <p:nvGrpSpPr>
+        <p:cNvPr id="1" name=""/>
+        <p:cNvGrpSpPr/>
+        <p:nvPr/>
+      </p:nvGrpSpPr>
+      <p:grpSpPr>
+        <a:xfrm>
+          <a:off x="0" y="0"/>
+          <a:ext cx="0" cy="0"/>
+          <a:chOff x="0" y="0"/>
+          <a:chExt cx="0" cy="0"/>
+        </a:xfrm>
+      </p:grpSpPr>
+      <p:sp>
+        <p:nvSpPr>
+          <p:cNvPr id="2" name="Shape 0"/>
+          <p:cNvSpPr/>
+          <p:nvPr/>
+        </p:nvSpPr>
+        <p:spPr>
+          <a:xfrm>
+            <a:off x="0" y="0"/>
+            <a:ext cx="164592" cy="5143500"/>
+          </a:xfrm>
+          <a:prstGeom prst="rect">
+            <a:avLst/>
+          </a:prstGeom>
+          <a:solidFill>
+            <a:srgbClr val="F4A324"/>
+          </a:solidFill>
+          <a:ln w="12700">
+            <a:solidFill>
+              <a:srgbClr val="F4A324"/>
+            </a:solidFill>
+            <a:prstDash val="solid"/>
+          </a:ln>
+        </p:spPr>
+      </p:sp>
+      <p:sp>
+        <p:nvSpPr>
+          <p:cNvPr id="3" name="Text 1"/>
+          <p:cNvSpPr/>
+          <p:nvPr/>
+        </p:nvSpPr>
+        <p:spPr>
+          <a:xfrm>
+            <a:off x="457200" y="1371600"/>
+            <a:ext cx="8229600" cy="1005840"/>
+          </a:xfrm>
+          <a:prstGeom prst="rect">
+            <a:avLst/>
+          </a:prstGeom>
+          <a:noFill/>
+          <a:ln/>
+        </p:spPr>
+        <p:txBody>
+          <a:bodyPr wrap="square" lIns="0" tIns="0" rIns="0" bIns="0" rtlCol="0" anchor="ctr"/>
+          <a:lstStyle/>
+          <a:p>
+            <a:pPr marL="0" indent="0">
+              <a:buNone/>
+            </a:pPr>
+            <a:r>
+              <a:rPr lang="en-US" sz="5200" b="1" dirty="0">
+                <a:solidFill>
+                  <a:srgbClr val="FFFFFF"/>
+                </a:solidFill>
+                <a:latin typeface="Arial" pitchFamily="34" charset="0"/>
+                <a:ea typeface="Arial" pitchFamily="34" charset="-122"/>
+                <a:cs typeface="Arial" pitchFamily="34" charset="-120"/>
+              </a:rPr>
+              <a:t>Thank You</a:t>
+            </a:r>
+            <a:endParaRPr lang="en-US" sz="5200" dirty="0"/>
+          </a:p>
+        </p:txBody>
+      </p:sp>
+      <p:sp>
+        <p:nvSpPr>
+          <p:cNvPr id="4" name="Text 2"/>
+          <p:cNvSpPr/>
+          <p:nvPr/>
+        </p:nvSpPr>
+        <p:spPr>
+          <a:xfrm>
+            <a:off x="457200" y="2423160"/>
+            <a:ext cx="7315200" cy="548640"/>
+          </a:xfrm>
+          <a:prstGeom prst="rect">
+            <a:avLst/>
+          </a:prstGeom>
+          <a:noFill/>
+          <a:ln/>
+        </p:spPr>
+        <p:txBody>
+          <a:bodyPr wrap="square" lIns="0" tIns="0" rIns="0" bIns="0" rtlCol="0" anchor="ctr"/>
+          <a:lstStyle/>
+          <a:p>
+            <a:pPr marL="0" indent="0">
+              <a:buNone/>
+            </a:pPr>
+            <a:r>
+              <a:rPr lang="en-US" sz="2200" i="1" dirty="0">
+                <a:solidFill>
+                  <a:srgbClr val="D6EEF7"/>
+                </a:solidFill>
+                <a:latin typeface="Arial" pitchFamily="34" charset="0"/>
+                <a:ea typeface="Arial" pitchFamily="34" charset="-122"/>
+                <a:cs typeface="Arial" pitchFamily="34" charset="-120"/>
+              </a:rPr>
+              <a:t>Brazil is back — and the data proves it.</a:t>
+            </a:r>
+            <a:endParaRPr lang="en-US" sz="2200" dirty="0"/>
+          </a:p>
+        </p:txBody>
+      </p:sp>
+      <p:sp>
+        <p:nvSpPr>
+          <p:cNvPr id="5" name="Shape 3"/>
+          <p:cNvSpPr/>
+          <p:nvPr/>
+        </p:nvSpPr>
+        <p:spPr>
+          <a:xfrm>
+            <a:off x="457200" y="3063240"/>
+            <a:ext cx="3200400" cy="36576"/>
+          </a:xfrm>
+          <a:prstGeom prst="rect">
+            <a:avLst/>
+          </a:prstGeom>
+          <a:solidFill>
+            <a:srgbClr val="F4A324"/>
+          </a:solidFill>
+          <a:ln w="12700">
+            <a:solidFill>
+              <a:srgbClr val="F4A324"/>
+            </a:solidFill>
+            <a:prstDash val="solid"/>
+          </a:ln>
+        </p:spPr>
+      </p:sp>
+      <p:sp>
+        <p:nvSpPr>
           <p:cNvPr id="6" name="Text 4"/>
           <p:cNvSpPr/>
           <p:nvPr/>
@@ -6234,7 +7406,7 @@
           <a:bodyPr wrap="square" lIns="0" tIns="0" rIns="0" bIns="0" rtlCol="0" anchor="ctr"/>
           <a:lstStyle/>
           <a:p>
-            <a:pPr indent="0" marL="0">
+            <a:pPr marL="0" indent="0">
               <a:buNone/>
             </a:pPr>
             <a:r>
@@ -6251,7 +7423,7 @@
             <a:endParaRPr lang="en-US" sz="1300" dirty="0"/>
           </a:p>
           <a:p>
-            <a:pPr indent="0" marL="0">
+            <a:pPr marL="0" indent="0">
               <a:buNone/>
             </a:pPr>
             <a:r>
@@ -6271,17 +7443,17 @@
       </p:sp>
       <p:pic>
         <p:nvPicPr>
-          <p:cNvPr id="7" name="Image 0" descr="preencoded.png">    </p:cNvPr>
+          <p:cNvPr id="7" name="Image 0" descr="preencoded.png"/>
           <p:cNvPicPr>
             <a:picLocks noChangeAspect="1"/>
           </p:cNvPicPr>
           <p:nvPr/>
         </p:nvPicPr>
         <p:blipFill>
-          <a:blip r:embed="rId1">
+          <a:blip>
             <a:extLst>
               <a:ext uri="{96DAC541-7B7A-43D3-8B79-37D633B846F1}">
-                <asvg:svgBlip xmlns:asvg="http://schemas.microsoft.com/office/drawing/2016/SVG/main" r:embed="rId2"/>
+                <asvg:svgBlip xmlns:asvg="http://schemas.microsoft.com/office/drawing/2016/SVG/main" r:embed="rId3"/>
               </a:ext>
             </a:extLst>
           </a:blip>
@@ -6320,7 +7492,7 @@
           <a:bodyPr wrap="square" lIns="0" tIns="0" rIns="0" bIns="0" rtlCol="0" anchor="ctr"/>
           <a:lstStyle/>
           <a:p>
-            <a:pPr algn="r" indent="0" marL="0">
+            <a:pPr marL="0" indent="0" algn="r">
               <a:buNone/>
             </a:pPr>
             <a:r>
@@ -6332,7 +7504,7 @@
                 <a:ea typeface="Arial" pitchFamily="34" charset="-122"/>
                 <a:cs typeface="Arial" pitchFamily="34" charset="-120"/>
               </a:rPr>
-              <a:t>8 / 8</a:t>
+              <a:t>9 / 9</a:t>
             </a:r>
             <a:endParaRPr lang="en-US" sz="900" dirty="0"/>
           </a:p>
@@ -6639,4 +7811,299 @@
     </a:ext>
   </a:extLst>
 </a:theme>
+</file>
+
+<file path=ppt/theme/theme2.xml><?xml version="1.0" encoding="utf-8"?>
+<a:theme xmlns:a="http://schemas.openxmlformats.org/drawingml/2006/main" name="Tema do Office">
+  <a:themeElements>
+    <a:clrScheme name="Office">
+      <a:dk1>
+        <a:sysClr val="windowText" lastClr="000000"/>
+      </a:dk1>
+      <a:lt1>
+        <a:sysClr val="window" lastClr="FFFFFF"/>
+      </a:lt1>
+      <a:dk2>
+        <a:srgbClr val="44546A"/>
+      </a:dk2>
+      <a:lt2>
+        <a:srgbClr val="E7E6E6"/>
+      </a:lt2>
+      <a:accent1>
+        <a:srgbClr val="4472C4"/>
+      </a:accent1>
+      <a:accent2>
+        <a:srgbClr val="ED7D31"/>
+      </a:accent2>
+      <a:accent3>
+        <a:srgbClr val="A5A5A5"/>
+      </a:accent3>
+      <a:accent4>
+        <a:srgbClr val="FFC000"/>
+      </a:accent4>
+      <a:accent5>
+        <a:srgbClr val="5B9BD5"/>
+      </a:accent5>
+      <a:accent6>
+        <a:srgbClr val="70AD47"/>
+      </a:accent6>
+      <a:hlink>
+        <a:srgbClr val="0563C1"/>
+      </a:hlink>
+      <a:folHlink>
+        <a:srgbClr val="954F72"/>
+      </a:folHlink>
+    </a:clrScheme>
+    <a:fontScheme name="Office">
+      <a:majorFont>
+        <a:latin typeface="Calibri Light" panose="020F0302020204030204"/>
+        <a:ea typeface=""/>
+        <a:cs typeface=""/>
+        <a:font script="Jpan" typeface="游ゴシック Light"/>
+        <a:font script="Hang" typeface="맑은 고딕"/>
+        <a:font script="Hans" typeface="等线 Light"/>
+        <a:font script="Hant" typeface="新細明體"/>
+        <a:font script="Arab" typeface="Times New Roman"/>
+        <a:font script="Hebr" typeface="Times New Roman"/>
+        <a:font script="Thai" typeface="Angsana New"/>
+        <a:font script="Ethi" typeface="Nyala"/>
+        <a:font script="Beng" typeface="Vrinda"/>
+        <a:font script="Gujr" typeface="Shruti"/>
+        <a:font script="Khmr" typeface="MoolBoran"/>
+        <a:font script="Knda" typeface="Tunga"/>
+        <a:font script="Guru" typeface="Raavi"/>
+        <a:font script="Cans" typeface="Euphemia"/>
+        <a:font script="Cher" typeface="Plantagenet Cherokee"/>
+        <a:font script="Yiii" typeface="Microsoft Yi Baiti"/>
+        <a:font script="Tibt" typeface="Microsoft Himalaya"/>
+        <a:font script="Thaa" typeface="MV Boli"/>
+        <a:font script="Deva" typeface="Mangal"/>
+        <a:font script="Telu" typeface="Gautami"/>
+        <a:font script="Taml" typeface="Latha"/>
+        <a:font script="Syrc" typeface="Estrangelo Edessa"/>
+        <a:font script="Orya" typeface="Kalinga"/>
+        <a:font script="Mlym" typeface="Kartika"/>
+        <a:font script="Laoo" typeface="DokChampa"/>
+        <a:font script="Sinh" typeface="Iskoola Pota"/>
+        <a:font script="Mong" typeface="Mongolian Baiti"/>
+        <a:font script="Viet" typeface="Times New Roman"/>
+        <a:font script="Uigh" typeface="Microsoft Uighur"/>
+        <a:font script="Geor" typeface="Sylfaen"/>
+        <a:font script="Armn" typeface="Arial"/>
+        <a:font script="Bugi" typeface="Leelawadee UI"/>
+        <a:font script="Bopo" typeface="Microsoft JhengHei"/>
+        <a:font script="Java" typeface="Javanese Text"/>
+        <a:font script="Lisu" typeface="Segoe UI"/>
+        <a:font script="Mymr" typeface="Myanmar Text"/>
+        <a:font script="Nkoo" typeface="Ebrima"/>
+        <a:font script="Olck" typeface="Nirmala UI"/>
+        <a:font script="Osma" typeface="Ebrima"/>
+        <a:font script="Phag" typeface="Phagspa"/>
+        <a:font script="Syrn" typeface="Estrangelo Edessa"/>
+        <a:font script="Syrj" typeface="Estrangelo Edessa"/>
+        <a:font script="Syre" typeface="Estrangelo Edessa"/>
+        <a:font script="Sora" typeface="Nirmala UI"/>
+        <a:font script="Tale" typeface="Microsoft Tai Le"/>
+        <a:font script="Talu" typeface="Microsoft New Tai Lue"/>
+        <a:font script="Tfng" typeface="Ebrima"/>
+      </a:majorFont>
+      <a:minorFont>
+        <a:latin typeface="Calibri" panose="020F0502020204030204"/>
+        <a:ea typeface=""/>
+        <a:cs typeface=""/>
+        <a:font script="Jpan" typeface="游ゴシック"/>
+        <a:font script="Hang" typeface="맑은 고딕"/>
+        <a:font script="Hans" typeface="等线"/>
+        <a:font script="Hant" typeface="新細明體"/>
+        <a:font script="Arab" typeface="Arial"/>
+        <a:font script="Hebr" typeface="Arial"/>
+        <a:font script="Thai" typeface="Cordia New"/>
+        <a:font script="Ethi" typeface="Nyala"/>
+        <a:font script="Beng" typeface="Vrinda"/>
+        <a:font script="Gujr" typeface="Shruti"/>
+        <a:font script="Khmr" typeface="DaunPenh"/>
+        <a:font script="Knda" typeface="Tunga"/>
+        <a:font script="Guru" typeface="Raavi"/>
+        <a:font script="Cans" typeface="Euphemia"/>
+        <a:font script="Cher" typeface="Plantagenet Cherokee"/>
+        <a:font script="Yiii" typeface="Microsoft Yi Baiti"/>
+        <a:font script="Tibt" typeface="Microsoft Himalaya"/>
+        <a:font script="Thaa" typeface="MV Boli"/>
+        <a:font script="Deva" typeface="Mangal"/>
+        <a:font script="Telu" typeface="Gautami"/>
+        <a:font script="Taml" typeface="Latha"/>
+        <a:font script="Syrc" typeface="Estrangelo Edessa"/>
+        <a:font script="Orya" typeface="Kalinga"/>
+        <a:font script="Mlym" typeface="Kartika"/>
+        <a:font script="Laoo" typeface="DokChampa"/>
+        <a:font script="Sinh" typeface="Iskoola Pota"/>
+        <a:font script="Mong" typeface="Mongolian Baiti"/>
+        <a:font script="Viet" typeface="Arial"/>
+        <a:font script="Uigh" typeface="Microsoft Uighur"/>
+        <a:font script="Geor" typeface="Sylfaen"/>
+        <a:font script="Armn" typeface="Arial"/>
+        <a:font script="Bugi" typeface="Leelawadee UI"/>
+        <a:font script="Bopo" typeface="Microsoft JhengHei"/>
+        <a:font script="Java" typeface="Javanese Text"/>
+        <a:font script="Lisu" typeface="Segoe UI"/>
+        <a:font script="Mymr" typeface="Myanmar Text"/>
+        <a:font script="Nkoo" typeface="Ebrima"/>
+        <a:font script="Olck" typeface="Nirmala UI"/>
+        <a:font script="Osma" typeface="Ebrima"/>
+        <a:font script="Phag" typeface="Phagspa"/>
+        <a:font script="Syrn" typeface="Estrangelo Edessa"/>
+        <a:font script="Syrj" typeface="Estrangelo Edessa"/>
+        <a:font script="Syre" typeface="Estrangelo Edessa"/>
+        <a:font script="Sora" typeface="Nirmala UI"/>
+        <a:font script="Tale" typeface="Microsoft Tai Le"/>
+        <a:font script="Talu" typeface="Microsoft New Tai Lue"/>
+        <a:font script="Tfng" typeface="Ebrima"/>
+      </a:minorFont>
+    </a:fontScheme>
+    <a:fmtScheme name="Office">
+      <a:fillStyleLst>
+        <a:solidFill>
+          <a:schemeClr val="phClr"/>
+        </a:solidFill>
+        <a:gradFill rotWithShape="1">
+          <a:gsLst>
+            <a:gs pos="0">
+              <a:schemeClr val="phClr">
+                <a:lumMod val="110000"/>
+                <a:satMod val="105000"/>
+                <a:tint val="67000"/>
+              </a:schemeClr>
+            </a:gs>
+            <a:gs pos="50000">
+              <a:schemeClr val="phClr">
+                <a:lumMod val="105000"/>
+                <a:satMod val="103000"/>
+                <a:tint val="73000"/>
+              </a:schemeClr>
+            </a:gs>
+            <a:gs pos="100000">
+              <a:schemeClr val="phClr">
+                <a:lumMod val="105000"/>
+                <a:satMod val="109000"/>
+                <a:tint val="81000"/>
+              </a:schemeClr>
+            </a:gs>
+          </a:gsLst>
+          <a:lin ang="5400000" scaled="0"/>
+        </a:gradFill>
+        <a:gradFill rotWithShape="1">
+          <a:gsLst>
+            <a:gs pos="0">
+              <a:schemeClr val="phClr">
+                <a:satMod val="103000"/>
+                <a:lumMod val="102000"/>
+                <a:tint val="94000"/>
+              </a:schemeClr>
+            </a:gs>
+            <a:gs pos="50000">
+              <a:schemeClr val="phClr">
+                <a:satMod val="110000"/>
+                <a:lumMod val="100000"/>
+                <a:shade val="100000"/>
+              </a:schemeClr>
+            </a:gs>
+            <a:gs pos="100000">
+              <a:schemeClr val="phClr">
+                <a:lumMod val="99000"/>
+                <a:satMod val="120000"/>
+                <a:shade val="78000"/>
+              </a:schemeClr>
+            </a:gs>
+          </a:gsLst>
+          <a:lin ang="5400000" scaled="0"/>
+        </a:gradFill>
+      </a:fillStyleLst>
+      <a:lnStyleLst>
+        <a:ln w="6350" cap="flat" cmpd="sng" algn="ctr">
+          <a:solidFill>
+            <a:schemeClr val="phClr"/>
+          </a:solidFill>
+          <a:prstDash val="solid"/>
+          <a:miter lim="800000"/>
+        </a:ln>
+        <a:ln w="12700" cap="flat" cmpd="sng" algn="ctr">
+          <a:solidFill>
+            <a:schemeClr val="phClr"/>
+          </a:solidFill>
+          <a:prstDash val="solid"/>
+          <a:miter lim="800000"/>
+        </a:ln>
+        <a:ln w="19050" cap="flat" cmpd="sng" algn="ctr">
+          <a:solidFill>
+            <a:schemeClr val="phClr"/>
+          </a:solidFill>
+          <a:prstDash val="solid"/>
+          <a:miter lim="800000"/>
+        </a:ln>
+      </a:lnStyleLst>
+      <a:effectStyleLst>
+        <a:effectStyle>
+          <a:effectLst/>
+        </a:effectStyle>
+        <a:effectStyle>
+          <a:effectLst/>
+        </a:effectStyle>
+        <a:effectStyle>
+          <a:effectLst>
+            <a:outerShdw blurRad="57150" dist="19050" dir="5400000" algn="ctr" rotWithShape="0">
+              <a:srgbClr val="000000">
+                <a:alpha val="63000"/>
+              </a:srgbClr>
+            </a:outerShdw>
+          </a:effectLst>
+        </a:effectStyle>
+      </a:effectStyleLst>
+      <a:bgFillStyleLst>
+        <a:solidFill>
+          <a:schemeClr val="phClr"/>
+        </a:solidFill>
+        <a:solidFill>
+          <a:schemeClr val="phClr">
+            <a:tint val="95000"/>
+            <a:satMod val="170000"/>
+          </a:schemeClr>
+        </a:solidFill>
+        <a:gradFill rotWithShape="1">
+          <a:gsLst>
+            <a:gs pos="0">
+              <a:schemeClr val="phClr">
+                <a:tint val="93000"/>
+                <a:satMod val="150000"/>
+                <a:shade val="98000"/>
+                <a:lumMod val="102000"/>
+              </a:schemeClr>
+            </a:gs>
+            <a:gs pos="50000">
+              <a:schemeClr val="phClr">
+                <a:tint val="98000"/>
+                <a:satMod val="130000"/>
+                <a:shade val="90000"/>
+                <a:lumMod val="103000"/>
+              </a:schemeClr>
+            </a:gs>
+            <a:gs pos="100000">
+              <a:schemeClr val="phClr">
+                <a:shade val="63000"/>
+                <a:satMod val="120000"/>
+              </a:schemeClr>
+            </a:gs>
+          </a:gsLst>
+          <a:lin ang="5400000" scaled="0"/>
+        </a:gradFill>
+      </a:bgFillStyleLst>
+    </a:fmtScheme>
+  </a:themeElements>
+  <a:objectDefaults/>
+  <a:extraClrSchemeLst/>
+  <a:extLst>
+    <a:ext uri="{05A4C25C-085E-4340-85A3-A5531E510DB2}">
+      <thm15:themeFamily xmlns:thm15="http://schemas.microsoft.com/office/thememl/2012/main" name="Office Theme" id="{62F939B6-93AF-4DB8-9C6B-D6C7DFDC589F}" vid="{4A3C46E8-61CC-4603-A589-7422A47A8E4A}"/>
+    </a:ext>
+  </a:extLst>
+</a:theme>
 </file>
--- a/brazils_road_back_presentation.pptx
+++ b/brazils_road_back_presentation.pptx
@@ -5784,7 +5784,9 @@
       </p:sp>
       <p:sp>
         <p:nvSpPr>
-          <p:cNvPr id="31" name="Text 29"/>
+          <p:cNvPr id="31" name="Text 29">
+            <a:hlinkClick r:id="rId3"/>
+          </p:cNvPr>
           <p:cNvSpPr/>
           <p:nvPr/>
         </p:nvSpPr>
@@ -5803,7 +5805,7 @@
           <a:bodyPr wrap="square" lIns="0" tIns="0" rIns="0" bIns="0" rtlCol="0" anchor="ctr"/>
           <a:lstStyle/>
           <a:p>
-            <a:pPr marL="0" indent="0">
+            <a:pPr marL="0" indent="0" algn="ctr">
               <a:buNone/>
             </a:pPr>
             <a:r>
@@ -5815,7 +5817,7 @@
                 <a:ea typeface="Arial" pitchFamily="34" charset="-122"/>
                 <a:cs typeface="Arial" pitchFamily="34" charset="-120"/>
               </a:rPr>
-              <a:t>Live Demo  →  [Streamlit app link — to be added before presentation]</a:t>
+              <a:t>Live Demo</a:t>
             </a:r>
             <a:endParaRPr lang="en-US" sz="1200" dirty="0"/>
           </a:p>

--- a/brazils_road_back_presentation.pptx
+++ b/brazils_road_back_presentation.pptx
@@ -5,18 +5,19 @@
     <p:sldMasterId id="2147483648" r:id="rId1"/>
   </p:sldMasterIdLst>
   <p:notesMasterIdLst>
-    <p:notesMasterId r:id="rId11"/>
+    <p:notesMasterId r:id="rId12"/>
   </p:notesMasterIdLst>
   <p:sldIdLst>
     <p:sldId id="256" r:id="rId2"/>
     <p:sldId id="257" r:id="rId3"/>
     <p:sldId id="258" r:id="rId4"/>
     <p:sldId id="259" r:id="rId5"/>
-    <p:sldId id="260" r:id="rId6"/>
-    <p:sldId id="261" r:id="rId7"/>
-    <p:sldId id="262" r:id="rId8"/>
-    <p:sldId id="263" r:id="rId9"/>
-    <p:sldId id="264" r:id="rId10"/>
+    <p:sldId id="265" r:id="rId6"/>
+    <p:sldId id="260" r:id="rId7"/>
+    <p:sldId id="261" r:id="rId8"/>
+    <p:sldId id="262" r:id="rId9"/>
+    <p:sldId id="263" r:id="rId10"/>
+    <p:sldId id="264" r:id="rId11"/>
   </p:sldIdLst>
   <p:sldSz cx="9144000" cy="5143500" type="screen16x9"/>
   <p:notesSz cx="5143500" cy="9144000"/>
@@ -329,6 +330,90 @@
 </p:notes>
 </file>
 
+<file path=ppt/notesSlides/notesSlide10.xml><?xml version="1.0" encoding="utf-8"?>
+<p:notes xmlns:a="http://schemas.openxmlformats.org/drawingml/2006/main" xmlns:r="http://schemas.openxmlformats.org/officeDocument/2006/relationships" xmlns:p="http://schemas.openxmlformats.org/presentationml/2006/main">
+  <p:cSld>
+    <p:spTree>
+      <p:nvGrpSpPr>
+        <p:cNvPr id="1" name=""/>
+        <p:cNvGrpSpPr/>
+        <p:nvPr/>
+      </p:nvGrpSpPr>
+      <p:grpSpPr>
+        <a:xfrm>
+          <a:off x="0" y="0"/>
+          <a:ext cx="0" cy="0"/>
+          <a:chOff x="0" y="0"/>
+          <a:chExt cx="0" cy="0"/>
+        </a:xfrm>
+      </p:grpSpPr>
+      <p:sp>
+        <p:nvSpPr>
+          <p:cNvPr id="2" name="Slide Image Placeholder 1"/>
+          <p:cNvSpPr>
+            <a:spLocks noGrp="1" noRot="1" noChangeAspect="1"/>
+          </p:cNvSpPr>
+          <p:nvPr>
+            <p:ph type="sldImg"/>
+          </p:nvPr>
+        </p:nvSpPr>
+        <p:spPr/>
+      </p:sp>
+      <p:sp>
+        <p:nvSpPr>
+          <p:cNvPr id="3" name="Notes Placeholder 2"/>
+          <p:cNvSpPr>
+            <a:spLocks noGrp="1"/>
+          </p:cNvSpPr>
+          <p:nvPr>
+            <p:ph type="body" idx="1"/>
+          </p:nvPr>
+        </p:nvSpPr>
+        <p:spPr/>
+        <p:txBody>
+          <a:bodyPr/>
+          <a:lstStyle/>
+          <a:p>
+            <a:endParaRPr lang="en-US" dirty="0"/>
+          </a:p>
+        </p:txBody>
+      </p:sp>
+      <p:sp>
+        <p:nvSpPr>
+          <p:cNvPr id="4" name="Slide Number Placeholder 3"/>
+          <p:cNvSpPr>
+            <a:spLocks noGrp="1"/>
+          </p:cNvSpPr>
+          <p:nvPr>
+            <p:ph type="sldNum" sz="quarter" idx="10"/>
+          </p:nvPr>
+        </p:nvSpPr>
+        <p:spPr/>
+        <p:txBody>
+          <a:bodyPr/>
+          <a:lstStyle/>
+          <a:p>
+            <a:fld id="{F7021451-1387-4CA6-816F-3879F97B5CBC}" type="slidenum">
+              <a:rPr lang="en-US"/>
+              <a:t>10</a:t>
+            </a:fld>
+            <a:endParaRPr lang="en-US"/>
+          </a:p>
+        </p:txBody>
+      </p:sp>
+    </p:spTree>
+    <p:extLst>
+      <p:ext uri="{BB962C8B-B14F-4D97-AF65-F5344CB8AC3E}">
+        <p14:creationId xmlns:p14="http://schemas.microsoft.com/office/powerpoint/2010/main" val="1024086991"/>
+      </p:ext>
+    </p:extLst>
+  </p:cSld>
+  <p:clrMapOvr>
+    <a:masterClrMapping/>
+  </p:clrMapOvr>
+</p:notes>
+</file>
+
 <file path=ppt/notesSlides/notesSlide2.xml><?xml version="1.0" encoding="utf-8"?>
 <p:notes xmlns:a="http://schemas.openxmlformats.org/drawingml/2006/main" xmlns:r="http://schemas.openxmlformats.org/officeDocument/2006/relationships" xmlns:p="http://schemas.openxmlformats.org/presentationml/2006/main">
   <p:cSld>
@@ -1560,6 +1645,292 @@
 </p:sld>
 </file>
 
+<file path=ppt/slides/slide10.xml><?xml version="1.0" encoding="utf-8"?>
+<p:sld xmlns:a="http://schemas.openxmlformats.org/drawingml/2006/main" xmlns:r="http://schemas.openxmlformats.org/officeDocument/2006/relationships" xmlns:p="http://schemas.openxmlformats.org/presentationml/2006/main">
+  <p:cSld name="Slide 9">
+    <p:bg>
+      <p:bgPr>
+        <a:solidFill>
+          <a:srgbClr val="0D7EA8"/>
+        </a:solidFill>
+        <a:effectLst/>
+      </p:bgPr>
+    </p:bg>
+    <p:spTree>
+      <p:nvGrpSpPr>
+        <p:cNvPr id="1" name=""/>
+        <p:cNvGrpSpPr/>
+        <p:nvPr/>
+      </p:nvGrpSpPr>
+      <p:grpSpPr>
+        <a:xfrm>
+          <a:off x="0" y="0"/>
+          <a:ext cx="0" cy="0"/>
+          <a:chOff x="0" y="0"/>
+          <a:chExt cx="0" cy="0"/>
+        </a:xfrm>
+      </p:grpSpPr>
+      <p:sp>
+        <p:nvSpPr>
+          <p:cNvPr id="2" name="Shape 0"/>
+          <p:cNvSpPr/>
+          <p:nvPr/>
+        </p:nvSpPr>
+        <p:spPr>
+          <a:xfrm>
+            <a:off x="0" y="0"/>
+            <a:ext cx="164592" cy="5143500"/>
+          </a:xfrm>
+          <a:prstGeom prst="rect">
+            <a:avLst/>
+          </a:prstGeom>
+          <a:solidFill>
+            <a:srgbClr val="F4A324"/>
+          </a:solidFill>
+          <a:ln w="12700">
+            <a:solidFill>
+              <a:srgbClr val="F4A324"/>
+            </a:solidFill>
+            <a:prstDash val="solid"/>
+          </a:ln>
+        </p:spPr>
+      </p:sp>
+      <p:sp>
+        <p:nvSpPr>
+          <p:cNvPr id="3" name="Text 1"/>
+          <p:cNvSpPr/>
+          <p:nvPr/>
+        </p:nvSpPr>
+        <p:spPr>
+          <a:xfrm>
+            <a:off x="457200" y="1371600"/>
+            <a:ext cx="8229600" cy="1005840"/>
+          </a:xfrm>
+          <a:prstGeom prst="rect">
+            <a:avLst/>
+          </a:prstGeom>
+          <a:noFill/>
+          <a:ln/>
+        </p:spPr>
+        <p:txBody>
+          <a:bodyPr wrap="square" lIns="0" tIns="0" rIns="0" bIns="0" rtlCol="0" anchor="ctr"/>
+          <a:lstStyle/>
+          <a:p>
+            <a:pPr marL="0" indent="0">
+              <a:buNone/>
+            </a:pPr>
+            <a:r>
+              <a:rPr lang="en-US" sz="5200" b="1" dirty="0">
+                <a:solidFill>
+                  <a:srgbClr val="FFFFFF"/>
+                </a:solidFill>
+                <a:latin typeface="Arial" pitchFamily="34" charset="0"/>
+                <a:ea typeface="Arial" pitchFamily="34" charset="-122"/>
+                <a:cs typeface="Arial" pitchFamily="34" charset="-120"/>
+              </a:rPr>
+              <a:t>Thank You</a:t>
+            </a:r>
+            <a:endParaRPr lang="en-US" sz="5200" dirty="0"/>
+          </a:p>
+        </p:txBody>
+      </p:sp>
+      <p:sp>
+        <p:nvSpPr>
+          <p:cNvPr id="4" name="Text 2"/>
+          <p:cNvSpPr/>
+          <p:nvPr/>
+        </p:nvSpPr>
+        <p:spPr>
+          <a:xfrm>
+            <a:off x="457200" y="2423160"/>
+            <a:ext cx="7315200" cy="548640"/>
+          </a:xfrm>
+          <a:prstGeom prst="rect">
+            <a:avLst/>
+          </a:prstGeom>
+          <a:noFill/>
+          <a:ln/>
+        </p:spPr>
+        <p:txBody>
+          <a:bodyPr wrap="square" lIns="0" tIns="0" rIns="0" bIns="0" rtlCol="0" anchor="ctr"/>
+          <a:lstStyle/>
+          <a:p>
+            <a:pPr marL="0" indent="0">
+              <a:buNone/>
+            </a:pPr>
+            <a:r>
+              <a:rPr lang="en-US" sz="2200" i="1" dirty="0">
+                <a:solidFill>
+                  <a:srgbClr val="D6EEF7"/>
+                </a:solidFill>
+                <a:latin typeface="Arial" pitchFamily="34" charset="0"/>
+                <a:ea typeface="Arial" pitchFamily="34" charset="-122"/>
+                <a:cs typeface="Arial" pitchFamily="34" charset="-120"/>
+              </a:rPr>
+              <a:t>Brazil is back — and the data proves it.</a:t>
+            </a:r>
+            <a:endParaRPr lang="en-US" sz="2200" dirty="0"/>
+          </a:p>
+        </p:txBody>
+      </p:sp>
+      <p:sp>
+        <p:nvSpPr>
+          <p:cNvPr id="5" name="Shape 3"/>
+          <p:cNvSpPr/>
+          <p:nvPr/>
+        </p:nvSpPr>
+        <p:spPr>
+          <a:xfrm>
+            <a:off x="457200" y="3063240"/>
+            <a:ext cx="3200400" cy="36576"/>
+          </a:xfrm>
+          <a:prstGeom prst="rect">
+            <a:avLst/>
+          </a:prstGeom>
+          <a:solidFill>
+            <a:srgbClr val="F4A324"/>
+          </a:solidFill>
+          <a:ln w="12700">
+            <a:solidFill>
+              <a:srgbClr val="F4A324"/>
+            </a:solidFill>
+            <a:prstDash val="solid"/>
+          </a:ln>
+        </p:spPr>
+      </p:sp>
+      <p:sp>
+        <p:nvSpPr>
+          <p:cNvPr id="6" name="Text 4"/>
+          <p:cNvSpPr/>
+          <p:nvPr/>
+        </p:nvSpPr>
+        <p:spPr>
+          <a:xfrm>
+            <a:off x="457200" y="3246120"/>
+            <a:ext cx="7315200" cy="640080"/>
+          </a:xfrm>
+          <a:prstGeom prst="rect">
+            <a:avLst/>
+          </a:prstGeom>
+          <a:noFill/>
+          <a:ln/>
+        </p:spPr>
+        <p:txBody>
+          <a:bodyPr wrap="square" lIns="0" tIns="0" rIns="0" bIns="0" rtlCol="0" anchor="ctr"/>
+          <a:lstStyle/>
+          <a:p>
+            <a:pPr marL="0" indent="0">
+              <a:buNone/>
+            </a:pPr>
+            <a:r>
+              <a:rPr lang="en-US" sz="1300" b="1" dirty="0">
+                <a:solidFill>
+                  <a:srgbClr val="D6EEF7"/>
+                </a:solidFill>
+                <a:latin typeface="Arial" pitchFamily="34" charset="0"/>
+                <a:ea typeface="Arial" pitchFamily="34" charset="-122"/>
+                <a:cs typeface="Arial" pitchFamily="34" charset="-120"/>
+              </a:rPr>
+              <a:t>Gabriela Cascione</a:t>
+            </a:r>
+            <a:endParaRPr lang="en-US" sz="1300" dirty="0"/>
+          </a:p>
+          <a:p>
+            <a:pPr marL="0" indent="0">
+              <a:buNone/>
+            </a:pPr>
+            <a:r>
+              <a:rPr lang="en-US" sz="1300" dirty="0">
+                <a:solidFill>
+                  <a:srgbClr val="D6EEF7"/>
+                </a:solidFill>
+                <a:latin typeface="Arial" pitchFamily="34" charset="0"/>
+                <a:ea typeface="Arial" pitchFamily="34" charset="-122"/>
+                <a:cs typeface="Arial" pitchFamily="34" charset="-120"/>
+              </a:rPr>
+              <a:t>github.com/craftedbygaby  |  IronHack Data Analytics Bootcamp  |  May 2026</a:t>
+            </a:r>
+            <a:endParaRPr lang="en-US" sz="1300" dirty="0"/>
+          </a:p>
+        </p:txBody>
+      </p:sp>
+      <p:pic>
+        <p:nvPicPr>
+          <p:cNvPr id="7" name="Image 0" descr="preencoded.png"/>
+          <p:cNvPicPr>
+            <a:picLocks noChangeAspect="1"/>
+          </p:cNvPicPr>
+          <p:nvPr/>
+        </p:nvPicPr>
+        <p:blipFill>
+          <a:blip>
+            <a:extLst>
+              <a:ext uri="{96DAC541-7B7A-43D3-8B79-37D633B846F1}">
+                <asvg:svgBlip xmlns:asvg="http://schemas.microsoft.com/office/drawing/2016/SVG/main" r:embed="rId3"/>
+              </a:ext>
+            </a:extLst>
+          </a:blip>
+          <a:stretch>
+            <a:fillRect/>
+          </a:stretch>
+        </p:blipFill>
+        <p:spPr>
+          <a:xfrm>
+            <a:off x="457200" y="4251960"/>
+            <a:ext cx="3200400" cy="612648"/>
+          </a:xfrm>
+          <a:prstGeom prst="rect">
+            <a:avLst/>
+          </a:prstGeom>
+        </p:spPr>
+      </p:pic>
+      <p:sp>
+        <p:nvSpPr>
+          <p:cNvPr id="8" name="Text 5"/>
+          <p:cNvSpPr/>
+          <p:nvPr/>
+        </p:nvSpPr>
+        <p:spPr>
+          <a:xfrm>
+            <a:off x="8503920" y="4846320"/>
+            <a:ext cx="548640" cy="182880"/>
+          </a:xfrm>
+          <a:prstGeom prst="rect">
+            <a:avLst/>
+          </a:prstGeom>
+          <a:noFill/>
+          <a:ln/>
+        </p:spPr>
+        <p:txBody>
+          <a:bodyPr wrap="square" lIns="0" tIns="0" rIns="0" bIns="0" rtlCol="0" anchor="ctr"/>
+          <a:lstStyle/>
+          <a:p>
+            <a:pPr marL="0" indent="0" algn="r">
+              <a:buNone/>
+            </a:pPr>
+            <a:r>
+              <a:rPr lang="en-US" sz="900" dirty="0">
+                <a:solidFill>
+                  <a:srgbClr val="B0BEC5"/>
+                </a:solidFill>
+                <a:latin typeface="Arial" pitchFamily="34" charset="0"/>
+                <a:ea typeface="Arial" pitchFamily="34" charset="-122"/>
+                <a:cs typeface="Arial" pitchFamily="34" charset="-120"/>
+              </a:rPr>
+              <a:t>10 / 10</a:t>
+            </a:r>
+            <a:endParaRPr lang="en-US" sz="900" dirty="0"/>
+          </a:p>
+        </p:txBody>
+      </p:sp>
+    </p:spTree>
+  </p:cSld>
+  <p:clrMapOvr>
+    <a:masterClrMapping/>
+  </p:clrMapOvr>
+</p:sld>
+</file>
+
 <file path=ppt/slides/slide2.xml><?xml version="1.0" encoding="utf-8"?>
 <p:sld xmlns:a="http://schemas.openxmlformats.org/drawingml/2006/main" xmlns:r="http://schemas.openxmlformats.org/officeDocument/2006/relationships" xmlns:p="http://schemas.openxmlformats.org/presentationml/2006/main">
   <p:cSld name="Slide 2">
@@ -1991,7 +2362,7 @@
                 <a:ea typeface="Arial" pitchFamily="34" charset="-122"/>
                 <a:cs typeface="Arial" pitchFamily="34" charset="-120"/>
               </a:rPr>
-              <a:t>2 / 9</a:t>
+              <a:t>2 / 10</a:t>
             </a:r>
             <a:endParaRPr lang="en-US" sz="900" dirty="0"/>
           </a:p>
@@ -2604,7 +2975,7 @@
                 <a:ea typeface="Arial" pitchFamily="34" charset="-122"/>
                 <a:cs typeface="Arial" pitchFamily="34" charset="-120"/>
               </a:rPr>
-              <a:t>3 / 9</a:t>
+              <a:t>3 / 10</a:t>
             </a:r>
             <a:endParaRPr lang="en-US" sz="900" dirty="0"/>
           </a:p>
@@ -3475,7 +3846,7 @@
                 <a:ea typeface="Arial" pitchFamily="34" charset="-122"/>
                 <a:cs typeface="Arial" pitchFamily="34" charset="-120"/>
               </a:rPr>
-              <a:t>4 / 9</a:t>
+              <a:t>4 / 10</a:t>
             </a:r>
             <a:endParaRPr lang="en-US" sz="900" dirty="0"/>
           </a:p>
@@ -3490,6 +3861,843 @@
 </file>
 
 <file path=ppt/slides/slide5.xml><?xml version="1.0" encoding="utf-8"?>
+<p:sld xmlns:a="http://schemas.openxmlformats.org/drawingml/2006/main" xmlns:r="http://schemas.openxmlformats.org/officeDocument/2006/relationships" xmlns:p="http://schemas.openxmlformats.org/presentationml/2006/main">
+  <p:cSld>
+    <p:spTree>
+      <p:nvGrpSpPr>
+        <p:cNvPr id="1" name=""/>
+        <p:cNvGrpSpPr/>
+        <p:nvPr/>
+      </p:nvGrpSpPr>
+      <p:grpSpPr>
+        <a:xfrm>
+          <a:off x="0" y="0"/>
+          <a:ext cx="0" cy="0"/>
+          <a:chOff x="0" y="0"/>
+          <a:chExt cx="0" cy="0"/>
+        </a:xfrm>
+      </p:grpSpPr>
+      <p:sp>
+        <p:nvSpPr>
+          <p:cNvPr id="2" name="Shape 0"/>
+          <p:cNvSpPr/>
+          <p:nvPr/>
+        </p:nvSpPr>
+        <p:spPr>
+          <a:xfrm>
+            <a:off x="0" y="0"/>
+            <a:ext cx="9144000" cy="73152"/>
+          </a:xfrm>
+          <a:prstGeom prst="rect">
+            <a:avLst/>
+          </a:prstGeom>
+          <a:solidFill>
+            <a:srgbClr val="0D7EA8"/>
+          </a:solidFill>
+          <a:ln w="12700">
+            <a:solidFill>
+              <a:srgbClr val="0D7EA8"/>
+            </a:solidFill>
+            <a:prstDash val="solid"/>
+          </a:ln>
+        </p:spPr>
+      </p:sp>
+      <p:sp>
+        <p:nvSpPr>
+          <p:cNvPr id="3" name="Text 1"/>
+          <p:cNvSpPr/>
+          <p:nvPr/>
+        </p:nvSpPr>
+        <p:spPr>
+          <a:xfrm>
+            <a:off x="457200" y="228600"/>
+            <a:ext cx="8229600" cy="548640"/>
+          </a:xfrm>
+          <a:prstGeom prst="rect">
+            <a:avLst/>
+          </a:prstGeom>
+          <a:noFill/>
+          <a:ln/>
+        </p:spPr>
+        <p:txBody>
+          <a:bodyPr wrap="square" lIns="0" tIns="0" rIns="0" bIns="0" rtlCol="0" anchor="ctr"/>
+          <a:lstStyle/>
+          <a:p>
+            <a:pPr marL="0" indent="0">
+              <a:buNone/>
+            </a:pPr>
+            <a:r>
+              <a:rPr lang="en-US" sz="3400" b="1" dirty="0">
+                <a:solidFill>
+                  <a:srgbClr val="0D7EA8"/>
+                </a:solidFill>
+                <a:latin typeface="Arial" pitchFamily="34" charset="0"/>
+                <a:ea typeface="Arial" pitchFamily="34" charset="-122"/>
+                <a:cs typeface="Arial" pitchFamily="34" charset="-120"/>
+              </a:rPr>
+              <a:t>Business Questions</a:t>
+            </a:r>
+            <a:endParaRPr lang="en-US" sz="3400" dirty="0"/>
+          </a:p>
+        </p:txBody>
+      </p:sp>
+      <p:sp>
+        <p:nvSpPr>
+          <p:cNvPr id="4" name="Shape 2"/>
+          <p:cNvSpPr/>
+          <p:nvPr/>
+        </p:nvSpPr>
+        <p:spPr>
+          <a:xfrm>
+            <a:off x="365760" y="914400"/>
+            <a:ext cx="8412480" cy="685800"/>
+          </a:xfrm>
+          <a:prstGeom prst="rect">
+            <a:avLst/>
+          </a:prstGeom>
+          <a:solidFill>
+            <a:srgbClr val="E8EDF0"/>
+          </a:solidFill>
+          <a:ln w="12700">
+            <a:solidFill>
+              <a:srgbClr val="E8EDF0"/>
+            </a:solidFill>
+            <a:prstDash val="solid"/>
+          </a:ln>
+          <a:effectLst>
+            <a:outerShdw blurRad="101600" dist="38100" dir="8100000" algn="bl" rotWithShape="0">
+              <a:srgbClr val="000000">
+                <a:alpha val="12000"/>
+              </a:srgbClr>
+            </a:outerShdw>
+          </a:effectLst>
+        </p:spPr>
+      </p:sp>
+      <p:sp>
+        <p:nvSpPr>
+          <p:cNvPr id="5" name="Shape 3"/>
+          <p:cNvSpPr/>
+          <p:nvPr/>
+        </p:nvSpPr>
+        <p:spPr>
+          <a:xfrm>
+            <a:off x="365760" y="914400"/>
+            <a:ext cx="502920" cy="685800"/>
+          </a:xfrm>
+          <a:prstGeom prst="rect">
+            <a:avLst/>
+          </a:prstGeom>
+          <a:solidFill>
+            <a:srgbClr val="0D7EA8"/>
+          </a:solidFill>
+          <a:ln w="12700">
+            <a:solidFill>
+              <a:srgbClr val="0D7EA8"/>
+            </a:solidFill>
+            <a:prstDash val="solid"/>
+          </a:ln>
+        </p:spPr>
+      </p:sp>
+      <p:sp>
+        <p:nvSpPr>
+          <p:cNvPr id="6" name="Text 4"/>
+          <p:cNvSpPr/>
+          <p:nvPr/>
+        </p:nvSpPr>
+        <p:spPr>
+          <a:xfrm>
+            <a:off x="365760" y="914400"/>
+            <a:ext cx="502920" cy="685800"/>
+          </a:xfrm>
+          <a:prstGeom prst="rect">
+            <a:avLst/>
+          </a:prstGeom>
+          <a:noFill/>
+          <a:ln/>
+        </p:spPr>
+        <p:txBody>
+          <a:bodyPr wrap="square" lIns="0" tIns="0" rIns="0" bIns="0" rtlCol="0" anchor="ctr"/>
+          <a:lstStyle/>
+          <a:p>
+            <a:pPr marL="0" indent="0" algn="ctr">
+              <a:buNone/>
+            </a:pPr>
+            <a:r>
+              <a:rPr lang="en-US" sz="1400" b="1" dirty="0">
+                <a:solidFill>
+                  <a:srgbClr val="FFFFFF"/>
+                </a:solidFill>
+                <a:latin typeface="Arial" pitchFamily="34" charset="0"/>
+                <a:ea typeface="Arial" pitchFamily="34" charset="-122"/>
+                <a:cs typeface="Arial" pitchFamily="34" charset="-120"/>
+              </a:rPr>
+              <a:t>01</a:t>
+            </a:r>
+            <a:endParaRPr lang="en-US" sz="1400" dirty="0"/>
+          </a:p>
+        </p:txBody>
+      </p:sp>
+      <p:sp>
+        <p:nvSpPr>
+          <p:cNvPr id="7" name="Text 5"/>
+          <p:cNvSpPr/>
+          <p:nvPr/>
+        </p:nvSpPr>
+        <p:spPr>
+          <a:xfrm>
+            <a:off x="1005840" y="1060704"/>
+            <a:ext cx="7589520" cy="384048"/>
+          </a:xfrm>
+          <a:prstGeom prst="rect">
+            <a:avLst/>
+          </a:prstGeom>
+          <a:noFill/>
+          <a:ln/>
+        </p:spPr>
+        <p:txBody>
+          <a:bodyPr wrap="square" lIns="0" tIns="0" rIns="0" bIns="0" rtlCol="0" anchor="ctr"/>
+          <a:lstStyle/>
+          <a:p>
+            <a:pPr marL="0" indent="0">
+              <a:buNone/>
+            </a:pPr>
+            <a:r>
+              <a:rPr lang="en-US" sz="1200" dirty="0">
+                <a:solidFill>
+                  <a:srgbClr val="2C3E50"/>
+                </a:solidFill>
+                <a:latin typeface="Arial" pitchFamily="34" charset="0"/>
+                <a:ea typeface="Arial" pitchFamily="34" charset="-122"/>
+                <a:cs typeface="Arial" pitchFamily="34" charset="-120"/>
+              </a:rPr>
+              <a:t>How does Brazil's recovery compare to the global average?</a:t>
+            </a:r>
+            <a:endParaRPr lang="en-US" sz="1200" dirty="0"/>
+          </a:p>
+        </p:txBody>
+      </p:sp>
+      <p:sp>
+        <p:nvSpPr>
+          <p:cNvPr id="8" name="Shape 6"/>
+          <p:cNvSpPr/>
+          <p:nvPr/>
+        </p:nvSpPr>
+        <p:spPr>
+          <a:xfrm>
+            <a:off x="365760" y="1719072"/>
+            <a:ext cx="8412480" cy="685800"/>
+          </a:xfrm>
+          <a:prstGeom prst="rect">
+            <a:avLst/>
+          </a:prstGeom>
+          <a:solidFill>
+            <a:srgbClr val="E8EDF0"/>
+          </a:solidFill>
+          <a:ln w="12700">
+            <a:solidFill>
+              <a:srgbClr val="E8EDF0"/>
+            </a:solidFill>
+            <a:prstDash val="solid"/>
+          </a:ln>
+          <a:effectLst>
+            <a:outerShdw blurRad="101600" dist="38100" dir="8100000" algn="bl" rotWithShape="0">
+              <a:srgbClr val="000000">
+                <a:alpha val="12000"/>
+              </a:srgbClr>
+            </a:outerShdw>
+          </a:effectLst>
+        </p:spPr>
+      </p:sp>
+      <p:sp>
+        <p:nvSpPr>
+          <p:cNvPr id="9" name="Shape 7"/>
+          <p:cNvSpPr/>
+          <p:nvPr/>
+        </p:nvSpPr>
+        <p:spPr>
+          <a:xfrm>
+            <a:off x="365760" y="1719072"/>
+            <a:ext cx="502920" cy="685800"/>
+          </a:xfrm>
+          <a:prstGeom prst="rect">
+            <a:avLst/>
+          </a:prstGeom>
+          <a:solidFill>
+            <a:srgbClr val="0D7EA8"/>
+          </a:solidFill>
+          <a:ln w="12700">
+            <a:solidFill>
+              <a:srgbClr val="0D7EA8"/>
+            </a:solidFill>
+            <a:prstDash val="solid"/>
+          </a:ln>
+        </p:spPr>
+      </p:sp>
+      <p:sp>
+        <p:nvSpPr>
+          <p:cNvPr id="10" name="Text 8"/>
+          <p:cNvSpPr/>
+          <p:nvPr/>
+        </p:nvSpPr>
+        <p:spPr>
+          <a:xfrm>
+            <a:off x="365760" y="1719072"/>
+            <a:ext cx="502920" cy="685800"/>
+          </a:xfrm>
+          <a:prstGeom prst="rect">
+            <a:avLst/>
+          </a:prstGeom>
+          <a:noFill/>
+          <a:ln/>
+        </p:spPr>
+        <p:txBody>
+          <a:bodyPr wrap="square" lIns="0" tIns="0" rIns="0" bIns="0" rtlCol="0" anchor="ctr"/>
+          <a:lstStyle/>
+          <a:p>
+            <a:pPr marL="0" indent="0" algn="ctr">
+              <a:buNone/>
+            </a:pPr>
+            <a:r>
+              <a:rPr lang="en-US" sz="1400" b="1" dirty="0">
+                <a:solidFill>
+                  <a:srgbClr val="FFFFFF"/>
+                </a:solidFill>
+                <a:latin typeface="Arial" pitchFamily="34" charset="0"/>
+                <a:ea typeface="Arial" pitchFamily="34" charset="-122"/>
+                <a:cs typeface="Arial" pitchFamily="34" charset="-120"/>
+              </a:rPr>
+              <a:t>02</a:t>
+            </a:r>
+            <a:endParaRPr lang="en-US" sz="1400" dirty="0"/>
+          </a:p>
+        </p:txBody>
+      </p:sp>
+      <p:sp>
+        <p:nvSpPr>
+          <p:cNvPr id="11" name="Text 9"/>
+          <p:cNvSpPr/>
+          <p:nvPr/>
+        </p:nvSpPr>
+        <p:spPr>
+          <a:xfrm>
+            <a:off x="1005840" y="1865376"/>
+            <a:ext cx="7589520" cy="384048"/>
+          </a:xfrm>
+          <a:prstGeom prst="rect">
+            <a:avLst/>
+          </a:prstGeom>
+          <a:noFill/>
+          <a:ln/>
+        </p:spPr>
+        <p:txBody>
+          <a:bodyPr wrap="square" lIns="0" tIns="0" rIns="0" bIns="0" rtlCol="0" anchor="ctr"/>
+          <a:lstStyle/>
+          <a:p>
+            <a:pPr marL="0" indent="0">
+              <a:buNone/>
+            </a:pPr>
+            <a:r>
+              <a:rPr lang="en-US" sz="1200" dirty="0">
+                <a:solidFill>
+                  <a:srgbClr val="2C3E50"/>
+                </a:solidFill>
+                <a:latin typeface="Arial" pitchFamily="34" charset="0"/>
+                <a:ea typeface="Arial" pitchFamily="34" charset="-122"/>
+                <a:cs typeface="Arial" pitchFamily="34" charset="-120"/>
+              </a:rPr>
+              <a:t>How did total arrivals collapse in 2020-2021 and recover through 2024? Are we back to 2019 levels?</a:t>
+            </a:r>
+            <a:endParaRPr lang="en-US" sz="1200" dirty="0"/>
+          </a:p>
+        </p:txBody>
+      </p:sp>
+      <p:sp>
+        <p:nvSpPr>
+          <p:cNvPr id="12" name="Shape 10"/>
+          <p:cNvSpPr/>
+          <p:nvPr/>
+        </p:nvSpPr>
+        <p:spPr>
+          <a:xfrm>
+            <a:off x="365760" y="2523744"/>
+            <a:ext cx="8412480" cy="685800"/>
+          </a:xfrm>
+          <a:prstGeom prst="rect">
+            <a:avLst/>
+          </a:prstGeom>
+          <a:solidFill>
+            <a:srgbClr val="E8EDF0"/>
+          </a:solidFill>
+          <a:ln w="12700">
+            <a:solidFill>
+              <a:srgbClr val="E8EDF0"/>
+            </a:solidFill>
+            <a:prstDash val="solid"/>
+          </a:ln>
+          <a:effectLst>
+            <a:outerShdw blurRad="101600" dist="38100" dir="8100000" algn="bl" rotWithShape="0">
+              <a:srgbClr val="000000">
+                <a:alpha val="12000"/>
+              </a:srgbClr>
+            </a:outerShdw>
+          </a:effectLst>
+        </p:spPr>
+      </p:sp>
+      <p:sp>
+        <p:nvSpPr>
+          <p:cNvPr id="13" name="Shape 11"/>
+          <p:cNvSpPr/>
+          <p:nvPr/>
+        </p:nvSpPr>
+        <p:spPr>
+          <a:xfrm>
+            <a:off x="365760" y="2523744"/>
+            <a:ext cx="502920" cy="685800"/>
+          </a:xfrm>
+          <a:prstGeom prst="rect">
+            <a:avLst/>
+          </a:prstGeom>
+          <a:solidFill>
+            <a:srgbClr val="0D7EA8"/>
+          </a:solidFill>
+          <a:ln w="12700">
+            <a:solidFill>
+              <a:srgbClr val="0D7EA8"/>
+            </a:solidFill>
+            <a:prstDash val="solid"/>
+          </a:ln>
+        </p:spPr>
+      </p:sp>
+      <p:sp>
+        <p:nvSpPr>
+          <p:cNvPr id="14" name="Text 12"/>
+          <p:cNvSpPr/>
+          <p:nvPr/>
+        </p:nvSpPr>
+        <p:spPr>
+          <a:xfrm>
+            <a:off x="365760" y="2523744"/>
+            <a:ext cx="502920" cy="685800"/>
+          </a:xfrm>
+          <a:prstGeom prst="rect">
+            <a:avLst/>
+          </a:prstGeom>
+          <a:noFill/>
+          <a:ln/>
+        </p:spPr>
+        <p:txBody>
+          <a:bodyPr wrap="square" lIns="0" tIns="0" rIns="0" bIns="0" rtlCol="0" anchor="ctr"/>
+          <a:lstStyle/>
+          <a:p>
+            <a:pPr marL="0" indent="0" algn="ctr">
+              <a:buNone/>
+            </a:pPr>
+            <a:r>
+              <a:rPr lang="en-US" sz="1400" b="1" dirty="0">
+                <a:solidFill>
+                  <a:srgbClr val="FFFFFF"/>
+                </a:solidFill>
+                <a:latin typeface="Arial" pitchFamily="34" charset="0"/>
+                <a:ea typeface="Arial" pitchFamily="34" charset="-122"/>
+                <a:cs typeface="Arial" pitchFamily="34" charset="-120"/>
+              </a:rPr>
+              <a:t>03</a:t>
+            </a:r>
+            <a:endParaRPr lang="en-US" sz="1400" dirty="0"/>
+          </a:p>
+        </p:txBody>
+      </p:sp>
+      <p:sp>
+        <p:nvSpPr>
+          <p:cNvPr id="15" name="Text 13"/>
+          <p:cNvSpPr/>
+          <p:nvPr/>
+        </p:nvSpPr>
+        <p:spPr>
+          <a:xfrm>
+            <a:off x="1005840" y="2670048"/>
+            <a:ext cx="7589520" cy="384048"/>
+          </a:xfrm>
+          <a:prstGeom prst="rect">
+            <a:avLst/>
+          </a:prstGeom>
+          <a:noFill/>
+          <a:ln/>
+        </p:spPr>
+        <p:txBody>
+          <a:bodyPr wrap="square" lIns="0" tIns="0" rIns="0" bIns="0" rtlCol="0" anchor="ctr"/>
+          <a:lstStyle/>
+          <a:p>
+            <a:pPr marL="0" indent="0">
+              <a:buNone/>
+            </a:pPr>
+            <a:r>
+              <a:rPr lang="en-US" sz="1200" dirty="0">
+                <a:solidFill>
+                  <a:srgbClr val="2C3E50"/>
+                </a:solidFill>
+                <a:latin typeface="Arial" pitchFamily="34" charset="0"/>
+                <a:ea typeface="Arial" pitchFamily="34" charset="-122"/>
+                <a:cs typeface="Arial" pitchFamily="34" charset="-120"/>
+              </a:rPr>
+              <a:t>Which countries sent the most tourists to Brazil pre-COVID vs post-COVID?</a:t>
+            </a:r>
+            <a:endParaRPr lang="en-US" sz="1200" dirty="0"/>
+          </a:p>
+        </p:txBody>
+      </p:sp>
+      <p:sp>
+        <p:nvSpPr>
+          <p:cNvPr id="16" name="Shape 14"/>
+          <p:cNvSpPr/>
+          <p:nvPr/>
+        </p:nvSpPr>
+        <p:spPr>
+          <a:xfrm>
+            <a:off x="365760" y="3328416"/>
+            <a:ext cx="8412480" cy="685800"/>
+          </a:xfrm>
+          <a:prstGeom prst="rect">
+            <a:avLst/>
+          </a:prstGeom>
+          <a:solidFill>
+            <a:srgbClr val="E8EDF0"/>
+          </a:solidFill>
+          <a:ln w="12700">
+            <a:solidFill>
+              <a:srgbClr val="E8EDF0"/>
+            </a:solidFill>
+            <a:prstDash val="solid"/>
+          </a:ln>
+          <a:effectLst>
+            <a:outerShdw blurRad="101600" dist="38100" dir="8100000" algn="bl" rotWithShape="0">
+              <a:srgbClr val="000000">
+                <a:alpha val="12000"/>
+              </a:srgbClr>
+            </a:outerShdw>
+          </a:effectLst>
+        </p:spPr>
+      </p:sp>
+      <p:sp>
+        <p:nvSpPr>
+          <p:cNvPr id="17" name="Shape 15"/>
+          <p:cNvSpPr/>
+          <p:nvPr/>
+        </p:nvSpPr>
+        <p:spPr>
+          <a:xfrm>
+            <a:off x="365760" y="3328416"/>
+            <a:ext cx="502920" cy="685800"/>
+          </a:xfrm>
+          <a:prstGeom prst="rect">
+            <a:avLst/>
+          </a:prstGeom>
+          <a:solidFill>
+            <a:srgbClr val="0D7EA8"/>
+          </a:solidFill>
+          <a:ln w="12700">
+            <a:solidFill>
+              <a:srgbClr val="0D7EA8"/>
+            </a:solidFill>
+            <a:prstDash val="solid"/>
+          </a:ln>
+        </p:spPr>
+      </p:sp>
+      <p:sp>
+        <p:nvSpPr>
+          <p:cNvPr id="18" name="Text 16"/>
+          <p:cNvSpPr/>
+          <p:nvPr/>
+        </p:nvSpPr>
+        <p:spPr>
+          <a:xfrm>
+            <a:off x="365760" y="3328416"/>
+            <a:ext cx="502920" cy="685800"/>
+          </a:xfrm>
+          <a:prstGeom prst="rect">
+            <a:avLst/>
+          </a:prstGeom>
+          <a:noFill/>
+          <a:ln/>
+        </p:spPr>
+        <p:txBody>
+          <a:bodyPr wrap="square" lIns="0" tIns="0" rIns="0" bIns="0" rtlCol="0" anchor="ctr"/>
+          <a:lstStyle/>
+          <a:p>
+            <a:pPr marL="0" indent="0" algn="ctr">
+              <a:buNone/>
+            </a:pPr>
+            <a:r>
+              <a:rPr lang="en-US" sz="1400" b="1" dirty="0">
+                <a:solidFill>
+                  <a:srgbClr val="FFFFFF"/>
+                </a:solidFill>
+                <a:latin typeface="Arial" pitchFamily="34" charset="0"/>
+                <a:ea typeface="Arial" pitchFamily="34" charset="-122"/>
+                <a:cs typeface="Arial" pitchFamily="34" charset="-120"/>
+              </a:rPr>
+              <a:t>04</a:t>
+            </a:r>
+            <a:endParaRPr lang="en-US" sz="1400" dirty="0"/>
+          </a:p>
+        </p:txBody>
+      </p:sp>
+      <p:sp>
+        <p:nvSpPr>
+          <p:cNvPr id="19" name="Text 17"/>
+          <p:cNvSpPr/>
+          <p:nvPr/>
+        </p:nvSpPr>
+        <p:spPr>
+          <a:xfrm>
+            <a:off x="1005840" y="3474720"/>
+            <a:ext cx="7589520" cy="384048"/>
+          </a:xfrm>
+          <a:prstGeom prst="rect">
+            <a:avLst/>
+          </a:prstGeom>
+          <a:noFill/>
+          <a:ln/>
+        </p:spPr>
+        <p:txBody>
+          <a:bodyPr wrap="square" lIns="0" tIns="0" rIns="0" bIns="0" rtlCol="0" anchor="ctr"/>
+          <a:lstStyle/>
+          <a:p>
+            <a:pPr marL="0" indent="0">
+              <a:buNone/>
+            </a:pPr>
+            <a:r>
+              <a:rPr lang="en-US" sz="1200" dirty="0">
+                <a:solidFill>
+                  <a:srgbClr val="2C3E50"/>
+                </a:solidFill>
+                <a:latin typeface="Arial" pitchFamily="34" charset="0"/>
+                <a:ea typeface="Arial" pitchFamily="34" charset="-122"/>
+                <a:cs typeface="Arial" pitchFamily="34" charset="-120"/>
+              </a:rPr>
+              <a:t>Has the balance between air, land, sea and river entries changed since COVID?</a:t>
+            </a:r>
+            <a:endParaRPr lang="en-US" sz="1200" dirty="0"/>
+          </a:p>
+        </p:txBody>
+      </p:sp>
+      <p:sp>
+        <p:nvSpPr>
+          <p:cNvPr id="20" name="Shape 18"/>
+          <p:cNvSpPr/>
+          <p:nvPr/>
+        </p:nvSpPr>
+        <p:spPr>
+          <a:xfrm>
+            <a:off x="365760" y="4133088"/>
+            <a:ext cx="8412480" cy="685800"/>
+          </a:xfrm>
+          <a:prstGeom prst="rect">
+            <a:avLst/>
+          </a:prstGeom>
+          <a:solidFill>
+            <a:srgbClr val="FCEFD6"/>
+          </a:solidFill>
+          <a:ln w="12700">
+            <a:solidFill>
+              <a:srgbClr val="D9A055"/>
+            </a:solidFill>
+            <a:prstDash val="solid"/>
+          </a:ln>
+          <a:effectLst>
+            <a:outerShdw blurRad="101600" dist="38100" dir="8100000" algn="bl" rotWithShape="0">
+              <a:srgbClr val="000000">
+                <a:alpha val="12000"/>
+              </a:srgbClr>
+            </a:outerShdw>
+          </a:effectLst>
+        </p:spPr>
+      </p:sp>
+      <p:sp>
+        <p:nvSpPr>
+          <p:cNvPr id="21" name="Shape 19"/>
+          <p:cNvSpPr/>
+          <p:nvPr/>
+        </p:nvSpPr>
+        <p:spPr>
+          <a:xfrm>
+            <a:off x="365760" y="4133088"/>
+            <a:ext cx="502920" cy="685800"/>
+          </a:xfrm>
+          <a:prstGeom prst="rect">
+            <a:avLst/>
+          </a:prstGeom>
+          <a:solidFill>
+            <a:srgbClr val="F4A324"/>
+          </a:solidFill>
+          <a:ln w="12700">
+            <a:solidFill>
+              <a:srgbClr val="F4A324"/>
+            </a:solidFill>
+            <a:prstDash val="solid"/>
+          </a:ln>
+        </p:spPr>
+      </p:sp>
+      <p:sp>
+        <p:nvSpPr>
+          <p:cNvPr id="22" name="Text 20"/>
+          <p:cNvSpPr/>
+          <p:nvPr/>
+        </p:nvSpPr>
+        <p:spPr>
+          <a:xfrm>
+            <a:off x="365760" y="4133088"/>
+            <a:ext cx="502920" cy="685800"/>
+          </a:xfrm>
+          <a:prstGeom prst="rect">
+            <a:avLst/>
+          </a:prstGeom>
+          <a:noFill/>
+          <a:ln/>
+        </p:spPr>
+        <p:txBody>
+          <a:bodyPr wrap="square" lIns="0" tIns="0" rIns="0" bIns="0" rtlCol="0" anchor="ctr"/>
+          <a:lstStyle/>
+          <a:p>
+            <a:pPr marL="0" indent="0" algn="ctr">
+              <a:buNone/>
+            </a:pPr>
+            <a:r>
+              <a:rPr lang="en-US" sz="1400" b="1" dirty="0">
+                <a:solidFill>
+                  <a:srgbClr val="FFFFFF"/>
+                </a:solidFill>
+                <a:latin typeface="Arial" pitchFamily="34" charset="0"/>
+                <a:ea typeface="Arial" pitchFamily="34" charset="-122"/>
+                <a:cs typeface="Arial" pitchFamily="34" charset="-120"/>
+              </a:rPr>
+              <a:t>05</a:t>
+            </a:r>
+            <a:endParaRPr lang="en-US" sz="1400" dirty="0"/>
+          </a:p>
+        </p:txBody>
+      </p:sp>
+      <p:sp>
+        <p:nvSpPr>
+          <p:cNvPr id="23" name="Text 21"/>
+          <p:cNvSpPr/>
+          <p:nvPr/>
+        </p:nvSpPr>
+        <p:spPr>
+          <a:xfrm>
+            <a:off x="1005840" y="4279392"/>
+            <a:ext cx="7589520" cy="384048"/>
+          </a:xfrm>
+          <a:prstGeom prst="rect">
+            <a:avLst/>
+          </a:prstGeom>
+          <a:noFill/>
+          <a:ln/>
+        </p:spPr>
+        <p:txBody>
+          <a:bodyPr wrap="square" lIns="0" tIns="0" rIns="0" bIns="0" rtlCol="0" anchor="ctr"/>
+          <a:lstStyle/>
+          <a:p>
+            <a:r>
+              <a:rPr lang="en-US" sz="1200" b="1" dirty="0">
+                <a:solidFill>
+                  <a:srgbClr val="2C3E50"/>
+                </a:solidFill>
+                <a:latin typeface="Arial" pitchFamily="34" charset="0"/>
+                <a:cs typeface="Arial" pitchFamily="34" charset="-120"/>
+              </a:rPr>
+              <a:t>How can Brazil improve destination visibility during its tourism recovery?</a:t>
+            </a:r>
+          </a:p>
+        </p:txBody>
+      </p:sp>
+      <p:sp>
+        <p:nvSpPr>
+          <p:cNvPr id="25" name="Text 23"/>
+          <p:cNvSpPr/>
+          <p:nvPr/>
+        </p:nvSpPr>
+        <p:spPr>
+          <a:xfrm>
+            <a:off x="457200" y="4846320"/>
+            <a:ext cx="1828800" cy="182880"/>
+          </a:xfrm>
+          <a:prstGeom prst="rect">
+            <a:avLst/>
+          </a:prstGeom>
+          <a:noFill/>
+          <a:ln/>
+        </p:spPr>
+        <p:txBody>
+          <a:bodyPr wrap="square" lIns="0" tIns="0" rIns="0" bIns="0" rtlCol="0" anchor="ctr"/>
+          <a:lstStyle/>
+          <a:p>
+            <a:pPr marL="0" indent="0">
+              <a:buNone/>
+            </a:pPr>
+            <a:r>
+              <a:rPr lang="en-US" sz="900" dirty="0">
+                <a:solidFill>
+                  <a:srgbClr val="B0BEC5"/>
+                </a:solidFill>
+                <a:latin typeface="Arial" pitchFamily="34" charset="0"/>
+                <a:ea typeface="Arial" pitchFamily="34" charset="-122"/>
+                <a:cs typeface="Arial" pitchFamily="34" charset="-120"/>
+              </a:rPr>
+              <a:t>Viewpoint Insights</a:t>
+            </a:r>
+            <a:endParaRPr lang="en-US" sz="900" dirty="0"/>
+          </a:p>
+        </p:txBody>
+      </p:sp>
+      <p:sp>
+        <p:nvSpPr>
+          <p:cNvPr id="26" name="Text 24"/>
+          <p:cNvSpPr/>
+          <p:nvPr/>
+        </p:nvSpPr>
+        <p:spPr>
+          <a:xfrm>
+            <a:off x="8503920" y="4846320"/>
+            <a:ext cx="548640" cy="182880"/>
+          </a:xfrm>
+          <a:prstGeom prst="rect">
+            <a:avLst/>
+          </a:prstGeom>
+          <a:noFill/>
+          <a:ln/>
+        </p:spPr>
+        <p:txBody>
+          <a:bodyPr wrap="square" lIns="0" tIns="0" rIns="0" bIns="0" rtlCol="0" anchor="ctr"/>
+          <a:lstStyle/>
+          <a:p>
+            <a:pPr marL="0" indent="0" algn="r">
+              <a:buNone/>
+            </a:pPr>
+            <a:r>
+              <a:rPr lang="en-US" sz="900" dirty="0">
+                <a:solidFill>
+                  <a:srgbClr val="B0BEC5"/>
+                </a:solidFill>
+                <a:latin typeface="Arial" pitchFamily="34" charset="0"/>
+                <a:ea typeface="Arial" pitchFamily="34" charset="-122"/>
+                <a:cs typeface="Arial" pitchFamily="34" charset="-120"/>
+              </a:rPr>
+              <a:t>5 / 10</a:t>
+            </a:r>
+            <a:endParaRPr lang="en-US" sz="900" dirty="0"/>
+          </a:p>
+        </p:txBody>
+      </p:sp>
+    </p:spTree>
+  </p:cSld>
+  <p:clrMapOvr>
+    <a:masterClrMapping/>
+  </p:clrMapOvr>
+</p:sld>
+</file>
+
+<file path=ppt/slides/slide6.xml><?xml version="1.0" encoding="utf-8"?>
 <p:sld xmlns:a="http://schemas.openxmlformats.org/drawingml/2006/main" xmlns:r="http://schemas.openxmlformats.org/officeDocument/2006/relationships" xmlns:p="http://schemas.openxmlformats.org/presentationml/2006/main">
   <p:cSld name="Slide 5">
     <p:bg>
@@ -4023,7 +5231,7 @@
                 <a:ea typeface="Arial" pitchFamily="34" charset="-122"/>
                 <a:cs typeface="Arial" pitchFamily="34" charset="-120"/>
               </a:rPr>
-              <a:t>5 / 9</a:t>
+              <a:t>6 / 10</a:t>
             </a:r>
             <a:endParaRPr lang="en-US" sz="900" dirty="0"/>
           </a:p>
@@ -4037,7 +5245,7 @@
 </p:sld>
 </file>
 
-<file path=ppt/slides/slide6.xml><?xml version="1.0" encoding="utf-8"?>
+<file path=ppt/slides/slide7.xml><?xml version="1.0" encoding="utf-8"?>
 <p:sld xmlns:a="http://schemas.openxmlformats.org/drawingml/2006/main" xmlns:r="http://schemas.openxmlformats.org/officeDocument/2006/relationships" xmlns:p="http://schemas.openxmlformats.org/presentationml/2006/main">
   <p:cSld name="Slide 6">
     <p:bg>
@@ -4738,7 +5946,7 @@
                 <a:ea typeface="Arial" pitchFamily="34" charset="-122"/>
                 <a:cs typeface="Arial" pitchFamily="34" charset="-120"/>
               </a:rPr>
-              <a:t>6 / 9</a:t>
+              <a:t>7 / 10</a:t>
             </a:r>
             <a:endParaRPr lang="en-US" sz="900" dirty="0"/>
           </a:p>
@@ -4752,7 +5960,7 @@
 </p:sld>
 </file>
 
-<file path=ppt/slides/slide7.xml><?xml version="1.0" encoding="utf-8"?>
+<file path=ppt/slides/slide8.xml><?xml version="1.0" encoding="utf-8"?>
 <p:sld xmlns:a="http://schemas.openxmlformats.org/drawingml/2006/main" xmlns:r="http://schemas.openxmlformats.org/officeDocument/2006/relationships" xmlns:p="http://schemas.openxmlformats.org/presentationml/2006/main">
   <p:cSld name="Slide 7">
     <p:bg>
@@ -5895,7 +7103,7 @@
                 <a:ea typeface="Arial" pitchFamily="34" charset="-122"/>
                 <a:cs typeface="Arial" pitchFamily="34" charset="-120"/>
               </a:rPr>
-              <a:t>7 / 9</a:t>
+              <a:t>8 / 10</a:t>
             </a:r>
             <a:endParaRPr lang="en-US" sz="900" dirty="0"/>
           </a:p>
@@ -5909,7 +7117,7 @@
 </p:sld>
 </file>
 
-<file path=ppt/slides/slide8.xml><?xml version="1.0" encoding="utf-8"?>
+<file path=ppt/slides/slide9.xml><?xml version="1.0" encoding="utf-8"?>
 <p:sld xmlns:a="http://schemas.openxmlformats.org/drawingml/2006/main" xmlns:r="http://schemas.openxmlformats.org/officeDocument/2006/relationships" xmlns:p="http://schemas.openxmlformats.org/presentationml/2006/main">
   <p:cSld name="Slide 8">
     <p:bg>
@@ -7220,293 +8428,7 @@
                 <a:ea typeface="Arial" pitchFamily="34" charset="-122"/>
                 <a:cs typeface="Arial" pitchFamily="34" charset="-120"/>
               </a:rPr>
-              <a:t>8 / 9</a:t>
-            </a:r>
-            <a:endParaRPr lang="en-US" sz="900" dirty="0"/>
-          </a:p>
-        </p:txBody>
-      </p:sp>
-    </p:spTree>
-  </p:cSld>
-  <p:clrMapOvr>
-    <a:masterClrMapping/>
-  </p:clrMapOvr>
-</p:sld>
-</file>
-
-<file path=ppt/slides/slide9.xml><?xml version="1.0" encoding="utf-8"?>
-<p:sld xmlns:a="http://schemas.openxmlformats.org/drawingml/2006/main" xmlns:r="http://schemas.openxmlformats.org/officeDocument/2006/relationships" xmlns:p="http://schemas.openxmlformats.org/presentationml/2006/main">
-  <p:cSld name="Slide 9">
-    <p:bg>
-      <p:bgPr>
-        <a:solidFill>
-          <a:srgbClr val="0D7EA8"/>
-        </a:solidFill>
-        <a:effectLst/>
-      </p:bgPr>
-    </p:bg>
-    <p:spTree>
-      <p:nvGrpSpPr>
-        <p:cNvPr id="1" name=""/>
-        <p:cNvGrpSpPr/>
-        <p:nvPr/>
-      </p:nvGrpSpPr>
-      <p:grpSpPr>
-        <a:xfrm>
-          <a:off x="0" y="0"/>
-          <a:ext cx="0" cy="0"/>
-          <a:chOff x="0" y="0"/>
-          <a:chExt cx="0" cy="0"/>
-        </a:xfrm>
-      </p:grpSpPr>
-      <p:sp>
-        <p:nvSpPr>
-          <p:cNvPr id="2" name="Shape 0"/>
-          <p:cNvSpPr/>
-          <p:nvPr/>
-        </p:nvSpPr>
-        <p:spPr>
-          <a:xfrm>
-            <a:off x="0" y="0"/>
-            <a:ext cx="164592" cy="5143500"/>
-          </a:xfrm>
-          <a:prstGeom prst="rect">
-            <a:avLst/>
-          </a:prstGeom>
-          <a:solidFill>
-            <a:srgbClr val="F4A324"/>
-          </a:solidFill>
-          <a:ln w="12700">
-            <a:solidFill>
-              <a:srgbClr val="F4A324"/>
-            </a:solidFill>
-            <a:prstDash val="solid"/>
-          </a:ln>
-        </p:spPr>
-      </p:sp>
-      <p:sp>
-        <p:nvSpPr>
-          <p:cNvPr id="3" name="Text 1"/>
-          <p:cNvSpPr/>
-          <p:nvPr/>
-        </p:nvSpPr>
-        <p:spPr>
-          <a:xfrm>
-            <a:off x="457200" y="1371600"/>
-            <a:ext cx="8229600" cy="1005840"/>
-          </a:xfrm>
-          <a:prstGeom prst="rect">
-            <a:avLst/>
-          </a:prstGeom>
-          <a:noFill/>
-          <a:ln/>
-        </p:spPr>
-        <p:txBody>
-          <a:bodyPr wrap="square" lIns="0" tIns="0" rIns="0" bIns="0" rtlCol="0" anchor="ctr"/>
-          <a:lstStyle/>
-          <a:p>
-            <a:pPr marL="0" indent="0">
-              <a:buNone/>
-            </a:pPr>
-            <a:r>
-              <a:rPr lang="en-US" sz="5200" b="1" dirty="0">
-                <a:solidFill>
-                  <a:srgbClr val="FFFFFF"/>
-                </a:solidFill>
-                <a:latin typeface="Arial" pitchFamily="34" charset="0"/>
-                <a:ea typeface="Arial" pitchFamily="34" charset="-122"/>
-                <a:cs typeface="Arial" pitchFamily="34" charset="-120"/>
-              </a:rPr>
-              <a:t>Thank You</a:t>
-            </a:r>
-            <a:endParaRPr lang="en-US" sz="5200" dirty="0"/>
-          </a:p>
-        </p:txBody>
-      </p:sp>
-      <p:sp>
-        <p:nvSpPr>
-          <p:cNvPr id="4" name="Text 2"/>
-          <p:cNvSpPr/>
-          <p:nvPr/>
-        </p:nvSpPr>
-        <p:spPr>
-          <a:xfrm>
-            <a:off x="457200" y="2423160"/>
-            <a:ext cx="7315200" cy="548640"/>
-          </a:xfrm>
-          <a:prstGeom prst="rect">
-            <a:avLst/>
-          </a:prstGeom>
-          <a:noFill/>
-          <a:ln/>
-        </p:spPr>
-        <p:txBody>
-          <a:bodyPr wrap="square" lIns="0" tIns="0" rIns="0" bIns="0" rtlCol="0" anchor="ctr"/>
-          <a:lstStyle/>
-          <a:p>
-            <a:pPr marL="0" indent="0">
-              <a:buNone/>
-            </a:pPr>
-            <a:r>
-              <a:rPr lang="en-US" sz="2200" i="1" dirty="0">
-                <a:solidFill>
-                  <a:srgbClr val="D6EEF7"/>
-                </a:solidFill>
-                <a:latin typeface="Arial" pitchFamily="34" charset="0"/>
-                <a:ea typeface="Arial" pitchFamily="34" charset="-122"/>
-                <a:cs typeface="Arial" pitchFamily="34" charset="-120"/>
-              </a:rPr>
-              <a:t>Brazil is back — and the data proves it.</a:t>
-            </a:r>
-            <a:endParaRPr lang="en-US" sz="2200" dirty="0"/>
-          </a:p>
-        </p:txBody>
-      </p:sp>
-      <p:sp>
-        <p:nvSpPr>
-          <p:cNvPr id="5" name="Shape 3"/>
-          <p:cNvSpPr/>
-          <p:nvPr/>
-        </p:nvSpPr>
-        <p:spPr>
-          <a:xfrm>
-            <a:off x="457200" y="3063240"/>
-            <a:ext cx="3200400" cy="36576"/>
-          </a:xfrm>
-          <a:prstGeom prst="rect">
-            <a:avLst/>
-          </a:prstGeom>
-          <a:solidFill>
-            <a:srgbClr val="F4A324"/>
-          </a:solidFill>
-          <a:ln w="12700">
-            <a:solidFill>
-              <a:srgbClr val="F4A324"/>
-            </a:solidFill>
-            <a:prstDash val="solid"/>
-          </a:ln>
-        </p:spPr>
-      </p:sp>
-      <p:sp>
-        <p:nvSpPr>
-          <p:cNvPr id="6" name="Text 4"/>
-          <p:cNvSpPr/>
-          <p:nvPr/>
-        </p:nvSpPr>
-        <p:spPr>
-          <a:xfrm>
-            <a:off x="457200" y="3246120"/>
-            <a:ext cx="7315200" cy="640080"/>
-          </a:xfrm>
-          <a:prstGeom prst="rect">
-            <a:avLst/>
-          </a:prstGeom>
-          <a:noFill/>
-          <a:ln/>
-        </p:spPr>
-        <p:txBody>
-          <a:bodyPr wrap="square" lIns="0" tIns="0" rIns="0" bIns="0" rtlCol="0" anchor="ctr"/>
-          <a:lstStyle/>
-          <a:p>
-            <a:pPr marL="0" indent="0">
-              <a:buNone/>
-            </a:pPr>
-            <a:r>
-              <a:rPr lang="en-US" sz="1300" b="1" dirty="0">
-                <a:solidFill>
-                  <a:srgbClr val="D6EEF7"/>
-                </a:solidFill>
-                <a:latin typeface="Arial" pitchFamily="34" charset="0"/>
-                <a:ea typeface="Arial" pitchFamily="34" charset="-122"/>
-                <a:cs typeface="Arial" pitchFamily="34" charset="-120"/>
-              </a:rPr>
-              <a:t>Gabriela Cascione</a:t>
-            </a:r>
-            <a:endParaRPr lang="en-US" sz="1300" dirty="0"/>
-          </a:p>
-          <a:p>
-            <a:pPr marL="0" indent="0">
-              <a:buNone/>
-            </a:pPr>
-            <a:r>
-              <a:rPr lang="en-US" sz="1300" dirty="0">
-                <a:solidFill>
-                  <a:srgbClr val="D6EEF7"/>
-                </a:solidFill>
-                <a:latin typeface="Arial" pitchFamily="34" charset="0"/>
-                <a:ea typeface="Arial" pitchFamily="34" charset="-122"/>
-                <a:cs typeface="Arial" pitchFamily="34" charset="-120"/>
-              </a:rPr>
-              <a:t>github.com/craftedbygaby  |  IronHack Data Analytics Bootcamp  |  May 2026</a:t>
-            </a:r>
-            <a:endParaRPr lang="en-US" sz="1300" dirty="0"/>
-          </a:p>
-        </p:txBody>
-      </p:sp>
-      <p:pic>
-        <p:nvPicPr>
-          <p:cNvPr id="7" name="Image 0" descr="preencoded.png"/>
-          <p:cNvPicPr>
-            <a:picLocks noChangeAspect="1"/>
-          </p:cNvPicPr>
-          <p:nvPr/>
-        </p:nvPicPr>
-        <p:blipFill>
-          <a:blip>
-            <a:extLst>
-              <a:ext uri="{96DAC541-7B7A-43D3-8B79-37D633B846F1}">
-                <asvg:svgBlip xmlns:asvg="http://schemas.microsoft.com/office/drawing/2016/SVG/main" r:embed="rId3"/>
-              </a:ext>
-            </a:extLst>
-          </a:blip>
-          <a:stretch>
-            <a:fillRect/>
-          </a:stretch>
-        </p:blipFill>
-        <p:spPr>
-          <a:xfrm>
-            <a:off x="457200" y="4251960"/>
-            <a:ext cx="3200400" cy="612648"/>
-          </a:xfrm>
-          <a:prstGeom prst="rect">
-            <a:avLst/>
-          </a:prstGeom>
-        </p:spPr>
-      </p:pic>
-      <p:sp>
-        <p:nvSpPr>
-          <p:cNvPr id="8" name="Text 5"/>
-          <p:cNvSpPr/>
-          <p:nvPr/>
-        </p:nvSpPr>
-        <p:spPr>
-          <a:xfrm>
-            <a:off x="8503920" y="4846320"/>
-            <a:ext cx="548640" cy="182880"/>
-          </a:xfrm>
-          <a:prstGeom prst="rect">
-            <a:avLst/>
-          </a:prstGeom>
-          <a:noFill/>
-          <a:ln/>
-        </p:spPr>
-        <p:txBody>
-          <a:bodyPr wrap="square" lIns="0" tIns="0" rIns="0" bIns="0" rtlCol="0" anchor="ctr"/>
-          <a:lstStyle/>
-          <a:p>
-            <a:pPr marL="0" indent="0" algn="r">
-              <a:buNone/>
-            </a:pPr>
-            <a:r>
-              <a:rPr lang="en-US" sz="900" dirty="0">
-                <a:solidFill>
-                  <a:srgbClr val="B0BEC5"/>
-                </a:solidFill>
-                <a:latin typeface="Arial" pitchFamily="34" charset="0"/>
-                <a:ea typeface="Arial" pitchFamily="34" charset="-122"/>
-                <a:cs typeface="Arial" pitchFamily="34" charset="-120"/>
-              </a:rPr>
-              <a:t>9 / 9</a:t>
+              <a:t>9 / 10</a:t>
             </a:r>
             <a:endParaRPr lang="en-US" sz="900" dirty="0"/>
           </a:p>

--- a/brazils_road_back_presentation.pptx
+++ b/brazils_road_back_presentation.pptx
@@ -1767,7 +1767,7 @@
                 <a:ea typeface="Arial" pitchFamily="34" charset="-122"/>
                 <a:cs typeface="Arial" pitchFamily="34" charset="-120"/>
               </a:rPr>
-              <a:t>Brazil is back — and the data proves it.</a:t>
+              <a:t>Brazil is back, and the data proves it.</a:t>
             </a:r>
             <a:endParaRPr lang="en-US" sz="2200" dirty="0"/>
           </a:p>
@@ -3594,7 +3594,7 @@
                 <a:ea typeface="Arial" pitchFamily="34" charset="-122"/>
                 <a:cs typeface="Arial" pitchFamily="34" charset="-120"/>
               </a:rPr>
-              <a:t>Countries self-report to the UN. Missing reports can bias global comparisons and rankings, particularly for less developed tourism markets.</a:t>
+              <a:t>Countries self-report to the UN. Missing reports can bias global comparisons and rankings.</a:t>
             </a:r>
             <a:endParaRPr lang="en-US" sz="1000" dirty="0"/>
           </a:p>
@@ -3768,7 +3768,7 @@
                 <a:ea typeface="Arial" pitchFamily="34" charset="-122"/>
                 <a:cs typeface="Arial" pitchFamily="34" charset="-120"/>
               </a:rPr>
-              <a:t>Pre-COVID label covers 5 years of data (2015–2019), but comparison uses only 2017–2019 (3 years) to match the 3 post-COVID years available (2022–2024). The full 5-year pre-COVID average would differ slightly.</a:t>
+              <a:t>Pre-COVID label covers 5 years of data (2015–2019), and Post Covid covers only 3 years. However, we can do yearly analysis via filters in the Brazil dashboard.</a:t>
             </a:r>
             <a:endParaRPr lang="en-US" sz="1000" dirty="0"/>
           </a:p>
@@ -5161,7 +5161,9 @@
       </p:sp>
       <p:sp>
         <p:nvSpPr>
-          <p:cNvPr id="15" name="Text 13"/>
+          <p:cNvPr id="15" name="Text 13">
+            <a:hlinkClick r:id="rId3"/>
+          </p:cNvPr>
           <p:cNvSpPr/>
           <p:nvPr/>
         </p:nvSpPr>
@@ -5412,21 +5414,16 @@
           <a:bodyPr wrap="square" lIns="0" tIns="0" rIns="0" bIns="0" rtlCol="0" anchor="ctr"/>
           <a:lstStyle/>
           <a:p>
-            <a:pPr marL="0" indent="0">
-              <a:buNone/>
-            </a:pPr>
             <a:r>
               <a:rPr lang="en-US" sz="1200" b="1" dirty="0">
                 <a:solidFill>
                   <a:srgbClr val="0D7EA8"/>
                 </a:solidFill>
                 <a:latin typeface="Arial" pitchFamily="34" charset="0"/>
-                <a:ea typeface="Arial" pitchFamily="34" charset="-122"/>
-                <a:cs typeface="Arial" pitchFamily="34" charset="-120"/>
-              </a:rPr>
-              <a:t>Recovery underway — 2024 surpasses 2019</a:t>
-            </a:r>
-            <a:endParaRPr lang="en-US" sz="1200" dirty="0"/>
+                <a:cs typeface="Arial" pitchFamily="34" charset="-120"/>
+              </a:rPr>
+              <a:t>Brazil is back: 2024 surpasses the 2018 peak</a:t>
+            </a:r>
           </a:p>
         </p:txBody>
       </p:sp>
@@ -5451,21 +5448,16 @@
           <a:bodyPr wrap="square" lIns="0" tIns="0" rIns="0" bIns="0" rtlCol="0" anchor="ctr"/>
           <a:lstStyle/>
           <a:p>
-            <a:pPr marL="0" indent="0">
-              <a:buNone/>
-            </a:pPr>
             <a:r>
               <a:rPr lang="en-US" sz="1400" dirty="0">
                 <a:solidFill>
                   <a:srgbClr val="2C3E50"/>
                 </a:solidFill>
                 <a:latin typeface="Arial" pitchFamily="34" charset="0"/>
-                <a:ea typeface="Arial" pitchFamily="34" charset="-122"/>
-                <a:cs typeface="Arial" pitchFamily="34" charset="-120"/>
-              </a:rPr>
-              <a:t>Post-COVID avg ~5.7M/yr vs pre-COVID ~6.4M. However, 2024 reached 6.7M — the first year to surpass the pre-COVID peak.</a:t>
-            </a:r>
-            <a:endParaRPr lang="en-US" sz="1400" dirty="0"/>
+                <a:cs typeface="Arial" pitchFamily="34" charset="-120"/>
+              </a:rPr>
+              <a:t>With 2018 as the baseline with 6.6M arrivals, Brazil has fully recovered. In 2024 the country welcomed 6.8M international tourists, surpassing the pre-COVID peak for the first time.</a:t>
+            </a:r>
           </a:p>
         </p:txBody>
       </p:sp>
@@ -5547,21 +5539,26 @@
           <a:bodyPr wrap="square" lIns="0" tIns="0" rIns="0" bIns="0" rtlCol="0" anchor="ctr"/>
           <a:lstStyle/>
           <a:p>
-            <a:pPr marL="0" indent="0">
-              <a:buNone/>
-            </a:pPr>
+            <a:r>
+              <a:rPr lang="en-US" sz="1200" b="1" dirty="0" err="1">
+                <a:solidFill>
+                  <a:srgbClr val="0D7EA8"/>
+                </a:solidFill>
+                <a:latin typeface="Arial" pitchFamily="34" charset="0"/>
+                <a:cs typeface="Arial" pitchFamily="34" charset="-120"/>
+              </a:rPr>
+              <a:t>Neighbours</a:t>
+            </a:r>
             <a:r>
               <a:rPr lang="en-US" sz="1200" b="1" dirty="0">
                 <a:solidFill>
                   <a:srgbClr val="0D7EA8"/>
                 </a:solidFill>
                 <a:latin typeface="Arial" pitchFamily="34" charset="0"/>
-                <a:ea typeface="Arial" pitchFamily="34" charset="-122"/>
-                <a:cs typeface="Arial" pitchFamily="34" charset="-120"/>
-              </a:rPr>
-              <a:t>Regional neighbours drive arrivals</a:t>
-            </a:r>
-            <a:endParaRPr lang="en-US" sz="1200" dirty="0"/>
+                <a:cs typeface="Arial" pitchFamily="34" charset="-120"/>
+              </a:rPr>
+              <a:t> and visa-free allies lead the way</a:t>
+            </a:r>
           </a:p>
         </p:txBody>
       </p:sp>
@@ -5573,7 +5570,7 @@
         </p:nvSpPr>
         <p:spPr>
           <a:xfrm>
-            <a:off x="4965192" y="1600200"/>
+            <a:off x="4965192" y="1485900"/>
             <a:ext cx="3840480" cy="1005840"/>
           </a:xfrm>
           <a:prstGeom prst="rect">
@@ -5586,21 +5583,16 @@
           <a:bodyPr wrap="square" lIns="0" tIns="0" rIns="0" bIns="0" rtlCol="0" anchor="ctr"/>
           <a:lstStyle/>
           <a:p>
-            <a:pPr marL="0" indent="0">
-              <a:buNone/>
-            </a:pPr>
             <a:r>
               <a:rPr lang="en-US" sz="1400" dirty="0">
                 <a:solidFill>
                   <a:srgbClr val="2C3E50"/>
                 </a:solidFill>
                 <a:latin typeface="Arial" pitchFamily="34" charset="0"/>
-                <a:ea typeface="Arial" pitchFamily="34" charset="-122"/>
-                <a:cs typeface="Arial" pitchFamily="34" charset="-120"/>
-              </a:rPr>
-              <a:t>Argentina alone = ~33% of all arrivals. 7 of the top 10 origin countries are South American neighbours.</a:t>
-            </a:r>
-            <a:endParaRPr lang="en-US" sz="1400" dirty="0"/>
+                <a:cs typeface="Arial" pitchFamily="34" charset="-120"/>
+              </a:rPr>
+              <a:t>Argentina accounts for roughly 1 in 3 arrivals. Between 2022 and 2024, every single country in the top 10 had visa-free access to Brazil.</a:t>
+            </a:r>
           </a:p>
         </p:txBody>
       </p:sp>
@@ -5682,9 +5674,6 @@
           <a:bodyPr wrap="square" lIns="0" tIns="0" rIns="0" bIns="0" rtlCol="0" anchor="ctr"/>
           <a:lstStyle/>
           <a:p>
-            <a:pPr marL="0" indent="0">
-              <a:buNone/>
-            </a:pPr>
             <a:r>
               <a:rPr lang="en-US" sz="1200" b="1" dirty="0">
                 <a:solidFill>
@@ -5694,9 +5683,85 @@
                 <a:ea typeface="Arial" pitchFamily="34" charset="-122"/>
                 <a:cs typeface="Arial" pitchFamily="34" charset="-120"/>
               </a:rPr>
-              <a:t>Summer is king — but winter matters</a:t>
-            </a:r>
-            <a:endParaRPr lang="en-US" sz="1200" dirty="0"/>
+              <a:t>Summer is king, </a:t>
+            </a:r>
+            <a:r>
+              <a:rPr lang="pt-BR" sz="1200" b="1" dirty="0" err="1">
+                <a:solidFill>
+                  <a:srgbClr val="0D7EA8"/>
+                </a:solidFill>
+                <a:latin typeface="Arial" pitchFamily="34" charset="0"/>
+                <a:cs typeface="Arial" pitchFamily="34" charset="-120"/>
+              </a:rPr>
+              <a:t>but</a:t>
+            </a:r>
+            <a:r>
+              <a:rPr lang="pt-BR" sz="1200" b="1" dirty="0">
+                <a:solidFill>
+                  <a:srgbClr val="0D7EA8"/>
+                </a:solidFill>
+                <a:latin typeface="Arial" pitchFamily="34" charset="0"/>
+                <a:cs typeface="Arial" pitchFamily="34" charset="-120"/>
+              </a:rPr>
+              <a:t> </a:t>
+            </a:r>
+            <a:r>
+              <a:rPr lang="pt-BR" sz="1200" b="1" dirty="0" err="1">
+                <a:solidFill>
+                  <a:srgbClr val="0D7EA8"/>
+                </a:solidFill>
+                <a:latin typeface="Arial" pitchFamily="34" charset="0"/>
+                <a:cs typeface="Arial" pitchFamily="34" charset="-120"/>
+              </a:rPr>
+              <a:t>every</a:t>
+            </a:r>
+            <a:r>
+              <a:rPr lang="pt-BR" sz="1200" b="1" dirty="0">
+                <a:solidFill>
+                  <a:srgbClr val="0D7EA8"/>
+                </a:solidFill>
+                <a:latin typeface="Arial" pitchFamily="34" charset="0"/>
+                <a:cs typeface="Arial" pitchFamily="34" charset="-120"/>
+              </a:rPr>
+              <a:t> </a:t>
+            </a:r>
+            <a:r>
+              <a:rPr lang="pt-BR" sz="1200" b="1" dirty="0" err="1">
+                <a:solidFill>
+                  <a:srgbClr val="0D7EA8"/>
+                </a:solidFill>
+                <a:latin typeface="Arial" pitchFamily="34" charset="0"/>
+                <a:cs typeface="Arial" pitchFamily="34" charset="-120"/>
+              </a:rPr>
+              <a:t>season</a:t>
+            </a:r>
+            <a:r>
+              <a:rPr lang="pt-BR" sz="1200" b="1" dirty="0">
+                <a:solidFill>
+                  <a:srgbClr val="0D7EA8"/>
+                </a:solidFill>
+                <a:latin typeface="Arial" pitchFamily="34" charset="0"/>
+                <a:cs typeface="Arial" pitchFamily="34" charset="-120"/>
+              </a:rPr>
+              <a:t> </a:t>
+            </a:r>
+            <a:r>
+              <a:rPr lang="pt-BR" sz="1200" b="1" dirty="0" err="1">
+                <a:solidFill>
+                  <a:srgbClr val="0D7EA8"/>
+                </a:solidFill>
+                <a:latin typeface="Arial" pitchFamily="34" charset="0"/>
+                <a:cs typeface="Arial" pitchFamily="34" charset="-120"/>
+              </a:rPr>
+              <a:t>matters</a:t>
+            </a:r>
+            <a:endParaRPr lang="pt-BR" sz="1200" b="1" dirty="0">
+              <a:solidFill>
+                <a:srgbClr val="0D7EA8"/>
+              </a:solidFill>
+              <a:latin typeface="Arial" pitchFamily="34" charset="0"/>
+              <a:cs typeface="Arial" pitchFamily="34" charset="-120"/>
+            </a:endParaRPr>
           </a:p>
         </p:txBody>
       </p:sp>
@@ -5721,21 +5786,16 @@
           <a:bodyPr wrap="square" lIns="0" tIns="0" rIns="0" bIns="0" rtlCol="0" anchor="ctr"/>
           <a:lstStyle/>
           <a:p>
-            <a:pPr marL="0" indent="0">
-              <a:buNone/>
-            </a:pPr>
             <a:r>
               <a:rPr lang="en-US" sz="1400" dirty="0">
                 <a:solidFill>
                   <a:srgbClr val="2C3E50"/>
                 </a:solidFill>
                 <a:latin typeface="Arial" pitchFamily="34" charset="0"/>
-                <a:ea typeface="Arial" pitchFamily="34" charset="-122"/>
-                <a:cs typeface="Arial" pitchFamily="34" charset="-120"/>
-              </a:rPr>
-              <a:t>40% of arrivals in summer (Carnaval + Réveillon + beach season). Winter secondary peak from Northern Hemisphere school holidays.</a:t>
-            </a:r>
-            <a:endParaRPr lang="en-US" sz="1400" dirty="0"/>
+                <a:cs typeface="Arial" pitchFamily="34" charset="-120"/>
+              </a:rPr>
+              <a:t>40% of arrivals happen in summer, driven by Carnaval, Réveillon and beach season. The remaining seasons share the rest in a surprisingly balanced split.</a:t>
+            </a:r>
           </a:p>
         </p:txBody>
       </p:sp>
@@ -5817,9 +5877,6 @@
           <a:bodyPr wrap="square" lIns="0" tIns="0" rIns="0" bIns="0" rtlCol="0" anchor="ctr"/>
           <a:lstStyle/>
           <a:p>
-            <a:pPr marL="0" indent="0">
-              <a:buNone/>
-            </a:pPr>
             <a:r>
               <a:rPr lang="en-US" sz="1200" b="1" dirty="0">
                 <a:solidFill>
@@ -5829,9 +5886,18 @@
                 <a:ea typeface="Arial" pitchFamily="34" charset="-122"/>
                 <a:cs typeface="Arial" pitchFamily="34" charset="-120"/>
               </a:rPr>
-              <a:t>Air dominates, sea recovering slowest</a:t>
-            </a:r>
-            <a:endParaRPr lang="en-US" sz="1200" dirty="0"/>
+              <a:t>Air and Land dominates</a:t>
+            </a:r>
+            <a:r>
+              <a:rPr lang="en-US" sz="1200" b="1" dirty="0">
+                <a:solidFill>
+                  <a:srgbClr val="0D7EA8"/>
+                </a:solidFill>
+                <a:latin typeface="Arial" pitchFamily="34" charset="0"/>
+                <a:cs typeface="Arial" pitchFamily="34" charset="-120"/>
+              </a:rPr>
+              <a:t>, but the mix has shifted </a:t>
+            </a:r>
           </a:p>
         </p:txBody>
       </p:sp>
@@ -5843,7 +5909,7 @@
         </p:nvSpPr>
         <p:spPr>
           <a:xfrm>
-            <a:off x="4965192" y="3429000"/>
+            <a:off x="4965192" y="3383280"/>
             <a:ext cx="3840480" cy="1005840"/>
           </a:xfrm>
           <a:prstGeom prst="rect">
@@ -5856,21 +5922,16 @@
           <a:bodyPr wrap="square" lIns="0" tIns="0" rIns="0" bIns="0" rtlCol="0" anchor="ctr"/>
           <a:lstStyle/>
           <a:p>
-            <a:pPr marL="0" indent="0">
-              <a:buNone/>
-            </a:pPr>
             <a:r>
               <a:rPr lang="en-US" sz="1400" dirty="0">
                 <a:solidFill>
                   <a:srgbClr val="2C3E50"/>
                 </a:solidFill>
                 <a:latin typeface="Arial" pitchFamily="34" charset="0"/>
-                <a:ea typeface="Arial" pitchFamily="34" charset="-122"/>
-                <a:cs typeface="Arial" pitchFamily="34" charset="-120"/>
-              </a:rPr>
-              <a:t>Air entries recovering fastest post-COVID. Sea entries (cruise ships) show the slowest recovery — cruise tourism rebuilds confidence slowly.</a:t>
-            </a:r>
-            <a:endParaRPr lang="en-US" sz="1400" dirty="0"/>
+                <a:cs typeface="Arial" pitchFamily="34" charset="-120"/>
+              </a:rPr>
+              <a:t>Air entries have fully recovered and lead the rebound. Sea and river entries swapped positions post-COVID, signaling a shift in how visitors arrive.</a:t>
+            </a:r>
           </a:p>
         </p:txBody>
       </p:sp>
